--- a/5月22日峰会/导出文件/2026峰会会务汇报.pptx
+++ b/5月22日峰会/导出文件/2026峰会会务汇报.pptx
@@ -3358,7 +3358,7 @@
                 </a:solidFill>
                 <a:latin typeface="WenQuanYi Micro Hei"/>
               </a:rPr>
-              <a:t>主办：北大经院上海校友会 · 复旦大学住房政策研究中心</a:t>
+              <a:t>主办：北京大学经济学院上海校友会 · 复旦大学住房政策研究中心</a:t>
             </a:r>
           </a:p>
         </p:txBody>
@@ -3393,7 +3393,7 @@
                 </a:solidFill>
                 <a:latin typeface="WenQuanYi Micro Hei"/>
               </a:rPr>
-              <a:t>晚宴冠名战略合作伙伴：绿城中国</a:t>
+              <a:t>晚宴冠名战略合作伙伴：绿城中国 |【绿城·潮鸣】星耀北外滩</a:t>
             </a:r>
           </a:p>
         </p:txBody>
@@ -3683,7 +3683,7 @@
                 </a:solidFill>
                 <a:latin typeface="WenQuanYi Micro Hei"/>
               </a:rPr>
-              <a:t>本届峰会得以呈现，特别感谢——晚宴冠名战略合作伙伴 绿城中国；战略合作伙伴 腾讯云、福布斯中国；特约赞助商 蔚来、泰隆银行；赞助方 茶活力、美年大健康、复金汇、古井贡酒·年份原浆。让我们再次以掌声致谢。</a:t>
+              <a:t>本届峰会得以呈现，特别感谢——晚宴冠名战略合作伙伴 绿城中国；战略合作伙伴 腾讯云、福布斯中国人工智能科技企业评选委员会；特约赞助商 蔚来汽车、泰隆银行；赞助方 茶活力、美年大健康、复金汇、古井贡酒·年份原浆。让我们再次以掌声致谢。</a:t>
             </a:r>
           </a:p>
         </p:txBody>
@@ -3718,7 +3718,7 @@
                 </a:solidFill>
                 <a:latin typeface="WenQuanYi Micro Hei"/>
               </a:rPr>
-              <a:t>B · 分时段定点口播</a:t>
+              <a:t>B · 分时段定点口播（按官方最终定稿议程）</a:t>
             </a:r>
           </a:p>
         </p:txBody>
@@ -3742,9 +3742,9 @@
                 <a:tableStyleId>{5C22544A-7EE6-4342-B048-85BDC9FD1C3A}</a:tableStyleId>
               </a:tblPr>
               <a:tblGrid>
-                <a:gridCol w="1371600"/>
-                <a:gridCol w="2011680"/>
-                <a:gridCol w="6675120"/>
+                <a:gridCol w="1188720"/>
+                <a:gridCol w="2377440"/>
+                <a:gridCol w="6492240"/>
                 <a:gridCol w="1371600"/>
               </a:tblGrid>
               <a:tr h="445770">
@@ -3878,53 +3878,53 @@
                           </a:solidFill>
                           <a:latin typeface="WenQuanYi Micro Hei"/>
                         </a:rPr>
-                        <a:t>圆桌一前</a:t>
-                      </a:r>
-                    </a:p>
-                  </a:txBody>
-                  <a:tcPr>
-                    <a:solidFill>
-                      <a:srgbClr val="FFFFFF"/>
-                    </a:solidFill>
-                  </a:tcPr>
-                </a:tc>
-                <a:tc>
-                  <a:txBody>
-                    <a:bodyPr/>
-                    <a:lstStyle/>
-                    <a:p>
-                      <a:pPr algn="l"/>
-                      <a:r>
-                        <a:rPr sz="1000" b="0">
-                          <a:solidFill>
-                            <a:srgbClr val="333333"/>
-                          </a:solidFill>
-                          <a:latin typeface="WenQuanYi Micro Hei"/>
-                        </a:rPr>
-                        <a:t>感谢战略合作伙伴 腾讯云 的鼎力支持。</a:t>
-                      </a:r>
-                    </a:p>
-                  </a:txBody>
-                  <a:tcPr>
-                    <a:solidFill>
-                      <a:srgbClr val="FFFFFF"/>
-                    </a:solidFill>
-                  </a:tcPr>
-                </a:tc>
-                <a:tc>
-                  <a:txBody>
-                    <a:bodyPr/>
-                    <a:lstStyle/>
-                    <a:p>
-                      <a:pPr algn="l"/>
-                      <a:r>
-                        <a:rPr sz="1000" b="0">
-                          <a:solidFill>
-                            <a:srgbClr val="333333"/>
-                          </a:solidFill>
-                          <a:latin typeface="WenQuanYi Micro Hei"/>
-                        </a:rPr>
-                        <a:t>王珏</a:t>
+                        <a:t>★ 颁奖典礼</a:t>
+                      </a:r>
+                    </a:p>
+                  </a:txBody>
+                  <a:tcPr>
+                    <a:solidFill>
+                      <a:srgbClr val="FFFFFF"/>
+                    </a:solidFill>
+                  </a:tcPr>
+                </a:tc>
+                <a:tc>
+                  <a:txBody>
+                    <a:bodyPr/>
+                    <a:lstStyle/>
+                    <a:p>
+                      <a:pPr algn="l"/>
+                      <a:r>
+                        <a:rPr sz="1000" b="0">
+                          <a:solidFill>
+                            <a:srgbClr val="333333"/>
+                          </a:solidFill>
+                          <a:latin typeface="WenQuanYi Micro Hei"/>
+                        </a:rPr>
+                        <a:t>感谢福布斯中国 AI 评选委员会 联合颁布本届年度领军机构。</a:t>
+                      </a:r>
+                    </a:p>
+                  </a:txBody>
+                  <a:tcPr>
+                    <a:solidFill>
+                      <a:srgbClr val="FFFFFF"/>
+                    </a:solidFill>
+                  </a:tcPr>
+                </a:tc>
+                <a:tc>
+                  <a:txBody>
+                    <a:bodyPr/>
+                    <a:lstStyle/>
+                    <a:p>
+                      <a:pPr algn="l"/>
+                      <a:r>
+                        <a:rPr sz="1000" b="0">
+                          <a:solidFill>
+                            <a:srgbClr val="333333"/>
+                          </a:solidFill>
+                          <a:latin typeface="WenQuanYi Micro Hei"/>
+                        </a:rPr>
+                        <a:t>姚志勇 / 胡继刚</a:t>
                       </a:r>
                     </a:p>
                   </a:txBody>
@@ -3949,76 +3949,76 @@
                           </a:solidFill>
                           <a:latin typeface="WenQuanYi Micro Hei"/>
                         </a:rPr>
-                        <a:t>15:05</a:t>
-                      </a:r>
-                    </a:p>
-                  </a:txBody>
-                  <a:tcPr>
-                    <a:solidFill>
-                      <a:srgbClr val="D9E1F2"/>
-                    </a:solidFill>
-                  </a:tcPr>
-                </a:tc>
-                <a:tc>
-                  <a:txBody>
-                    <a:bodyPr/>
-                    <a:lstStyle/>
-                    <a:p>
-                      <a:pPr algn="l"/>
-                      <a:r>
-                        <a:rPr sz="1000" b="0">
-                          <a:solidFill>
-                            <a:srgbClr val="333333"/>
-                          </a:solidFill>
-                          <a:latin typeface="WenQuanYi Micro Hei"/>
-                        </a:rPr>
-                        <a:t>巅峰对话前</a:t>
-                      </a:r>
-                    </a:p>
-                  </a:txBody>
-                  <a:tcPr>
-                    <a:solidFill>
-                      <a:srgbClr val="D9E1F2"/>
-                    </a:solidFill>
-                  </a:tcPr>
-                </a:tc>
-                <a:tc>
-                  <a:txBody>
-                    <a:bodyPr/>
-                    <a:lstStyle/>
-                    <a:p>
-                      <a:pPr algn="l"/>
-                      <a:r>
-                        <a:rPr sz="1000" b="0">
-                          <a:solidFill>
-                            <a:srgbClr val="333333"/>
-                          </a:solidFill>
-                          <a:latin typeface="WenQuanYi Micro Hei"/>
-                        </a:rPr>
-                        <a:t>巅峰对话由 腾讯云 联合呈现，福布斯中国共同发布评选成果。</a:t>
-                      </a:r>
-                    </a:p>
-                  </a:txBody>
-                  <a:tcPr>
-                    <a:solidFill>
-                      <a:srgbClr val="D9E1F2"/>
-                    </a:solidFill>
-                  </a:tcPr>
-                </a:tc>
-                <a:tc>
-                  <a:txBody>
-                    <a:bodyPr/>
-                    <a:lstStyle/>
-                    <a:p>
-                      <a:pPr algn="l"/>
-                      <a:r>
-                        <a:rPr sz="1000" b="0">
-                          <a:solidFill>
-                            <a:srgbClr val="333333"/>
-                          </a:solidFill>
-                          <a:latin typeface="WenQuanYi Micro Hei"/>
-                        </a:rPr>
-                        <a:t>胡继刚</a:t>
+                        <a:t>14:40</a:t>
+                      </a:r>
+                    </a:p>
+                  </a:txBody>
+                  <a:tcPr>
+                    <a:solidFill>
+                      <a:srgbClr val="D9E1F2"/>
+                    </a:solidFill>
+                  </a:tcPr>
+                </a:tc>
+                <a:tc>
+                  <a:txBody>
+                    <a:bodyPr/>
+                    <a:lstStyle/>
+                    <a:p>
+                      <a:pPr algn="l"/>
+                      <a:r>
+                        <a:rPr sz="1000" b="0">
+                          <a:solidFill>
+                            <a:srgbClr val="333333"/>
+                          </a:solidFill>
+                          <a:latin typeface="WenQuanYi Micro Hei"/>
+                        </a:rPr>
+                        <a:t>圆桌一前</a:t>
+                      </a:r>
+                    </a:p>
+                  </a:txBody>
+                  <a:tcPr>
+                    <a:solidFill>
+                      <a:srgbClr val="D9E1F2"/>
+                    </a:solidFill>
+                  </a:tcPr>
+                </a:tc>
+                <a:tc>
+                  <a:txBody>
+                    <a:bodyPr/>
+                    <a:lstStyle/>
+                    <a:p>
+                      <a:pPr algn="l"/>
+                      <a:r>
+                        <a:rPr sz="1000" b="0">
+                          <a:solidFill>
+                            <a:srgbClr val="333333"/>
+                          </a:solidFill>
+                          <a:latin typeface="WenQuanYi Micro Hei"/>
+                        </a:rPr>
+                        <a:t>感谢战略合作伙伴 腾讯云 的鼎力支持。</a:t>
+                      </a:r>
+                    </a:p>
+                  </a:txBody>
+                  <a:tcPr>
+                    <a:solidFill>
+                      <a:srgbClr val="D9E1F2"/>
+                    </a:solidFill>
+                  </a:tcPr>
+                </a:tc>
+                <a:tc>
+                  <a:txBody>
+                    <a:bodyPr/>
+                    <a:lstStyle/>
+                    <a:p>
+                      <a:pPr algn="l"/>
+                      <a:r>
+                        <a:rPr sz="1000" b="0">
+                          <a:solidFill>
+                            <a:srgbClr val="333333"/>
+                          </a:solidFill>
+                          <a:latin typeface="WenQuanYi Micro Hei"/>
+                        </a:rPr>
+                        <a:t>王珏</a:t>
                       </a:r>
                     </a:p>
                   </a:txBody>
@@ -4043,76 +4043,76 @@
                           </a:solidFill>
                           <a:latin typeface="WenQuanYi Micro Hei"/>
                         </a:rPr>
-                        <a:t>15:45</a:t>
-                      </a:r>
-                    </a:p>
-                  </a:txBody>
-                  <a:tcPr>
-                    <a:solidFill>
-                      <a:srgbClr val="FFFFFF"/>
-                    </a:solidFill>
-                  </a:tcPr>
-                </a:tc>
-                <a:tc>
-                  <a:txBody>
-                    <a:bodyPr/>
-                    <a:lstStyle/>
-                    <a:p>
-                      <a:pPr algn="l"/>
-                      <a:r>
-                        <a:rPr sz="1000" b="0">
-                          <a:solidFill>
-                            <a:srgbClr val="333333"/>
-                          </a:solidFill>
-                          <a:latin typeface="WenQuanYi Micro Hei"/>
-                        </a:rPr>
-                        <a:t>中场前</a:t>
-                      </a:r>
-                    </a:p>
-                  </a:txBody>
-                  <a:tcPr>
-                    <a:solidFill>
-                      <a:srgbClr val="FFFFFF"/>
-                    </a:solidFill>
-                  </a:tcPr>
-                </a:tc>
-                <a:tc>
-                  <a:txBody>
-                    <a:bodyPr/>
-                    <a:lstStyle/>
-                    <a:p>
-                      <a:pPr algn="l"/>
-                      <a:r>
-                        <a:rPr sz="1000" b="0">
-                          <a:solidFill>
-                            <a:srgbClr val="333333"/>
-                          </a:solidFill>
-                          <a:latin typeface="WenQuanYi Micro Hei"/>
-                        </a:rPr>
-                        <a:t>中场由 茶活力 与 美年大健康 共同支持。</a:t>
-                      </a:r>
-                    </a:p>
-                  </a:txBody>
-                  <a:tcPr>
-                    <a:solidFill>
-                      <a:srgbClr val="FFFFFF"/>
-                    </a:solidFill>
-                  </a:tcPr>
-                </a:tc>
-                <a:tc>
-                  <a:txBody>
-                    <a:bodyPr/>
-                    <a:lstStyle/>
-                    <a:p>
-                      <a:pPr algn="l"/>
-                      <a:r>
-                        <a:rPr sz="1000" b="0">
-                          <a:solidFill>
-                            <a:srgbClr val="333333"/>
-                          </a:solidFill>
-                          <a:latin typeface="WenQuanYi Micro Hei"/>
-                        </a:rPr>
-                        <a:t>主持人</a:t>
+                        <a:t>15:20</a:t>
+                      </a:r>
+                    </a:p>
+                  </a:txBody>
+                  <a:tcPr>
+                    <a:solidFill>
+                      <a:srgbClr val="FFFFFF"/>
+                    </a:solidFill>
+                  </a:tcPr>
+                </a:tc>
+                <a:tc>
+                  <a:txBody>
+                    <a:bodyPr/>
+                    <a:lstStyle/>
+                    <a:p>
+                      <a:pPr algn="l"/>
+                      <a:r>
+                        <a:rPr sz="1000" b="0">
+                          <a:solidFill>
+                            <a:srgbClr val="333333"/>
+                          </a:solidFill>
+                          <a:latin typeface="WenQuanYi Micro Hei"/>
+                        </a:rPr>
+                        <a:t>圆桌二（巅峰对话）前</a:t>
+                      </a:r>
+                    </a:p>
+                  </a:txBody>
+                  <a:tcPr>
+                    <a:solidFill>
+                      <a:srgbClr val="FFFFFF"/>
+                    </a:solidFill>
+                  </a:tcPr>
+                </a:tc>
+                <a:tc>
+                  <a:txBody>
+                    <a:bodyPr/>
+                    <a:lstStyle/>
+                    <a:p>
+                      <a:pPr algn="l"/>
+                      <a:r>
+                        <a:rPr sz="1000" b="0">
+                          <a:solidFill>
+                            <a:srgbClr val="333333"/>
+                          </a:solidFill>
+                          <a:latin typeface="WenQuanYi Micro Hei"/>
+                        </a:rPr>
+                        <a:t>巅峰对话【从算力引擎到新质资产】由 腾讯云 联合呈现。</a:t>
+                      </a:r>
+                    </a:p>
+                  </a:txBody>
+                  <a:tcPr>
+                    <a:solidFill>
+                      <a:srgbClr val="FFFFFF"/>
+                    </a:solidFill>
+                  </a:tcPr>
+                </a:tc>
+                <a:tc>
+                  <a:txBody>
+                    <a:bodyPr/>
+                    <a:lstStyle/>
+                    <a:p>
+                      <a:pPr algn="l"/>
+                      <a:r>
+                        <a:rPr sz="1000" b="0">
+                          <a:solidFill>
+                            <a:srgbClr val="333333"/>
+                          </a:solidFill>
+                          <a:latin typeface="WenQuanYi Micro Hei"/>
+                        </a:rPr>
+                        <a:t>胡继刚</a:t>
                       </a:r>
                     </a:p>
                   </a:txBody>
@@ -4137,53 +4137,53 @@
                           </a:solidFill>
                           <a:latin typeface="WenQuanYi Micro Hei"/>
                         </a:rPr>
-                        <a:t>16:35</a:t>
-                      </a:r>
-                    </a:p>
-                  </a:txBody>
-                  <a:tcPr>
-                    <a:solidFill>
-                      <a:srgbClr val="D9E1F2"/>
-                    </a:solidFill>
-                  </a:tcPr>
-                </a:tc>
-                <a:tc>
-                  <a:txBody>
-                    <a:bodyPr/>
-                    <a:lstStyle/>
-                    <a:p>
-                      <a:pPr algn="l"/>
-                      <a:r>
-                        <a:rPr sz="1000" b="0">
-                          <a:solidFill>
-                            <a:srgbClr val="333333"/>
-                          </a:solidFill>
-                          <a:latin typeface="WenQuanYi Micro Hei"/>
-                        </a:rPr>
-                        <a:t>主旨 3 前</a:t>
-                      </a:r>
-                    </a:p>
-                  </a:txBody>
-                  <a:tcPr>
-                    <a:solidFill>
-                      <a:srgbClr val="D9E1F2"/>
-                    </a:solidFill>
-                  </a:tcPr>
-                </a:tc>
-                <a:tc>
-                  <a:txBody>
-                    <a:bodyPr/>
-                    <a:lstStyle/>
-                    <a:p>
-                      <a:pPr algn="l"/>
-                      <a:r>
-                        <a:rPr sz="1000" b="0">
-                          <a:solidFill>
-                            <a:srgbClr val="333333"/>
-                          </a:solidFill>
-                          <a:latin typeface="WenQuanYi Micro Hei"/>
-                        </a:rPr>
-                        <a:t>感谢特约赞助商 泰隆银行，深耕科技金融。</a:t>
+                        <a:t>16:00</a:t>
+                      </a:r>
+                    </a:p>
+                  </a:txBody>
+                  <a:tcPr>
+                    <a:solidFill>
+                      <a:srgbClr val="D9E1F2"/>
+                    </a:solidFill>
+                  </a:tcPr>
+                </a:tc>
+                <a:tc>
+                  <a:txBody>
+                    <a:bodyPr/>
+                    <a:lstStyle/>
+                    <a:p>
+                      <a:pPr algn="l"/>
+                      <a:r>
+                        <a:rPr sz="1000" b="0">
+                          <a:solidFill>
+                            <a:srgbClr val="333333"/>
+                          </a:solidFill>
+                          <a:latin typeface="WenQuanYi Micro Hei"/>
+                        </a:rPr>
+                        <a:t>中场前</a:t>
+                      </a:r>
+                    </a:p>
+                  </a:txBody>
+                  <a:tcPr>
+                    <a:solidFill>
+                      <a:srgbClr val="D9E1F2"/>
+                    </a:solidFill>
+                  </a:tcPr>
+                </a:tc>
+                <a:tc>
+                  <a:txBody>
+                    <a:bodyPr/>
+                    <a:lstStyle/>
+                    <a:p>
+                      <a:pPr algn="l"/>
+                      <a:r>
+                        <a:rPr sz="1000" b="0">
+                          <a:solidFill>
+                            <a:srgbClr val="333333"/>
+                          </a:solidFill>
+                          <a:latin typeface="WenQuanYi Micro Hei"/>
+                        </a:rPr>
+                        <a:t>中场由 茶活力 与 美年大健康 共同支持。</a:t>
                       </a:r>
                     </a:p>
                   </a:txBody>
@@ -4231,76 +4231,76 @@
                           </a:solidFill>
                           <a:latin typeface="WenQuanYi Micro Hei"/>
                         </a:rPr>
-                        <a:t>17:35</a:t>
-                      </a:r>
-                    </a:p>
-                  </a:txBody>
-                  <a:tcPr>
-                    <a:solidFill>
-                      <a:srgbClr val="FFFFFF"/>
-                    </a:solidFill>
-                  </a:tcPr>
-                </a:tc>
-                <a:tc>
-                  <a:txBody>
-                    <a:bodyPr/>
-                    <a:lstStyle/>
-                    <a:p>
-                      <a:pPr algn="l"/>
-                      <a:r>
-                        <a:rPr sz="1000" b="0">
-                          <a:solidFill>
-                            <a:srgbClr val="333333"/>
-                          </a:solidFill>
-                          <a:latin typeface="WenQuanYi Micro Hei"/>
-                        </a:rPr>
-                        <a:t>投资圆桌前</a:t>
-                      </a:r>
-                    </a:p>
-                  </a:txBody>
-                  <a:tcPr>
-                    <a:solidFill>
-                      <a:srgbClr val="FFFFFF"/>
-                    </a:solidFill>
-                  </a:tcPr>
-                </a:tc>
-                <a:tc>
-                  <a:txBody>
-                    <a:bodyPr/>
-                    <a:lstStyle/>
-                    <a:p>
-                      <a:pPr algn="l"/>
-                      <a:r>
-                        <a:rPr sz="1000" b="0">
-                          <a:solidFill>
-                            <a:srgbClr val="333333"/>
-                          </a:solidFill>
-                          <a:latin typeface="WenQuanYi Micro Hei"/>
-                        </a:rPr>
-                        <a:t>投资大圆桌由 复金汇 战略支持。</a:t>
-                      </a:r>
-                    </a:p>
-                  </a:txBody>
-                  <a:tcPr>
-                    <a:solidFill>
-                      <a:srgbClr val="FFFFFF"/>
-                    </a:solidFill>
-                  </a:tcPr>
-                </a:tc>
-                <a:tc>
-                  <a:txBody>
-                    <a:bodyPr/>
-                    <a:lstStyle/>
-                    <a:p>
-                      <a:pPr algn="l"/>
-                      <a:r>
-                        <a:rPr sz="1000" b="0">
-                          <a:solidFill>
-                            <a:srgbClr val="333333"/>
-                          </a:solidFill>
-                          <a:latin typeface="WenQuanYi Micro Hei"/>
-                        </a:rPr>
-                        <a:t>黄欣</a:t>
+                        <a:t>16:50</a:t>
+                      </a:r>
+                    </a:p>
+                  </a:txBody>
+                  <a:tcPr>
+                    <a:solidFill>
+                      <a:srgbClr val="FFFFFF"/>
+                    </a:solidFill>
+                  </a:tcPr>
+                </a:tc>
+                <a:tc>
+                  <a:txBody>
+                    <a:bodyPr/>
+                    <a:lstStyle/>
+                    <a:p>
+                      <a:pPr algn="l"/>
+                      <a:r>
+                        <a:rPr sz="1000" b="0">
+                          <a:solidFill>
+                            <a:srgbClr val="333333"/>
+                          </a:solidFill>
+                          <a:latin typeface="WenQuanYi Micro Hei"/>
+                        </a:rPr>
+                        <a:t>主旨 3 前</a:t>
+                      </a:r>
+                    </a:p>
+                  </a:txBody>
+                  <a:tcPr>
+                    <a:solidFill>
+                      <a:srgbClr val="FFFFFF"/>
+                    </a:solidFill>
+                  </a:tcPr>
+                </a:tc>
+                <a:tc>
+                  <a:txBody>
+                    <a:bodyPr/>
+                    <a:lstStyle/>
+                    <a:p>
+                      <a:pPr algn="l"/>
+                      <a:r>
+                        <a:rPr sz="1000" b="0">
+                          <a:solidFill>
+                            <a:srgbClr val="333333"/>
+                          </a:solidFill>
+                          <a:latin typeface="WenQuanYi Micro Hei"/>
+                        </a:rPr>
+                        <a:t>感谢特约赞助商 泰隆银行，深耕科技金融。</a:t>
+                      </a:r>
+                    </a:p>
+                  </a:txBody>
+                  <a:tcPr>
+                    <a:solidFill>
+                      <a:srgbClr val="FFFFFF"/>
+                    </a:solidFill>
+                  </a:tcPr>
+                </a:tc>
+                <a:tc>
+                  <a:txBody>
+                    <a:bodyPr/>
+                    <a:lstStyle/>
+                    <a:p>
+                      <a:pPr algn="l"/>
+                      <a:r>
+                        <a:rPr sz="1000" b="0">
+                          <a:solidFill>
+                            <a:srgbClr val="333333"/>
+                          </a:solidFill>
+                          <a:latin typeface="WenQuanYi Micro Hei"/>
+                        </a:rPr>
+                        <a:t>主持人</a:t>
                       </a:r>
                     </a:p>
                   </a:txBody>
@@ -4325,76 +4325,76 @@
                           </a:solidFill>
                           <a:latin typeface="WenQuanYi Micro Hei"/>
                         </a:rPr>
-                        <a:t>18:15</a:t>
-                      </a:r>
-                    </a:p>
-                  </a:txBody>
-                  <a:tcPr>
-                    <a:solidFill>
-                      <a:srgbClr val="D9E1F2"/>
-                    </a:solidFill>
-                  </a:tcPr>
-                </a:tc>
-                <a:tc>
-                  <a:txBody>
-                    <a:bodyPr/>
-                    <a:lstStyle/>
-                    <a:p>
-                      <a:pPr algn="l"/>
-                      <a:r>
-                        <a:rPr sz="1000" b="0">
-                          <a:solidFill>
-                            <a:srgbClr val="333333"/>
-                          </a:solidFill>
-                          <a:latin typeface="WenQuanYi Micro Hei"/>
-                        </a:rPr>
-                        <a:t>颁奖典礼</a:t>
-                      </a:r>
-                    </a:p>
-                  </a:txBody>
-                  <a:tcPr>
-                    <a:solidFill>
-                      <a:srgbClr val="D9E1F2"/>
-                    </a:solidFill>
-                  </a:tcPr>
-                </a:tc>
-                <a:tc>
-                  <a:txBody>
-                    <a:bodyPr/>
-                    <a:lstStyle/>
-                    <a:p>
-                      <a:pPr algn="l"/>
-                      <a:r>
-                        <a:rPr sz="1000" b="0">
-                          <a:solidFill>
-                            <a:srgbClr val="333333"/>
-                          </a:solidFill>
-                          <a:latin typeface="WenQuanYi Micro Hei"/>
-                        </a:rPr>
-                        <a:t>感谢福布斯中国 联合颁布年度领军机构。</a:t>
-                      </a:r>
-                    </a:p>
-                  </a:txBody>
-                  <a:tcPr>
-                    <a:solidFill>
-                      <a:srgbClr val="D9E1F2"/>
-                    </a:solidFill>
-                  </a:tcPr>
-                </a:tc>
-                <a:tc>
-                  <a:txBody>
-                    <a:bodyPr/>
-                    <a:lstStyle/>
-                    <a:p>
-                      <a:pPr algn="l"/>
-                      <a:r>
-                        <a:rPr sz="1000" b="0">
-                          <a:solidFill>
-                            <a:srgbClr val="333333"/>
-                          </a:solidFill>
-                          <a:latin typeface="WenQuanYi Micro Hei"/>
-                        </a:rPr>
-                        <a:t>姚志勇</a:t>
+                        <a:t>17:50</a:t>
+                      </a:r>
+                    </a:p>
+                  </a:txBody>
+                  <a:tcPr>
+                    <a:solidFill>
+                      <a:srgbClr val="D9E1F2"/>
+                    </a:solidFill>
+                  </a:tcPr>
+                </a:tc>
+                <a:tc>
+                  <a:txBody>
+                    <a:bodyPr/>
+                    <a:lstStyle/>
+                    <a:p>
+                      <a:pPr algn="l"/>
+                      <a:r>
+                        <a:rPr sz="1000" b="0">
+                          <a:solidFill>
+                            <a:srgbClr val="333333"/>
+                          </a:solidFill>
+                          <a:latin typeface="WenQuanYi Micro Hei"/>
+                        </a:rPr>
+                        <a:t>圆桌三 + 闭幕前</a:t>
+                      </a:r>
+                    </a:p>
+                  </a:txBody>
+                  <a:tcPr>
+                    <a:solidFill>
+                      <a:srgbClr val="D9E1F2"/>
+                    </a:solidFill>
+                  </a:tcPr>
+                </a:tc>
+                <a:tc>
+                  <a:txBody>
+                    <a:bodyPr/>
+                    <a:lstStyle/>
+                    <a:p>
+                      <a:pPr algn="l"/>
+                      <a:r>
+                        <a:rPr sz="1000" b="0">
+                          <a:solidFill>
+                            <a:srgbClr val="333333"/>
+                          </a:solidFill>
+                          <a:latin typeface="WenQuanYi Micro Hei"/>
+                        </a:rPr>
+                        <a:t>投资大圆桌由 复金汇 战略支持，本环节同时为闭幕仪式。</a:t>
+                      </a:r>
+                    </a:p>
+                  </a:txBody>
+                  <a:tcPr>
+                    <a:solidFill>
+                      <a:srgbClr val="D9E1F2"/>
+                    </a:solidFill>
+                  </a:tcPr>
+                </a:tc>
+                <a:tc>
+                  <a:txBody>
+                    <a:bodyPr/>
+                    <a:lstStyle/>
+                    <a:p>
+                      <a:pPr algn="l"/>
+                      <a:r>
+                        <a:rPr sz="1000" b="0">
+                          <a:solidFill>
+                            <a:srgbClr val="333333"/>
+                          </a:solidFill>
+                          <a:latin typeface="WenQuanYi Micro Hei"/>
+                        </a:rPr>
+                        <a:t>黄欣</a:t>
                       </a:r>
                     </a:p>
                   </a:txBody>
@@ -4442,30 +4442,30 @@
                           </a:solidFill>
                           <a:latin typeface="WenQuanYi Micro Hei"/>
                         </a:rPr>
-                        <a:t>晚宴开场</a:t>
-                      </a:r>
-                    </a:p>
-                  </a:txBody>
-                  <a:tcPr>
-                    <a:solidFill>
-                      <a:srgbClr val="FFFFFF"/>
-                    </a:solidFill>
-                  </a:tcPr>
-                </a:tc>
-                <a:tc>
-                  <a:txBody>
-                    <a:bodyPr/>
-                    <a:lstStyle/>
-                    <a:p>
-                      <a:pPr algn="l"/>
-                      <a:r>
-                        <a:rPr sz="1000" b="0">
-                          <a:solidFill>
-                            <a:srgbClr val="333333"/>
-                          </a:solidFill>
-                          <a:latin typeface="WenQuanYi Micro Hei"/>
-                        </a:rPr>
-                        <a:t>晚宴由 绿城中国 冠名，古井贡酒 为晚宴用酒，蔚来 为出行合作伙伴。</a:t>
+                        <a:t>【绿城·潮鸣】晚宴开场</a:t>
+                      </a:r>
+                    </a:p>
+                  </a:txBody>
+                  <a:tcPr>
+                    <a:solidFill>
+                      <a:srgbClr val="FFFFFF"/>
+                    </a:solidFill>
+                  </a:tcPr>
+                </a:tc>
+                <a:tc>
+                  <a:txBody>
+                    <a:bodyPr/>
+                    <a:lstStyle/>
+                    <a:p>
+                      <a:pPr algn="l"/>
+                      <a:r>
+                        <a:rPr sz="1000" b="0">
+                          <a:solidFill>
+                            <a:srgbClr val="333333"/>
+                          </a:solidFill>
+                          <a:latin typeface="WenQuanYi Micro Hei"/>
+                        </a:rPr>
+                        <a:t>晚宴由 绿城中国 冠名，古井贡酒 为晚宴用酒，蔚来汽车 为出行合作伙伴。</a:t>
                       </a:r>
                     </a:p>
                   </a:txBody>
@@ -4699,8 +4699,8 @@
               </a:tblPr>
               <a:tblGrid>
                 <a:gridCol w="548640"/>
-                <a:gridCol w="2011680"/>
-                <a:gridCol w="5212080"/>
+                <a:gridCol w="2194560"/>
+                <a:gridCol w="5029200"/>
                 <a:gridCol w="2286000"/>
                 <a:gridCol w="1371600"/>
               </a:tblGrid>
@@ -4881,7 +4881,7 @@
                           </a:solidFill>
                           <a:latin typeface="WenQuanYi Micro Hei"/>
                         </a:rPr>
-                        <a:t>晚宴背景板 LOGO 全景、冠名牌特写、致辞特写</a:t>
+                        <a:t>【绿城·潮鸣】LOGO 全景、冠名牌特写、邀请码核验入场剪影、致辞特写</a:t>
                       </a:r>
                     </a:p>
                   </a:txBody>
@@ -4998,30 +4998,30 @@
                           </a:solidFill>
                           <a:latin typeface="WenQuanYi Micro Hei"/>
                         </a:rPr>
-                        <a:t>LOGO 墙、徐泳泽演讲 / 圆桌镜头 ≥6</a:t>
-                      </a:r>
-                    </a:p>
-                  </a:txBody>
-                  <a:tcPr>
-                    <a:solidFill>
-                      <a:srgbClr val="D9E1F2"/>
-                    </a:solidFill>
-                  </a:tcPr>
-                </a:tc>
-                <a:tc>
-                  <a:txBody>
-                    <a:bodyPr/>
-                    <a:lstStyle/>
-                    <a:p>
-                      <a:pPr algn="l"/>
-                      <a:r>
-                        <a:rPr sz="1000" b="0">
-                          <a:solidFill>
-                            <a:srgbClr val="333333"/>
-                          </a:solidFill>
-                          <a:latin typeface="WenQuanYi Micro Hei"/>
-                        </a:rPr>
-                        <a:t>13:00 / 15:05 / 闭幕</a:t>
+                        <a:t>LOGO 墙、徐泳泽圆桌二发言镜头 ≥6</a:t>
+                      </a:r>
+                    </a:p>
+                  </a:txBody>
+                  <a:tcPr>
+                    <a:solidFill>
+                      <a:srgbClr val="D9E1F2"/>
+                    </a:solidFill>
+                  </a:tcPr>
+                </a:tc>
+                <a:tc>
+                  <a:txBody>
+                    <a:bodyPr/>
+                    <a:lstStyle/>
+                    <a:p>
+                      <a:pPr algn="l"/>
+                      <a:r>
+                        <a:rPr sz="1000" b="0">
+                          <a:solidFill>
+                            <a:srgbClr val="333333"/>
+                          </a:solidFill>
+                          <a:latin typeface="WenQuanYi Micro Hei"/>
+                        </a:rPr>
+                        <a:t>13:00 / 15:20-16:00 / 闭幕</a:t>
                       </a:r>
                     </a:p>
                   </a:txBody>
@@ -5092,76 +5092,76 @@
                           </a:solidFill>
                           <a:latin typeface="WenQuanYi Micro Hei"/>
                         </a:rPr>
-                        <a:t>福布斯中国</a:t>
-                      </a:r>
-                    </a:p>
-                  </a:txBody>
-                  <a:tcPr>
-                    <a:solidFill>
-                      <a:srgbClr val="FFFFFF"/>
-                    </a:solidFill>
-                  </a:tcPr>
-                </a:tc>
-                <a:tc>
-                  <a:txBody>
-                    <a:bodyPr/>
-                    <a:lstStyle/>
-                    <a:p>
-                      <a:pPr algn="l"/>
-                      <a:r>
-                        <a:rPr sz="1000" b="0">
-                          <a:solidFill>
-                            <a:srgbClr val="333333"/>
-                          </a:solidFill>
-                          <a:latin typeface="WenQuanYi Micro Hei"/>
-                        </a:rPr>
-                        <a:t>奖杯 / 证书、颁奖瞬间合影</a:t>
-                      </a:r>
-                    </a:p>
-                  </a:txBody>
-                  <a:tcPr>
-                    <a:solidFill>
-                      <a:srgbClr val="FFFFFF"/>
-                    </a:solidFill>
-                  </a:tcPr>
-                </a:tc>
-                <a:tc>
-                  <a:txBody>
-                    <a:bodyPr/>
-                    <a:lstStyle/>
-                    <a:p>
-                      <a:pPr algn="l"/>
-                      <a:r>
-                        <a:rPr sz="1000" b="0">
-                          <a:solidFill>
-                            <a:srgbClr val="333333"/>
-                          </a:solidFill>
-                          <a:latin typeface="WenQuanYi Micro Hei"/>
-                        </a:rPr>
-                        <a:t>18:15 颁奖</a:t>
-                      </a:r>
-                    </a:p>
-                  </a:txBody>
-                  <a:tcPr>
-                    <a:solidFill>
-                      <a:srgbClr val="FFFFFF"/>
-                    </a:solidFill>
-                  </a:tcPr>
-                </a:tc>
-                <a:tc>
-                  <a:txBody>
-                    <a:bodyPr/>
-                    <a:lstStyle/>
-                    <a:p>
-                      <a:pPr algn="l"/>
-                      <a:r>
-                        <a:rPr sz="1000" b="0">
-                          <a:solidFill>
-                            <a:srgbClr val="333333"/>
-                          </a:solidFill>
-                          <a:latin typeface="WenQuanYi Micro Hei"/>
-                        </a:rPr>
-                        <a:t>合影 ≥3</a:t>
+                        <a:t>福布斯中国 AI 评选委员会</a:t>
+                      </a:r>
+                    </a:p>
+                  </a:txBody>
+                  <a:tcPr>
+                    <a:solidFill>
+                      <a:srgbClr val="FFFFFF"/>
+                    </a:solidFill>
+                  </a:tcPr>
+                </a:tc>
+                <a:tc>
+                  <a:txBody>
+                    <a:bodyPr/>
+                    <a:lstStyle/>
+                    <a:p>
+                      <a:pPr algn="l"/>
+                      <a:r>
+                        <a:rPr sz="1000" b="0">
+                          <a:solidFill>
+                            <a:srgbClr val="333333"/>
+                          </a:solidFill>
+                          <a:latin typeface="WenQuanYi Micro Hei"/>
+                        </a:rPr>
+                        <a:t>★ 奖杯 / 证书、颁奖瞬间合影、获奖代表镜头</a:t>
+                      </a:r>
+                    </a:p>
+                  </a:txBody>
+                  <a:tcPr>
+                    <a:solidFill>
+                      <a:srgbClr val="FFFFFF"/>
+                    </a:solidFill>
+                  </a:tcPr>
+                </a:tc>
+                <a:tc>
+                  <a:txBody>
+                    <a:bodyPr/>
+                    <a:lstStyle/>
+                    <a:p>
+                      <a:pPr algn="l"/>
+                      <a:r>
+                        <a:rPr sz="1000" b="0">
+                          <a:solidFill>
+                            <a:srgbClr val="333333"/>
+                          </a:solidFill>
+                          <a:latin typeface="WenQuanYi Micro Hei"/>
+                        </a:rPr>
+                        <a:t>★ 14:25-14:40 颁奖典礼</a:t>
+                      </a:r>
+                    </a:p>
+                  </a:txBody>
+                  <a:tcPr>
+                    <a:solidFill>
+                      <a:srgbClr val="FFFFFF"/>
+                    </a:solidFill>
+                  </a:tcPr>
+                </a:tc>
+                <a:tc>
+                  <a:txBody>
+                    <a:bodyPr/>
+                    <a:lstStyle/>
+                    <a:p>
+                      <a:pPr algn="l"/>
+                      <a:r>
+                        <a:rPr sz="1000" b="0">
+                          <a:solidFill>
+                            <a:srgbClr val="333333"/>
+                          </a:solidFill>
+                          <a:latin typeface="WenQuanYi Micro Hei"/>
+                        </a:rPr>
+                        <a:t>合影 ≥5 + 1min 视频</a:t>
                       </a:r>
                     </a:p>
                   </a:txBody>
@@ -5209,7 +5209,7 @@
                           </a:solidFill>
                           <a:latin typeface="WenQuanYi Micro Hei"/>
                         </a:rPr>
-                        <a:t>蔚来</a:t>
+                        <a:t>蔚来汽车</a:t>
                       </a:r>
                     </a:p>
                   </a:txBody>
@@ -5255,7 +5255,7 @@
                           </a:solidFill>
                           <a:latin typeface="WenQuanYi Micro Hei"/>
                         </a:rPr>
-                        <a:t>13:00 / 中场</a:t>
+                        <a:t>13:00 / 中场 16:00</a:t>
                       </a:r>
                     </a:p>
                   </a:txBody>
@@ -5489,7 +5489,7 @@
                           </a:solidFill>
                           <a:latin typeface="WenQuanYi Micro Hei"/>
                         </a:rPr>
-                        <a:t>15:45-16:35</a:t>
+                        <a:t>16:00-16:50</a:t>
                       </a:r>
                     </a:p>
                   </a:txBody>
@@ -5700,53 +5700,53 @@
                           </a:solidFill>
                           <a:latin typeface="WenQuanYi Micro Hei"/>
                         </a:rPr>
-                        <a:t>签到礼品台 + 嘉宾领取</a:t>
-                      </a:r>
-                    </a:p>
-                  </a:txBody>
-                  <a:tcPr>
-                    <a:solidFill>
-                      <a:srgbClr val="D9E1F2"/>
-                    </a:solidFill>
-                  </a:tcPr>
-                </a:tc>
-                <a:tc>
-                  <a:txBody>
-                    <a:bodyPr/>
-                    <a:lstStyle/>
-                    <a:p>
-                      <a:pPr algn="l"/>
-                      <a:r>
-                        <a:rPr sz="1000" b="0">
-                          <a:solidFill>
-                            <a:srgbClr val="333333"/>
-                          </a:solidFill>
-                          <a:latin typeface="WenQuanYi Micro Hei"/>
-                        </a:rPr>
-                        <a:t>13:00-13:30</a:t>
-                      </a:r>
-                    </a:p>
-                  </a:txBody>
-                  <a:tcPr>
-                    <a:solidFill>
-                      <a:srgbClr val="D9E1F2"/>
-                    </a:solidFill>
-                  </a:tcPr>
-                </a:tc>
-                <a:tc>
-                  <a:txBody>
-                    <a:bodyPr/>
-                    <a:lstStyle/>
-                    <a:p>
-                      <a:pPr algn="l"/>
-                      <a:r>
-                        <a:rPr sz="1000" b="0">
-                          <a:solidFill>
-                            <a:srgbClr val="333333"/>
-                          </a:solidFill>
-                          <a:latin typeface="WenQuanYi Micro Hei"/>
-                        </a:rPr>
-                        <a:t>≥4</a:t>
+                        <a:t>签到礼品台 + 嘉宾领取 + 圆桌三镜头</a:t>
+                      </a:r>
+                    </a:p>
+                  </a:txBody>
+                  <a:tcPr>
+                    <a:solidFill>
+                      <a:srgbClr val="D9E1F2"/>
+                    </a:solidFill>
+                  </a:tcPr>
+                </a:tc>
+                <a:tc>
+                  <a:txBody>
+                    <a:bodyPr/>
+                    <a:lstStyle/>
+                    <a:p>
+                      <a:pPr algn="l"/>
+                      <a:r>
+                        <a:rPr sz="1000" b="0">
+                          <a:solidFill>
+                            <a:srgbClr val="333333"/>
+                          </a:solidFill>
+                          <a:latin typeface="WenQuanYi Micro Hei"/>
+                        </a:rPr>
+                        <a:t>13:00 / 17:50-18:30</a:t>
+                      </a:r>
+                    </a:p>
+                  </a:txBody>
+                  <a:tcPr>
+                    <a:solidFill>
+                      <a:srgbClr val="D9E1F2"/>
+                    </a:solidFill>
+                  </a:tcPr>
+                </a:tc>
+                <a:tc>
+                  <a:txBody>
+                    <a:bodyPr/>
+                    <a:lstStyle/>
+                    <a:p>
+                      <a:pPr algn="l"/>
+                      <a:r>
+                        <a:rPr sz="1000" b="0">
+                          <a:solidFill>
+                            <a:srgbClr val="333333"/>
+                          </a:solidFill>
+                          <a:latin typeface="WenQuanYi Micro Hei"/>
+                        </a:rPr>
+                        <a:t>≥6</a:t>
                       </a:r>
                     </a:p>
                   </a:txBody>
@@ -6181,7 +6181,7 @@
         </p:nvGraphicFramePr>
         <p:xfrm>
           <a:off x="365760" y="1005840"/>
-          <a:ext cx="11430000" cy="3931920"/>
+          <a:ext cx="11430000" cy="4114800"/>
         </p:xfrm>
         <a:graphic>
           <a:graphicData uri="http://schemas.openxmlformats.org/drawingml/2006/table">
@@ -6190,11 +6190,11 @@
                 <a:tableStyleId>{5C22544A-7EE6-4342-B048-85BDC9FD1C3A}</a:tableStyleId>
               </a:tblPr>
               <a:tblGrid>
-                <a:gridCol w="2560320"/>
-                <a:gridCol w="6400800"/>
+                <a:gridCol w="2286000"/>
+                <a:gridCol w="6675120"/>
                 <a:gridCol w="2468880"/>
               </a:tblGrid>
-              <a:tr h="491490">
+              <a:tr h="411480">
                 <a:tc>
                   <a:txBody>
                     <a:bodyPr/>
@@ -6265,15 +6265,15 @@
                   </a:tcPr>
                 </a:tc>
               </a:tr>
-              <a:tr h="491490">
-                <a:tc>
-                  <a:txBody>
-                    <a:bodyPr/>
-                    <a:lstStyle/>
-                    <a:p>
-                      <a:pPr algn="l"/>
-                      <a:r>
-                        <a:rPr sz="1100" b="0">
+              <a:tr h="411480">
+                <a:tc>
+                  <a:txBody>
+                    <a:bodyPr/>
+                    <a:lstStyle/>
+                    <a:p>
+                      <a:pPr algn="l"/>
+                      <a:r>
+                        <a:rPr sz="1000" b="0">
                           <a:solidFill>
                             <a:srgbClr val="333333"/>
                           </a:solidFill>
@@ -6296,30 +6296,30 @@
                     <a:p>
                       <a:pPr algn="l"/>
                       <a:r>
-                        <a:rPr sz="1100" b="0">
-                          <a:solidFill>
-                            <a:srgbClr val="333333"/>
-                          </a:solidFill>
-                          <a:latin typeface="WenQuanYi Micro Hei"/>
-                        </a:rPr>
-                        <a:t>赞助商口播文案、对接人、物资清单回收</a:t>
-                      </a:r>
-                    </a:p>
-                  </a:txBody>
-                  <a:tcPr>
-                    <a:solidFill>
-                      <a:srgbClr val="FFFFFF"/>
-                    </a:solidFill>
-                  </a:tcPr>
-                </a:tc>
-                <a:tc>
-                  <a:txBody>
-                    <a:bodyPr/>
-                    <a:lstStyle/>
-                    <a:p>
-                      <a:pPr algn="l"/>
-                      <a:r>
-                        <a:rPr sz="1100" b="0">
+                        <a:rPr sz="1000" b="0">
+                          <a:solidFill>
+                            <a:srgbClr val="333333"/>
+                          </a:solidFill>
+                          <a:latin typeface="WenQuanYi Micro Hei"/>
+                        </a:rPr>
+                        <a:t>赞助商口播文案、对接人、物资清单回收；福布斯获奖名单 / 颁奖嘉宾确认；绿城晚宴邀请码机制确认</a:t>
+                      </a:r>
+                    </a:p>
+                  </a:txBody>
+                  <a:tcPr>
+                    <a:solidFill>
+                      <a:srgbClr val="FFFFFF"/>
+                    </a:solidFill>
+                  </a:tcPr>
+                </a:tc>
+                <a:tc>
+                  <a:txBody>
+                    <a:bodyPr/>
+                    <a:lstStyle/>
+                    <a:p>
+                      <a:pPr algn="l"/>
+                      <a:r>
+                        <a:rPr sz="1000" b="0">
                           <a:solidFill>
                             <a:srgbClr val="333333"/>
                           </a:solidFill>
@@ -6336,15 +6336,15 @@
                   </a:tcPr>
                 </a:tc>
               </a:tr>
-              <a:tr h="491490">
-                <a:tc>
-                  <a:txBody>
-                    <a:bodyPr/>
-                    <a:lstStyle/>
-                    <a:p>
-                      <a:pPr algn="l"/>
-                      <a:r>
-                        <a:rPr sz="1100" b="0">
+              <a:tr h="411480">
+                <a:tc>
+                  <a:txBody>
+                    <a:bodyPr/>
+                    <a:lstStyle/>
+                    <a:p>
+                      <a:pPr algn="l"/>
+                      <a:r>
+                        <a:rPr sz="1000" b="0">
                           <a:solidFill>
                             <a:srgbClr val="333333"/>
                           </a:solidFill>
@@ -6367,7 +6367,7 @@
                     <a:p>
                       <a:pPr algn="l"/>
                       <a:r>
-                        <a:rPr sz="1100" b="0">
+                        <a:rPr sz="1000" b="0">
                           <a:solidFill>
                             <a:srgbClr val="333333"/>
                           </a:solidFill>
@@ -6390,7 +6390,7 @@
                     <a:p>
                       <a:pPr algn="l"/>
                       <a:r>
-                        <a:rPr sz="1100" b="0">
+                        <a:rPr sz="1000" b="0">
                           <a:solidFill>
                             <a:srgbClr val="333333"/>
                           </a:solidFill>
@@ -6407,15 +6407,15 @@
                   </a:tcPr>
                 </a:tc>
               </a:tr>
-              <a:tr h="491490">
-                <a:tc>
-                  <a:txBody>
-                    <a:bodyPr/>
-                    <a:lstStyle/>
-                    <a:p>
-                      <a:pPr algn="l"/>
-                      <a:r>
-                        <a:rPr sz="1100" b="0">
+              <a:tr h="411480">
+                <a:tc>
+                  <a:txBody>
+                    <a:bodyPr/>
+                    <a:lstStyle/>
+                    <a:p>
+                      <a:pPr algn="l"/>
+                      <a:r>
+                        <a:rPr sz="1000" b="0">
                           <a:solidFill>
                             <a:srgbClr val="333333"/>
                           </a:solidFill>
@@ -6438,7 +6438,7 @@
                     <a:p>
                       <a:pPr algn="l"/>
                       <a:r>
-                        <a:rPr sz="1100" b="0">
+                        <a:rPr sz="1000" b="0">
                           <a:solidFill>
                             <a:srgbClr val="333333"/>
                           </a:solidFill>
@@ -6461,7 +6461,7 @@
                     <a:p>
                       <a:pPr algn="l"/>
                       <a:r>
-                        <a:rPr sz="1100" b="0">
+                        <a:rPr sz="1000" b="0">
                           <a:solidFill>
                             <a:srgbClr val="333333"/>
                           </a:solidFill>
@@ -6478,15 +6478,15 @@
                   </a:tcPr>
                 </a:tc>
               </a:tr>
-              <a:tr h="491490">
-                <a:tc>
-                  <a:txBody>
-                    <a:bodyPr/>
-                    <a:lstStyle/>
-                    <a:p>
-                      <a:pPr algn="l"/>
-                      <a:r>
-                        <a:rPr sz="1100" b="0">
+              <a:tr h="411480">
+                <a:tc>
+                  <a:txBody>
+                    <a:bodyPr/>
+                    <a:lstStyle/>
+                    <a:p>
+                      <a:pPr algn="l"/>
+                      <a:r>
+                        <a:rPr sz="1000" b="0">
                           <a:solidFill>
                             <a:srgbClr val="333333"/>
                           </a:solidFill>
@@ -6509,7 +6509,7 @@
                     <a:p>
                       <a:pPr algn="l"/>
                       <a:r>
-                        <a:rPr sz="1100" b="0">
+                        <a:rPr sz="1000" b="0">
                           <a:solidFill>
                             <a:srgbClr val="333333"/>
                           </a:solidFill>
@@ -6532,7 +6532,7 @@
                     <a:p>
                       <a:pPr algn="l"/>
                       <a:r>
-                        <a:rPr sz="1100" b="0">
+                        <a:rPr sz="1000" b="0">
                           <a:solidFill>
                             <a:srgbClr val="333333"/>
                           </a:solidFill>
@@ -6549,15 +6549,15 @@
                   </a:tcPr>
                 </a:tc>
               </a:tr>
-              <a:tr h="491490">
-                <a:tc>
-                  <a:txBody>
-                    <a:bodyPr/>
-                    <a:lstStyle/>
-                    <a:p>
-                      <a:pPr algn="l"/>
-                      <a:r>
-                        <a:rPr sz="1100" b="0">
+              <a:tr h="411480">
+                <a:tc>
+                  <a:txBody>
+                    <a:bodyPr/>
+                    <a:lstStyle/>
+                    <a:p>
+                      <a:pPr algn="l"/>
+                      <a:r>
+                        <a:rPr sz="1000" b="0">
                           <a:solidFill>
                             <a:srgbClr val="333333"/>
                           </a:solidFill>
@@ -6580,30 +6580,30 @@
                     <a:p>
                       <a:pPr algn="l"/>
                       <a:r>
-                        <a:rPr sz="1100" b="0">
-                          <a:solidFill>
-                            <a:srgbClr val="333333"/>
-                          </a:solidFill>
-                          <a:latin typeface="WenQuanYi Micro Hei"/>
-                        </a:rPr>
-                        <a:t>台卡、主席台陈列就位 / 福布斯颁奖物料到位</a:t>
-                      </a:r>
-                    </a:p>
-                  </a:txBody>
-                  <a:tcPr>
-                    <a:solidFill>
-                      <a:srgbClr val="FFFFFF"/>
-                    </a:solidFill>
-                  </a:tcPr>
-                </a:tc>
-                <a:tc>
-                  <a:txBody>
-                    <a:bodyPr/>
-                    <a:lstStyle/>
-                    <a:p>
-                      <a:pPr algn="l"/>
-                      <a:r>
-                        <a:rPr sz="1100" b="0">
+                        <a:rPr sz="1000" b="0">
+                          <a:solidFill>
+                            <a:srgbClr val="333333"/>
+                          </a:solidFill>
+                          <a:latin typeface="WenQuanYi Micro Hei"/>
+                        </a:rPr>
+                        <a:t>★ 台卡、主席台陈列就位；福布斯颁奖物料必到</a:t>
+                      </a:r>
+                    </a:p>
+                  </a:txBody>
+                  <a:tcPr>
+                    <a:solidFill>
+                      <a:srgbClr val="FFFFFF"/>
+                    </a:solidFill>
+                  </a:tcPr>
+                </a:tc>
+                <a:tc>
+                  <a:txBody>
+                    <a:bodyPr/>
+                    <a:lstStyle/>
+                    <a:p>
+                      <a:pPr algn="l"/>
+                      <a:r>
+                        <a:rPr sz="1000" b="0">
                           <a:solidFill>
                             <a:srgbClr val="333333"/>
                           </a:solidFill>
@@ -6620,15 +6620,15 @@
                   </a:tcPr>
                 </a:tc>
               </a:tr>
-              <a:tr h="491490">
-                <a:tc>
-                  <a:txBody>
-                    <a:bodyPr/>
-                    <a:lstStyle/>
-                    <a:p>
-                      <a:pPr algn="l"/>
-                      <a:r>
-                        <a:rPr sz="1100" b="0">
+              <a:tr h="411480">
+                <a:tc>
+                  <a:txBody>
+                    <a:bodyPr/>
+                    <a:lstStyle/>
+                    <a:p>
+                      <a:pPr algn="l"/>
+                      <a:r>
+                        <a:rPr sz="1000" b="0">
                           <a:solidFill>
                             <a:srgbClr val="333333"/>
                           </a:solidFill>
@@ -6651,30 +6651,30 @@
                     <a:p>
                       <a:pPr algn="l"/>
                       <a:r>
-                        <a:rPr sz="1100" b="0">
-                          <a:solidFill>
-                            <a:srgbClr val="333333"/>
-                          </a:solidFill>
-                          <a:latin typeface="WenQuanYi Micro Hei"/>
-                        </a:rPr>
-                        <a:t>嘉宾签到与入场</a:t>
-                      </a:r>
-                    </a:p>
-                  </a:txBody>
-                  <a:tcPr>
-                    <a:solidFill>
-                      <a:srgbClr val="D9E1F2"/>
-                    </a:solidFill>
-                  </a:tcPr>
-                </a:tc>
-                <a:tc>
-                  <a:txBody>
-                    <a:bodyPr/>
-                    <a:lstStyle/>
-                    <a:p>
-                      <a:pPr algn="l"/>
-                      <a:r>
-                        <a:rPr sz="1100" b="0">
+                        <a:rPr sz="1000" b="0">
+                          <a:solidFill>
+                            <a:srgbClr val="333333"/>
+                          </a:solidFill>
+                          <a:latin typeface="WenQuanYi Micro Hei"/>
+                        </a:rPr>
+                        <a:t>嘉宾签到与入场（凭邀请码核验）</a:t>
+                      </a:r>
+                    </a:p>
+                  </a:txBody>
+                  <a:tcPr>
+                    <a:solidFill>
+                      <a:srgbClr val="D9E1F2"/>
+                    </a:solidFill>
+                  </a:tcPr>
+                </a:tc>
+                <a:tc>
+                  <a:txBody>
+                    <a:bodyPr/>
+                    <a:lstStyle/>
+                    <a:p>
+                      <a:pPr algn="l"/>
+                      <a:r>
+                        <a:rPr sz="1000" b="0">
                           <a:solidFill>
                             <a:srgbClr val="333333"/>
                           </a:solidFill>
@@ -6691,61 +6691,203 @@
                   </a:tcPr>
                 </a:tc>
               </a:tr>
-              <a:tr h="491490">
-                <a:tc>
-                  <a:txBody>
-                    <a:bodyPr/>
-                    <a:lstStyle/>
-                    <a:p>
-                      <a:pPr algn="l"/>
-                      <a:r>
-                        <a:rPr sz="1100" b="0">
-                          <a:solidFill>
-                            <a:srgbClr val="333333"/>
-                          </a:solidFill>
-                          <a:latin typeface="WenQuanYi Micro Hei"/>
-                        </a:rPr>
-                        <a:t>5/22 13:30 / 18:30</a:t>
-                      </a:r>
-                    </a:p>
-                  </a:txBody>
-                  <a:tcPr>
-                    <a:solidFill>
-                      <a:srgbClr val="FFFFFF"/>
-                    </a:solidFill>
-                  </a:tcPr>
-                </a:tc>
-                <a:tc>
-                  <a:txBody>
-                    <a:bodyPr/>
-                    <a:lstStyle/>
-                    <a:p>
-                      <a:pPr algn="l"/>
-                      <a:r>
-                        <a:rPr sz="1100" b="0">
-                          <a:solidFill>
-                            <a:srgbClr val="333333"/>
-                          </a:solidFill>
-                          <a:latin typeface="WenQuanYi Micro Hei"/>
-                        </a:rPr>
-                        <a:t>峰会开幕 / 闭门晚宴开始</a:t>
-                      </a:r>
-                    </a:p>
-                  </a:txBody>
-                  <a:tcPr>
-                    <a:solidFill>
-                      <a:srgbClr val="FFFFFF"/>
-                    </a:solidFill>
-                  </a:tcPr>
-                </a:tc>
-                <a:tc>
-                  <a:txBody>
-                    <a:bodyPr/>
-                    <a:lstStyle/>
-                    <a:p>
-                      <a:pPr algn="l"/>
-                      <a:r>
-                        <a:rPr sz="1100" b="0">
+              <a:tr h="411480">
+                <a:tc>
+                  <a:txBody>
+                    <a:bodyPr/>
+                    <a:lstStyle/>
+                    <a:p>
+                      <a:pPr algn="l"/>
+                      <a:r>
+                        <a:rPr sz="1000" b="0">
+                          <a:solidFill>
+                            <a:srgbClr val="333333"/>
+                          </a:solidFill>
+                          <a:latin typeface="WenQuanYi Micro Hei"/>
+                        </a:rPr>
+                        <a:t>5/22 13:30</a:t>
+                      </a:r>
+                    </a:p>
+                  </a:txBody>
+                  <a:tcPr>
+                    <a:solidFill>
+                      <a:srgbClr val="FFFFFF"/>
+                    </a:solidFill>
+                  </a:tcPr>
+                </a:tc>
+                <a:tc>
+                  <a:txBody>
+                    <a:bodyPr/>
+                    <a:lstStyle/>
+                    <a:p>
+                      <a:pPr algn="l"/>
+                      <a:r>
+                        <a:rPr sz="1000" b="0">
+                          <a:solidFill>
+                            <a:srgbClr val="333333"/>
+                          </a:solidFill>
+                          <a:latin typeface="WenQuanYi Micro Hei"/>
+                        </a:rPr>
+                        <a:t>峰会开幕（姚志勇 致辞）</a:t>
+                      </a:r>
+                    </a:p>
+                  </a:txBody>
+                  <a:tcPr>
+                    <a:solidFill>
+                      <a:srgbClr val="FFFFFF"/>
+                    </a:solidFill>
+                  </a:tcPr>
+                </a:tc>
+                <a:tc>
+                  <a:txBody>
+                    <a:bodyPr/>
+                    <a:lstStyle/>
+                    <a:p>
+                      <a:pPr algn="l"/>
+                      <a:r>
+                        <a:rPr sz="1000" b="0">
+                          <a:solidFill>
+                            <a:srgbClr val="333333"/>
+                          </a:solidFill>
+                          <a:latin typeface="WenQuanYi Micro Hei"/>
+                        </a:rPr>
+                        <a:t>—</a:t>
+                      </a:r>
+                    </a:p>
+                  </a:txBody>
+                  <a:tcPr>
+                    <a:solidFill>
+                      <a:srgbClr val="FFFFFF"/>
+                    </a:solidFill>
+                  </a:tcPr>
+                </a:tc>
+              </a:tr>
+              <a:tr h="411480">
+                <a:tc>
+                  <a:txBody>
+                    <a:bodyPr/>
+                    <a:lstStyle/>
+                    <a:p>
+                      <a:pPr algn="l"/>
+                      <a:r>
+                        <a:rPr sz="1000" b="0">
+                          <a:solidFill>
+                            <a:srgbClr val="333333"/>
+                          </a:solidFill>
+                          <a:latin typeface="WenQuanYi Micro Hei"/>
+                        </a:rPr>
+                        <a:t>5/22 14:25-14:40</a:t>
+                      </a:r>
+                    </a:p>
+                  </a:txBody>
+                  <a:tcPr>
+                    <a:solidFill>
+                      <a:srgbClr val="D9E1F2"/>
+                    </a:solidFill>
+                  </a:tcPr>
+                </a:tc>
+                <a:tc>
+                  <a:txBody>
+                    <a:bodyPr/>
+                    <a:lstStyle/>
+                    <a:p>
+                      <a:pPr algn="l"/>
+                      <a:r>
+                        <a:rPr sz="1000" b="0">
+                          <a:solidFill>
+                            <a:srgbClr val="333333"/>
+                          </a:solidFill>
+                          <a:latin typeface="WenQuanYi Micro Hei"/>
+                        </a:rPr>
+                        <a:t>★ 第四届 2026 人工智能商业化落地颁奖典礼（高光启幕）</a:t>
+                      </a:r>
+                    </a:p>
+                  </a:txBody>
+                  <a:tcPr>
+                    <a:solidFill>
+                      <a:srgbClr val="D9E1F2"/>
+                    </a:solidFill>
+                  </a:tcPr>
+                </a:tc>
+                <a:tc>
+                  <a:txBody>
+                    <a:bodyPr/>
+                    <a:lstStyle/>
+                    <a:p>
+                      <a:pPr algn="l"/>
+                      <a:r>
+                        <a:rPr sz="1000" b="0">
+                          <a:solidFill>
+                            <a:srgbClr val="333333"/>
+                          </a:solidFill>
+                          <a:latin typeface="WenQuanYi Micro Hei"/>
+                        </a:rPr>
+                        <a:t>—</a:t>
+                      </a:r>
+                    </a:p>
+                  </a:txBody>
+                  <a:tcPr>
+                    <a:solidFill>
+                      <a:srgbClr val="D9E1F2"/>
+                    </a:solidFill>
+                  </a:tcPr>
+                </a:tc>
+              </a:tr>
+              <a:tr h="411480">
+                <a:tc>
+                  <a:txBody>
+                    <a:bodyPr/>
+                    <a:lstStyle/>
+                    <a:p>
+                      <a:pPr algn="l"/>
+                      <a:r>
+                        <a:rPr sz="1000" b="0">
+                          <a:solidFill>
+                            <a:srgbClr val="333333"/>
+                          </a:solidFill>
+                          <a:latin typeface="WenQuanYi Micro Hei"/>
+                        </a:rPr>
+                        <a:t>5/22 18:30</a:t>
+                      </a:r>
+                    </a:p>
+                  </a:txBody>
+                  <a:tcPr>
+                    <a:solidFill>
+                      <a:srgbClr val="FFFFFF"/>
+                    </a:solidFill>
+                  </a:tcPr>
+                </a:tc>
+                <a:tc>
+                  <a:txBody>
+                    <a:bodyPr/>
+                    <a:lstStyle/>
+                    <a:p>
+                      <a:pPr algn="l"/>
+                      <a:r>
+                        <a:rPr sz="1000" b="0">
+                          <a:solidFill>
+                            <a:srgbClr val="333333"/>
+                          </a:solidFill>
+                          <a:latin typeface="WenQuanYi Micro Hei"/>
+                        </a:rPr>
+                        <a:t>【绿城·潮鸣】星耀北外滩——AI 领袖定制晚宴 开始</a:t>
+                      </a:r>
+                    </a:p>
+                  </a:txBody>
+                  <a:tcPr>
+                    <a:solidFill>
+                      <a:srgbClr val="FFFFFF"/>
+                    </a:solidFill>
+                  </a:tcPr>
+                </a:tc>
+                <a:tc>
+                  <a:txBody>
+                    <a:bodyPr/>
+                    <a:lstStyle/>
+                    <a:p>
+                      <a:pPr algn="l"/>
+                      <a:r>
+                        <a:rPr sz="1000" b="0">
                           <a:solidFill>
                             <a:srgbClr val="333333"/>
                           </a:solidFill>
@@ -6774,8 +6916,8 @@
         </p:nvSpPr>
         <p:spPr>
           <a:xfrm>
-            <a:off x="365760" y="5120640"/>
-            <a:ext cx="11430000" cy="1280160"/>
+            <a:off x="365760" y="5303520"/>
+            <a:ext cx="11430000" cy="1188720"/>
           </a:xfrm>
           <a:prstGeom prst="rect">
             <a:avLst/>
@@ -6818,7 +6960,7 @@
         </p:nvSpPr>
         <p:spPr>
           <a:xfrm>
-            <a:off x="548640" y="5166360"/>
+            <a:off x="548640" y="5349240"/>
             <a:ext cx="11064240" cy="365760"/>
           </a:xfrm>
           <a:prstGeom prst="rect">
@@ -6853,8 +6995,8 @@
         </p:nvSpPr>
         <p:spPr>
           <a:xfrm>
-            <a:off x="548640" y="5532120"/>
-            <a:ext cx="11064240" cy="822960"/>
+            <a:off x="548640" y="5715000"/>
+            <a:ext cx="11064240" cy="777240"/>
           </a:xfrm>
           <a:prstGeom prst="rect">
             <a:avLst/>
@@ -6869,13 +7011,13 @@
           <a:p>
             <a:pPr algn="l"/>
             <a:r>
-              <a:rPr sz="1100" b="0">
+              <a:rPr sz="1000" b="0">
                 <a:solidFill>
                   <a:srgbClr val="C0392B"/>
                 </a:solidFill>
                 <a:latin typeface="WenQuanYi Micro Hei"/>
               </a:rPr>
-              <a:t>1) 绿城中国：到场 5 席名单、物资清单、对接人；   2) 福布斯中国：颁奖物料、对接人；   3) 蔚来：展车 / 礼品、对接人；   4) 茶活力 / 美年大健康 / 古井贡酒：物资 / 对接人；   5) A / B / D / E / F 组缺号志愿者手机号（韦佳玉回收）。</a:t>
+              <a:t>1) 绿城中国：到场 5 席名单、物资清单、对接人、邀请码核验机制、致辞嘉宾；   2) 福布斯中国 AI 评选委员会：获奖名单、颁奖嘉宾、颁奖物料（须 5/22 12:00 前到位）；   3) 蔚来汽车：展车 / 礼品、对接人；   4) 茶活力 / 美年大健康 / 古井贡酒：物资 / 对接人；   5) 缺号志愿者手机号（韦佳玉回收）。</a:t>
             </a:r>
           </a:p>
         </p:txBody>
@@ -8269,7 +8411,7 @@
         </p:nvGraphicFramePr>
         <p:xfrm>
           <a:off x="457200" y="1097280"/>
-          <a:ext cx="11247119" cy="5120640"/>
+          <a:ext cx="11247119" cy="5212080"/>
         </p:xfrm>
         <a:graphic>
           <a:graphicData uri="http://schemas.openxmlformats.org/drawingml/2006/table">
@@ -8281,7 +8423,7 @@
                 <a:gridCol w="2699308"/>
                 <a:gridCol w="8547811"/>
               </a:tblGrid>
-              <a:tr h="426720">
+              <a:tr h="434340">
                 <a:tc>
                   <a:txBody>
                     <a:bodyPr/>
@@ -8329,7 +8471,7 @@
                   </a:tcPr>
                 </a:tc>
               </a:tr>
-              <a:tr h="426720">
+              <a:tr h="434340">
                 <a:tc>
                   <a:txBody>
                     <a:bodyPr/>
@@ -8377,7 +8519,7 @@
                   </a:tcPr>
                 </a:tc>
               </a:tr>
-              <a:tr h="426720">
+              <a:tr h="434340">
                 <a:tc>
                   <a:txBody>
                     <a:bodyPr/>
@@ -8425,7 +8567,7 @@
                   </a:tcPr>
                 </a:tc>
               </a:tr>
-              <a:tr h="426720">
+              <a:tr h="434340">
                 <a:tc>
                   <a:txBody>
                     <a:bodyPr/>
@@ -8473,7 +8615,7 @@
                   </a:tcPr>
                 </a:tc>
               </a:tr>
-              <a:tr h="426720">
+              <a:tr h="434340">
                 <a:tc>
                   <a:txBody>
                     <a:bodyPr/>
@@ -8510,7 +8652,7 @@
                           </a:solidFill>
                           <a:latin typeface="WenQuanYi Micro Hei"/>
                         </a:rPr>
-                        <a:t>北大经院上海校友会、复旦大学住房政策研究中心</a:t>
+                        <a:t>北京大学经济学院上海校友会、复旦大学住房政策研究中心</a:t>
                       </a:r>
                     </a:p>
                   </a:txBody>
@@ -8521,7 +8663,7 @@
                   </a:tcPr>
                 </a:tc>
               </a:tr>
-              <a:tr h="426720">
+              <a:tr h="434340">
                 <a:tc>
                   <a:txBody>
                     <a:bodyPr/>
@@ -8558,7 +8700,7 @@
                           </a:solidFill>
                           <a:latin typeface="WenQuanYi Micro Hei"/>
                         </a:rPr>
-                        <a:t>复旦大学未来信息创新学院、上海云计算创新基地、杨浦/虹口科企联、东投资联盟 等</a:t>
+                        <a:t>复旦未来信息创新学院、上海云计算创新基地、杨浦/虹口科企联、东投资联盟 等</a:t>
                       </a:r>
                     </a:p>
                   </a:txBody>
@@ -8569,7 +8711,7 @@
                   </a:tcPr>
                 </a:tc>
               </a:tr>
-              <a:tr h="426720">
+              <a:tr h="434340">
                 <a:tc>
                   <a:txBody>
                     <a:bodyPr/>
@@ -8606,7 +8748,7 @@
                           </a:solidFill>
                           <a:latin typeface="WenQuanYi Micro Hei"/>
                         </a:rPr>
-                        <a:t>腾讯云、福布斯中国人工智能科技企业评选委</a:t>
+                        <a:t>腾讯云、福布斯中国人工智能科技企业评选委员会</a:t>
                       </a:r>
                     </a:p>
                   </a:txBody>
@@ -8617,7 +8759,7 @@
                   </a:tcPr>
                 </a:tc>
               </a:tr>
-              <a:tr h="426720">
+              <a:tr h="434340">
                 <a:tc>
                   <a:txBody>
                     <a:bodyPr/>
@@ -8654,7 +8796,7 @@
                           </a:solidFill>
                           <a:latin typeface="WenQuanYi Micro Hei"/>
                         </a:rPr>
-                        <a:t>绿城中国</a:t>
+                        <a:t>绿城中国（晚宴：【绿城·潮鸣】星耀北外滩——AI 领袖定制晚宴，凭专属邀请码入场）</a:t>
                       </a:r>
                     </a:p>
                   </a:txBody>
@@ -8665,7 +8807,7 @@
                   </a:tcPr>
                 </a:tc>
               </a:tr>
-              <a:tr h="426720">
+              <a:tr h="434340">
                 <a:tc>
                   <a:txBody>
                     <a:bodyPr/>
@@ -8702,7 +8844,7 @@
                           </a:solidFill>
                           <a:latin typeface="WenQuanYi Micro Hei"/>
                         </a:rPr>
-                        <a:t>蔚来、泰隆银行</a:t>
+                        <a:t>蔚来汽车、泰隆银行</a:t>
                       </a:r>
                     </a:p>
                   </a:txBody>
@@ -8713,7 +8855,7 @@
                   </a:tcPr>
                 </a:tc>
               </a:tr>
-              <a:tr h="426720">
+              <a:tr h="434340">
                 <a:tc>
                   <a:txBody>
                     <a:bodyPr/>
@@ -8761,7 +8903,7 @@
                   </a:tcPr>
                 </a:tc>
               </a:tr>
-              <a:tr h="426720">
+              <a:tr h="434340">
                 <a:tc>
                   <a:txBody>
                     <a:bodyPr/>
@@ -8809,7 +8951,7 @@
                   </a:tcPr>
                 </a:tc>
               </a:tr>
-              <a:tr h="426720">
+              <a:tr h="434340">
                 <a:tc>
                   <a:txBody>
                     <a:bodyPr/>
@@ -9056,9 +9198,9 @@
                 <a:tableStyleId>{5C22544A-7EE6-4342-B048-85BDC9FD1C3A}</a:tableStyleId>
               </a:tblPr>
               <a:tblGrid>
-                <a:gridCol w="1828800"/>
-                <a:gridCol w="6400800"/>
-                <a:gridCol w="3200400"/>
+                <a:gridCol w="1645920"/>
+                <a:gridCol w="7040880"/>
+                <a:gridCol w="2743200"/>
               </a:tblGrid>
               <a:tr h="385354">
                 <a:tc>
@@ -9168,7 +9310,7 @@
                           </a:solidFill>
                           <a:latin typeface="WenQuanYi Micro Hei"/>
                         </a:rPr>
-                        <a:t>嘉宾签到与入场</a:t>
+                        <a:t>嘉宾签到与入场（凭邀请码核验）</a:t>
                       </a:r>
                     </a:p>
                   </a:txBody>
@@ -9429,53 +9571,53 @@
                           </a:solidFill>
                           <a:latin typeface="WenQuanYi Micro Hei"/>
                         </a:rPr>
-                        <a:t>14:25-15:05</a:t>
-                      </a:r>
-                    </a:p>
-                  </a:txBody>
-                  <a:tcPr>
-                    <a:solidFill>
-                      <a:srgbClr val="FFFFFF"/>
-                    </a:solidFill>
-                  </a:tcPr>
-                </a:tc>
-                <a:tc>
-                  <a:txBody>
-                    <a:bodyPr/>
-                    <a:lstStyle/>
-                    <a:p>
-                      <a:pPr algn="l"/>
-                      <a:r>
-                        <a:rPr sz="1000" b="0">
-                          <a:solidFill>
-                            <a:srgbClr val="333333"/>
-                          </a:solidFill>
-                          <a:latin typeface="WenQuanYi Micro Hei"/>
-                        </a:rPr>
-                        <a:t>圆桌一 · AI 硬核圆桌</a:t>
-                      </a:r>
-                    </a:p>
-                  </a:txBody>
-                  <a:tcPr>
-                    <a:solidFill>
-                      <a:srgbClr val="FFFFFF"/>
-                    </a:solidFill>
-                  </a:tcPr>
-                </a:tc>
-                <a:tc>
-                  <a:txBody>
-                    <a:bodyPr/>
-                    <a:lstStyle/>
-                    <a:p>
-                      <a:pPr algn="l"/>
-                      <a:r>
-                        <a:rPr sz="1000" b="0">
-                          <a:solidFill>
-                            <a:srgbClr val="333333"/>
-                          </a:solidFill>
-                          <a:latin typeface="WenQuanYi Micro Hei"/>
-                        </a:rPr>
-                        <a:t>主持：王珏</a:t>
+                        <a:t>14:25-14:40</a:t>
+                      </a:r>
+                    </a:p>
+                  </a:txBody>
+                  <a:tcPr>
+                    <a:solidFill>
+                      <a:srgbClr val="FFFFFF"/>
+                    </a:solidFill>
+                  </a:tcPr>
+                </a:tc>
+                <a:tc>
+                  <a:txBody>
+                    <a:bodyPr/>
+                    <a:lstStyle/>
+                    <a:p>
+                      <a:pPr algn="l"/>
+                      <a:r>
+                        <a:rPr sz="1000" b="0">
+                          <a:solidFill>
+                            <a:srgbClr val="333333"/>
+                          </a:solidFill>
+                          <a:latin typeface="WenQuanYi Micro Hei"/>
+                        </a:rPr>
+                        <a:t>★ 第四届 2026 人工智能商业化落地颁奖典礼（高光启幕）</a:t>
+                      </a:r>
+                    </a:p>
+                  </a:txBody>
+                  <a:tcPr>
+                    <a:solidFill>
+                      <a:srgbClr val="FFFFFF"/>
+                    </a:solidFill>
+                  </a:tcPr>
+                </a:tc>
+                <a:tc>
+                  <a:txBody>
+                    <a:bodyPr/>
+                    <a:lstStyle/>
+                    <a:p>
+                      <a:pPr algn="l"/>
+                      <a:r>
+                        <a:rPr sz="1000" b="0">
+                          <a:solidFill>
+                            <a:srgbClr val="333333"/>
+                          </a:solidFill>
+                          <a:latin typeface="WenQuanYi Micro Hei"/>
+                        </a:rPr>
+                        <a:t>—</a:t>
                       </a:r>
                     </a:p>
                   </a:txBody>
@@ -9500,53 +9642,53 @@
                           </a:solidFill>
                           <a:latin typeface="WenQuanYi Micro Hei"/>
                         </a:rPr>
-                        <a:t>15:05-15:45</a:t>
-                      </a:r>
-                    </a:p>
-                  </a:txBody>
-                  <a:tcPr>
-                    <a:solidFill>
-                      <a:srgbClr val="D9E1F2"/>
-                    </a:solidFill>
-                  </a:tcPr>
-                </a:tc>
-                <a:tc>
-                  <a:txBody>
-                    <a:bodyPr/>
-                    <a:lstStyle/>
-                    <a:p>
-                      <a:pPr algn="l"/>
-                      <a:r>
-                        <a:rPr sz="1000" b="0">
-                          <a:solidFill>
-                            <a:srgbClr val="333333"/>
-                          </a:solidFill>
-                          <a:latin typeface="WenQuanYi Micro Hei"/>
-                        </a:rPr>
-                        <a:t>巅峰对话 · 云端生态与 AI 商业化天花板</a:t>
-                      </a:r>
-                    </a:p>
-                  </a:txBody>
-                  <a:tcPr>
-                    <a:solidFill>
-                      <a:srgbClr val="D9E1F2"/>
-                    </a:solidFill>
-                  </a:tcPr>
-                </a:tc>
-                <a:tc>
-                  <a:txBody>
-                    <a:bodyPr/>
-                    <a:lstStyle/>
-                    <a:p>
-                      <a:pPr algn="l"/>
-                      <a:r>
-                        <a:rPr sz="1000" b="0">
-                          <a:solidFill>
-                            <a:srgbClr val="333333"/>
-                          </a:solidFill>
-                          <a:latin typeface="WenQuanYi Micro Hei"/>
-                        </a:rPr>
-                        <a:t>主持：胡继刚</a:t>
+                        <a:t>14:40-15:20</a:t>
+                      </a:r>
+                    </a:p>
+                  </a:txBody>
+                  <a:tcPr>
+                    <a:solidFill>
+                      <a:srgbClr val="D9E1F2"/>
+                    </a:solidFill>
+                  </a:tcPr>
+                </a:tc>
+                <a:tc>
+                  <a:txBody>
+                    <a:bodyPr/>
+                    <a:lstStyle/>
+                    <a:p>
+                      <a:pPr algn="l"/>
+                      <a:r>
+                        <a:rPr sz="1000" b="0">
+                          <a:solidFill>
+                            <a:srgbClr val="333333"/>
+                          </a:solidFill>
+                          <a:latin typeface="WenQuanYi Micro Hei"/>
+                        </a:rPr>
+                        <a:t>圆桌一 · AI 硬核圆桌——技术突围与新质生产力落地</a:t>
+                      </a:r>
+                    </a:p>
+                  </a:txBody>
+                  <a:tcPr>
+                    <a:solidFill>
+                      <a:srgbClr val="D9E1F2"/>
+                    </a:solidFill>
+                  </a:tcPr>
+                </a:tc>
+                <a:tc>
+                  <a:txBody>
+                    <a:bodyPr/>
+                    <a:lstStyle/>
+                    <a:p>
+                      <a:pPr algn="l"/>
+                      <a:r>
+                        <a:rPr sz="1000" b="0">
+                          <a:solidFill>
+                            <a:srgbClr val="333333"/>
+                          </a:solidFill>
+                          <a:latin typeface="WenQuanYi Micro Hei"/>
+                        </a:rPr>
+                        <a:t>主持：王珏</a:t>
                       </a:r>
                     </a:p>
                   </a:txBody>
@@ -9571,53 +9713,53 @@
                           </a:solidFill>
                           <a:latin typeface="WenQuanYi Micro Hei"/>
                         </a:rPr>
-                        <a:t>15:45-16:35</a:t>
-                      </a:r>
-                    </a:p>
-                  </a:txBody>
-                  <a:tcPr>
-                    <a:solidFill>
-                      <a:srgbClr val="FFFFFF"/>
-                    </a:solidFill>
-                  </a:tcPr>
-                </a:tc>
-                <a:tc>
-                  <a:txBody>
-                    <a:bodyPr/>
-                    <a:lstStyle/>
-                    <a:p>
-                      <a:pPr algn="l"/>
-                      <a:r>
-                        <a:rPr sz="1000" b="0">
-                          <a:solidFill>
-                            <a:srgbClr val="333333"/>
-                          </a:solidFill>
-                          <a:latin typeface="WenQuanYi Micro Hei"/>
-                        </a:rPr>
-                        <a:t>陆家嘴交响乐团 · 时光音乐会</a:t>
-                      </a:r>
-                    </a:p>
-                  </a:txBody>
-                  <a:tcPr>
-                    <a:solidFill>
-                      <a:srgbClr val="FFFFFF"/>
-                    </a:solidFill>
-                  </a:tcPr>
-                </a:tc>
-                <a:tc>
-                  <a:txBody>
-                    <a:bodyPr/>
-                    <a:lstStyle/>
-                    <a:p>
-                      <a:pPr algn="l"/>
-                      <a:r>
-                        <a:rPr sz="1000" b="0">
-                          <a:solidFill>
-                            <a:srgbClr val="333333"/>
-                          </a:solidFill>
-                          <a:latin typeface="WenQuanYi Micro Hei"/>
-                        </a:rPr>
-                        <a:t>—</a:t>
+                        <a:t>15:20-16:00</a:t>
+                      </a:r>
+                    </a:p>
+                  </a:txBody>
+                  <a:tcPr>
+                    <a:solidFill>
+                      <a:srgbClr val="FFFFFF"/>
+                    </a:solidFill>
+                  </a:tcPr>
+                </a:tc>
+                <a:tc>
+                  <a:txBody>
+                    <a:bodyPr/>
+                    <a:lstStyle/>
+                    <a:p>
+                      <a:pPr algn="l"/>
+                      <a:r>
+                        <a:rPr sz="1000" b="0">
+                          <a:solidFill>
+                            <a:srgbClr val="333333"/>
+                          </a:solidFill>
+                          <a:latin typeface="WenQuanYi Micro Hei"/>
+                        </a:rPr>
+                        <a:t>圆桌二 · 巅峰对话——从算力引擎到新质资产</a:t>
+                      </a:r>
+                    </a:p>
+                  </a:txBody>
+                  <a:tcPr>
+                    <a:solidFill>
+                      <a:srgbClr val="FFFFFF"/>
+                    </a:solidFill>
+                  </a:tcPr>
+                </a:tc>
+                <a:tc>
+                  <a:txBody>
+                    <a:bodyPr/>
+                    <a:lstStyle/>
+                    <a:p>
+                      <a:pPr algn="l"/>
+                      <a:r>
+                        <a:rPr sz="1000" b="0">
+                          <a:solidFill>
+                            <a:srgbClr val="333333"/>
+                          </a:solidFill>
+                          <a:latin typeface="WenQuanYi Micro Hei"/>
+                        </a:rPr>
+                        <a:t>主持：胡继刚</a:t>
                       </a:r>
                     </a:p>
                   </a:txBody>
@@ -9642,53 +9784,53 @@
                           </a:solidFill>
                           <a:latin typeface="WenQuanYi Micro Hei"/>
                         </a:rPr>
-                        <a:t>16:35-16:55</a:t>
-                      </a:r>
-                    </a:p>
-                  </a:txBody>
-                  <a:tcPr>
-                    <a:solidFill>
-                      <a:srgbClr val="D9E1F2"/>
-                    </a:solidFill>
-                  </a:tcPr>
-                </a:tc>
-                <a:tc>
-                  <a:txBody>
-                    <a:bodyPr/>
-                    <a:lstStyle/>
-                    <a:p>
-                      <a:pPr algn="l"/>
-                      <a:r>
-                        <a:rPr sz="1000" b="0">
-                          <a:solidFill>
-                            <a:srgbClr val="333333"/>
-                          </a:solidFill>
-                          <a:latin typeface="WenQuanYi Micro Hei"/>
-                        </a:rPr>
-                        <a:t>主旨 3 · 特殊机遇/不良资产投资的新机遇</a:t>
-                      </a:r>
-                    </a:p>
-                  </a:txBody>
-                  <a:tcPr>
-                    <a:solidFill>
-                      <a:srgbClr val="D9E1F2"/>
-                    </a:solidFill>
-                  </a:tcPr>
-                </a:tc>
-                <a:tc>
-                  <a:txBody>
-                    <a:bodyPr/>
-                    <a:lstStyle/>
-                    <a:p>
-                      <a:pPr algn="l"/>
-                      <a:r>
-                        <a:rPr sz="1000" b="0">
-                          <a:solidFill>
-                            <a:srgbClr val="333333"/>
-                          </a:solidFill>
-                          <a:latin typeface="WenQuanYi Micro Hei"/>
-                        </a:rPr>
-                        <a:t>王维军</a:t>
+                        <a:t>16:00-16:50</a:t>
+                      </a:r>
+                    </a:p>
+                  </a:txBody>
+                  <a:tcPr>
+                    <a:solidFill>
+                      <a:srgbClr val="D9E1F2"/>
+                    </a:solidFill>
+                  </a:tcPr>
+                </a:tc>
+                <a:tc>
+                  <a:txBody>
+                    <a:bodyPr/>
+                    <a:lstStyle/>
+                    <a:p>
+                      <a:pPr algn="l"/>
+                      <a:r>
+                        <a:rPr sz="1000" b="0">
+                          <a:solidFill>
+                            <a:srgbClr val="333333"/>
+                          </a:solidFill>
+                          <a:latin typeface="WenQuanYi Micro Hei"/>
+                        </a:rPr>
+                        <a:t>陆家嘴交响乐团 · 时光音乐会</a:t>
+                      </a:r>
+                    </a:p>
+                  </a:txBody>
+                  <a:tcPr>
+                    <a:solidFill>
+                      <a:srgbClr val="D9E1F2"/>
+                    </a:solidFill>
+                  </a:tcPr>
+                </a:tc>
+                <a:tc>
+                  <a:txBody>
+                    <a:bodyPr/>
+                    <a:lstStyle/>
+                    <a:p>
+                      <a:pPr algn="l"/>
+                      <a:r>
+                        <a:rPr sz="1000" b="0">
+                          <a:solidFill>
+                            <a:srgbClr val="333333"/>
+                          </a:solidFill>
+                          <a:latin typeface="WenQuanYi Micro Hei"/>
+                        </a:rPr>
+                        <a:t>—</a:t>
                       </a:r>
                     </a:p>
                   </a:txBody>
@@ -9713,53 +9855,53 @@
                           </a:solidFill>
                           <a:latin typeface="WenQuanYi Micro Hei"/>
                         </a:rPr>
-                        <a:t>16:55-17:15</a:t>
-                      </a:r>
-                    </a:p>
-                  </a:txBody>
-                  <a:tcPr>
-                    <a:solidFill>
-                      <a:srgbClr val="FFFFFF"/>
-                    </a:solidFill>
-                  </a:tcPr>
-                </a:tc>
-                <a:tc>
-                  <a:txBody>
-                    <a:bodyPr/>
-                    <a:lstStyle/>
-                    <a:p>
-                      <a:pPr algn="l"/>
-                      <a:r>
-                        <a:rPr sz="1000" b="0">
-                          <a:solidFill>
-                            <a:srgbClr val="333333"/>
-                          </a:solidFill>
-                          <a:latin typeface="WenQuanYi Micro Hei"/>
-                        </a:rPr>
-                        <a:t>主旨 4 · 从自然利率下降到 K 型经济</a:t>
-                      </a:r>
-                    </a:p>
-                  </a:txBody>
-                  <a:tcPr>
-                    <a:solidFill>
-                      <a:srgbClr val="FFFFFF"/>
-                    </a:solidFill>
-                  </a:tcPr>
-                </a:tc>
-                <a:tc>
-                  <a:txBody>
-                    <a:bodyPr/>
-                    <a:lstStyle/>
-                    <a:p>
-                      <a:pPr algn="l"/>
-                      <a:r>
-                        <a:rPr sz="1000" b="0">
-                          <a:solidFill>
-                            <a:srgbClr val="333333"/>
-                          </a:solidFill>
-                          <a:latin typeface="WenQuanYi Micro Hei"/>
-                        </a:rPr>
-                        <a:t>寇文红</a:t>
+                        <a:t>16:50-17:10</a:t>
+                      </a:r>
+                    </a:p>
+                  </a:txBody>
+                  <a:tcPr>
+                    <a:solidFill>
+                      <a:srgbClr val="FFFFFF"/>
+                    </a:solidFill>
+                  </a:tcPr>
+                </a:tc>
+                <a:tc>
+                  <a:txBody>
+                    <a:bodyPr/>
+                    <a:lstStyle/>
+                    <a:p>
+                      <a:pPr algn="l"/>
+                      <a:r>
+                        <a:rPr sz="1000" b="0">
+                          <a:solidFill>
+                            <a:srgbClr val="333333"/>
+                          </a:solidFill>
+                          <a:latin typeface="WenQuanYi Micro Hei"/>
+                        </a:rPr>
+                        <a:t>主旨 3 · 特殊机遇/不良资产投资的新机遇</a:t>
+                      </a:r>
+                    </a:p>
+                  </a:txBody>
+                  <a:tcPr>
+                    <a:solidFill>
+                      <a:srgbClr val="FFFFFF"/>
+                    </a:solidFill>
+                  </a:tcPr>
+                </a:tc>
+                <a:tc>
+                  <a:txBody>
+                    <a:bodyPr/>
+                    <a:lstStyle/>
+                    <a:p>
+                      <a:pPr algn="l"/>
+                      <a:r>
+                        <a:rPr sz="1000" b="0">
+                          <a:solidFill>
+                            <a:srgbClr val="333333"/>
+                          </a:solidFill>
+                          <a:latin typeface="WenQuanYi Micro Hei"/>
+                        </a:rPr>
+                        <a:t>王维军</a:t>
                       </a:r>
                     </a:p>
                   </a:txBody>
@@ -9784,53 +9926,53 @@
                           </a:solidFill>
                           <a:latin typeface="WenQuanYi Micro Hei"/>
                         </a:rPr>
-                        <a:t>17:15-17:35</a:t>
-                      </a:r>
-                    </a:p>
-                  </a:txBody>
-                  <a:tcPr>
-                    <a:solidFill>
-                      <a:srgbClr val="D9E1F2"/>
-                    </a:solidFill>
-                  </a:tcPr>
-                </a:tc>
-                <a:tc>
-                  <a:txBody>
-                    <a:bodyPr/>
-                    <a:lstStyle/>
-                    <a:p>
-                      <a:pPr algn="l"/>
-                      <a:r>
-                        <a:rPr sz="1000" b="0">
-                          <a:solidFill>
-                            <a:srgbClr val="333333"/>
-                          </a:solidFill>
-                          <a:latin typeface="WenQuanYi Micro Hei"/>
-                        </a:rPr>
-                        <a:t>主旨 5 · 从致用之学到量子智能</a:t>
-                      </a:r>
-                    </a:p>
-                  </a:txBody>
-                  <a:tcPr>
-                    <a:solidFill>
-                      <a:srgbClr val="D9E1F2"/>
-                    </a:solidFill>
-                  </a:tcPr>
-                </a:tc>
-                <a:tc>
-                  <a:txBody>
-                    <a:bodyPr/>
-                    <a:lstStyle/>
-                    <a:p>
-                      <a:pPr algn="l"/>
-                      <a:r>
-                        <a:rPr sz="1000" b="0">
-                          <a:solidFill>
-                            <a:srgbClr val="333333"/>
-                          </a:solidFill>
-                          <a:latin typeface="WenQuanYi Micro Hei"/>
-                        </a:rPr>
-                        <a:t>张露瑶 博士</a:t>
+                        <a:t>17:10-17:30</a:t>
+                      </a:r>
+                    </a:p>
+                  </a:txBody>
+                  <a:tcPr>
+                    <a:solidFill>
+                      <a:srgbClr val="D9E1F2"/>
+                    </a:solidFill>
+                  </a:tcPr>
+                </a:tc>
+                <a:tc>
+                  <a:txBody>
+                    <a:bodyPr/>
+                    <a:lstStyle/>
+                    <a:p>
+                      <a:pPr algn="l"/>
+                      <a:r>
+                        <a:rPr sz="1000" b="0">
+                          <a:solidFill>
+                            <a:srgbClr val="333333"/>
+                          </a:solidFill>
+                          <a:latin typeface="WenQuanYi Micro Hei"/>
+                        </a:rPr>
+                        <a:t>主旨 4 · 从自然利率下降到 K 型经济</a:t>
+                      </a:r>
+                    </a:p>
+                  </a:txBody>
+                  <a:tcPr>
+                    <a:solidFill>
+                      <a:srgbClr val="D9E1F2"/>
+                    </a:solidFill>
+                  </a:tcPr>
+                </a:tc>
+                <a:tc>
+                  <a:txBody>
+                    <a:bodyPr/>
+                    <a:lstStyle/>
+                    <a:p>
+                      <a:pPr algn="l"/>
+                      <a:r>
+                        <a:rPr sz="1000" b="0">
+                          <a:solidFill>
+                            <a:srgbClr val="333333"/>
+                          </a:solidFill>
+                          <a:latin typeface="WenQuanYi Micro Hei"/>
+                        </a:rPr>
+                        <a:t>寇文红</a:t>
                       </a:r>
                     </a:p>
                   </a:txBody>
@@ -9855,53 +9997,53 @@
                           </a:solidFill>
                           <a:latin typeface="WenQuanYi Micro Hei"/>
                         </a:rPr>
-                        <a:t>17:35-18:15</a:t>
-                      </a:r>
-                    </a:p>
-                  </a:txBody>
-                  <a:tcPr>
-                    <a:solidFill>
-                      <a:srgbClr val="FFFFFF"/>
-                    </a:solidFill>
-                  </a:tcPr>
-                </a:tc>
-                <a:tc>
-                  <a:txBody>
-                    <a:bodyPr/>
-                    <a:lstStyle/>
-                    <a:p>
-                      <a:pPr algn="l"/>
-                      <a:r>
-                        <a:rPr sz="1000" b="0">
-                          <a:solidFill>
-                            <a:srgbClr val="333333"/>
-                          </a:solidFill>
-                          <a:latin typeface="WenQuanYi Micro Hei"/>
-                        </a:rPr>
-                        <a:t>圆桌二 · 投资大圆桌</a:t>
-                      </a:r>
-                    </a:p>
-                  </a:txBody>
-                  <a:tcPr>
-                    <a:solidFill>
-                      <a:srgbClr val="FFFFFF"/>
-                    </a:solidFill>
-                  </a:tcPr>
-                </a:tc>
-                <a:tc>
-                  <a:txBody>
-                    <a:bodyPr/>
-                    <a:lstStyle/>
-                    <a:p>
-                      <a:pPr algn="l"/>
-                      <a:r>
-                        <a:rPr sz="1000" b="0">
-                          <a:solidFill>
-                            <a:srgbClr val="333333"/>
-                          </a:solidFill>
-                          <a:latin typeface="WenQuanYi Micro Hei"/>
-                        </a:rPr>
-                        <a:t>主持：黄欣</a:t>
+                        <a:t>17:30-17:50</a:t>
+                      </a:r>
+                    </a:p>
+                  </a:txBody>
+                  <a:tcPr>
+                    <a:solidFill>
+                      <a:srgbClr val="FFFFFF"/>
+                    </a:solidFill>
+                  </a:tcPr>
+                </a:tc>
+                <a:tc>
+                  <a:txBody>
+                    <a:bodyPr/>
+                    <a:lstStyle/>
+                    <a:p>
+                      <a:pPr algn="l"/>
+                      <a:r>
+                        <a:rPr sz="1000" b="0">
+                          <a:solidFill>
+                            <a:srgbClr val="333333"/>
+                          </a:solidFill>
+                          <a:latin typeface="WenQuanYi Micro Hei"/>
+                        </a:rPr>
+                        <a:t>主旨 5 · 从致用之学到量子智能</a:t>
+                      </a:r>
+                    </a:p>
+                  </a:txBody>
+                  <a:tcPr>
+                    <a:solidFill>
+                      <a:srgbClr val="FFFFFF"/>
+                    </a:solidFill>
+                  </a:tcPr>
+                </a:tc>
+                <a:tc>
+                  <a:txBody>
+                    <a:bodyPr/>
+                    <a:lstStyle/>
+                    <a:p>
+                      <a:pPr algn="l"/>
+                      <a:r>
+                        <a:rPr sz="1000" b="0">
+                          <a:solidFill>
+                            <a:srgbClr val="333333"/>
+                          </a:solidFill>
+                          <a:latin typeface="WenQuanYi Micro Hei"/>
+                        </a:rPr>
+                        <a:t>张露瑶 博士</a:t>
                       </a:r>
                     </a:p>
                   </a:txBody>
@@ -9926,53 +10068,53 @@
                           </a:solidFill>
                           <a:latin typeface="WenQuanYi Micro Hei"/>
                         </a:rPr>
-                        <a:t>18:15-18:30</a:t>
-                      </a:r>
-                    </a:p>
-                  </a:txBody>
-                  <a:tcPr>
-                    <a:solidFill>
-                      <a:srgbClr val="D9E1F2"/>
-                    </a:solidFill>
-                  </a:tcPr>
-                </a:tc>
-                <a:tc>
-                  <a:txBody>
-                    <a:bodyPr/>
-                    <a:lstStyle/>
-                    <a:p>
-                      <a:pPr algn="l"/>
-                      <a:r>
-                        <a:rPr sz="1000" b="0">
-                          <a:solidFill>
-                            <a:srgbClr val="333333"/>
-                          </a:solidFill>
-                          <a:latin typeface="WenQuanYi Micro Hei"/>
-                        </a:rPr>
-                        <a:t>颁奖典礼暨闭幕仪式</a:t>
-                      </a:r>
-                    </a:p>
-                  </a:txBody>
-                  <a:tcPr>
-                    <a:solidFill>
-                      <a:srgbClr val="D9E1F2"/>
-                    </a:solidFill>
-                  </a:tcPr>
-                </a:tc>
-                <a:tc>
-                  <a:txBody>
-                    <a:bodyPr/>
-                    <a:lstStyle/>
-                    <a:p>
-                      <a:pPr algn="l"/>
-                      <a:r>
-                        <a:rPr sz="1000" b="0">
-                          <a:solidFill>
-                            <a:srgbClr val="333333"/>
-                          </a:solidFill>
-                          <a:latin typeface="WenQuanYi Micro Hei"/>
-                        </a:rPr>
-                        <a:t>—</a:t>
+                        <a:t>17:50-18:30</a:t>
+                      </a:r>
+                    </a:p>
+                  </a:txBody>
+                  <a:tcPr>
+                    <a:solidFill>
+                      <a:srgbClr val="D9E1F2"/>
+                    </a:solidFill>
+                  </a:tcPr>
+                </a:tc>
+                <a:tc>
+                  <a:txBody>
+                    <a:bodyPr/>
+                    <a:lstStyle/>
+                    <a:p>
+                      <a:pPr algn="l"/>
+                      <a:r>
+                        <a:rPr sz="1000" b="0">
+                          <a:solidFill>
+                            <a:srgbClr val="333333"/>
+                          </a:solidFill>
+                          <a:latin typeface="WenQuanYi Micro Hei"/>
+                        </a:rPr>
+                        <a:t>圆桌三 · 投资大圆桌——寻找新质资产风口与闭幕仪式</a:t>
+                      </a:r>
+                    </a:p>
+                  </a:txBody>
+                  <a:tcPr>
+                    <a:solidFill>
+                      <a:srgbClr val="D9E1F2"/>
+                    </a:solidFill>
+                  </a:tcPr>
+                </a:tc>
+                <a:tc>
+                  <a:txBody>
+                    <a:bodyPr/>
+                    <a:lstStyle/>
+                    <a:p>
+                      <a:pPr algn="l"/>
+                      <a:r>
+                        <a:rPr sz="1000" b="0">
+                          <a:solidFill>
+                            <a:srgbClr val="333333"/>
+                          </a:solidFill>
+                          <a:latin typeface="WenQuanYi Micro Hei"/>
+                        </a:rPr>
+                        <a:t>主持：黄欣</a:t>
                       </a:r>
                     </a:p>
                   </a:txBody>
@@ -10020,7 +10162,7 @@
                           </a:solidFill>
                           <a:latin typeface="WenQuanYi Micro Hei"/>
                         </a:rPr>
-                        <a:t>VIP 高端闭门晚宴（500 人）</a:t>
+                        <a:t>【绿城·潮鸣】星耀北外滩——AI 领袖定制晚宴（凭专属邀请码入场）</a:t>
                       </a:r>
                     </a:p>
                   </a:txBody>
@@ -10554,7 +10696,7 @@
                           </a:solidFill>
                           <a:latin typeface="WenQuanYi Micro Hei"/>
                         </a:rPr>
-                        <a:t>圆桌 + 巅峰对话</a:t>
+                        <a:t>圆桌一 / 二 / 三 主持+嘉宾</a:t>
                       </a:r>
                     </a:p>
                   </a:txBody>
@@ -11497,7 +11639,7 @@
                           </a:solidFill>
                           <a:latin typeface="WenQuanYi Micro Hei"/>
                         </a:rPr>
-                        <a:t>圆桌一 + 巅峰对话嘉宾桌</a:t>
+                        <a:t>圆桌一 + 圆桌二（巅峰对话）嘉宾桌</a:t>
                       </a:r>
                     </a:p>
                   </a:txBody>
@@ -11568,7 +11710,7 @@
                           </a:solidFill>
                           <a:latin typeface="WenQuanYi Micro Hei"/>
                         </a:rPr>
-                        <a:t>圆桌二 + 理事桌</a:t>
+                        <a:t>圆桌三（投资大圆桌+闭幕）+ 理事桌</a:t>
                       </a:r>
                     </a:p>
                   </a:txBody>
@@ -12369,12 +12511,13 @@
                 <a:tableStyleId>{5C22544A-7EE6-4342-B048-85BDC9FD1C3A}</a:tableStyleId>
               </a:tblPr>
               <a:tblGrid>
-                <a:gridCol w="2011680"/>
+                <a:gridCol w="1280160"/>
                 <a:gridCol w="2286000"/>
-                <a:gridCol w="4114800"/>
-                <a:gridCol w="3017520"/>
+                <a:gridCol w="2286000"/>
+                <a:gridCol w="3200400"/>
+                <a:gridCol w="2377440"/>
               </a:tblGrid>
-              <a:tr h="372291">
+              <a:tr h="473825">
                 <a:tc>
                   <a:txBody>
                     <a:bodyPr/>
@@ -12388,6 +12531,29 @@
                           </a:solidFill>
                           <a:latin typeface="WenQuanYi Micro Hei"/>
                         </a:rPr>
+                        <a:t>时间</a:t>
+                      </a:r>
+                    </a:p>
+                  </a:txBody>
+                  <a:tcPr>
+                    <a:solidFill>
+                      <a:srgbClr val="305496"/>
+                    </a:solidFill>
+                  </a:tcPr>
+                </a:tc>
+                <a:tc>
+                  <a:txBody>
+                    <a:bodyPr/>
+                    <a:lstStyle/>
+                    <a:p>
+                      <a:pPr algn="ctr"/>
+                      <a:r>
+                        <a:rPr sz="1200" b="1">
+                          <a:solidFill>
+                            <a:srgbClr val="FFFFFF"/>
+                          </a:solidFill>
+                          <a:latin typeface="WenQuanYi Micro Hei"/>
+                        </a:rPr>
                         <a:t>环节</a:t>
                       </a:r>
                     </a:p>
@@ -12468,7 +12634,30 @@
                   </a:tcPr>
                 </a:tc>
               </a:tr>
-              <a:tr h="372291">
+              <a:tr h="473825">
+                <a:tc>
+                  <a:txBody>
+                    <a:bodyPr/>
+                    <a:lstStyle/>
+                    <a:p>
+                      <a:pPr algn="l"/>
+                      <a:r>
+                        <a:rPr sz="1000" b="0">
+                          <a:solidFill>
+                            <a:srgbClr val="333333"/>
+                          </a:solidFill>
+                          <a:latin typeface="WenQuanYi Micro Hei"/>
+                        </a:rPr>
+                        <a:t>13:30</a:t>
+                      </a:r>
+                    </a:p>
+                  </a:txBody>
+                  <a:tcPr>
+                    <a:solidFill>
+                      <a:srgbClr val="FFFFFF"/>
+                    </a:solidFill>
+                  </a:tcPr>
+                </a:tc>
                 <a:tc>
                   <a:txBody>
                     <a:bodyPr/>
@@ -12528,30 +12717,30 @@
                           </a:solidFill>
                           <a:latin typeface="WenQuanYi Micro Hei"/>
                         </a:rPr>
-                        <a:t>姚志勇</a:t>
-                      </a:r>
-                    </a:p>
-                  </a:txBody>
-                  <a:tcPr>
-                    <a:solidFill>
-                      <a:srgbClr val="FFFFFF"/>
-                    </a:solidFill>
-                  </a:tcPr>
-                </a:tc>
-                <a:tc>
-                  <a:txBody>
-                    <a:bodyPr/>
-                    <a:lstStyle/>
-                    <a:p>
-                      <a:pPr algn="l"/>
-                      <a:r>
-                        <a:rPr sz="1000" b="0">
-                          <a:solidFill>
-                            <a:srgbClr val="333333"/>
-                          </a:solidFill>
-                          <a:latin typeface="WenQuanYi Micro Hei"/>
-                        </a:rPr>
-                        <a:t>复旦管院教授 / 北大经院上海校友会会长</a:t>
+                        <a:t>姚志勇 教授</a:t>
+                      </a:r>
+                    </a:p>
+                  </a:txBody>
+                  <a:tcPr>
+                    <a:solidFill>
+                      <a:srgbClr val="FFFFFF"/>
+                    </a:solidFill>
+                  </a:tcPr>
+                </a:tc>
+                <a:tc>
+                  <a:txBody>
+                    <a:bodyPr/>
+                    <a:lstStyle/>
+                    <a:p>
+                      <a:pPr algn="l"/>
+                      <a:r>
+                        <a:rPr sz="1000" b="0">
+                          <a:solidFill>
+                            <a:srgbClr val="333333"/>
+                          </a:solidFill>
+                          <a:latin typeface="WenQuanYi Micro Hei"/>
+                        </a:rPr>
+                        <a:t>复旦管院 / 北大经院上海校友会会长</a:t>
                       </a:r>
                     </a:p>
                   </a:txBody>
@@ -12562,7 +12751,30 @@
                   </a:tcPr>
                 </a:tc>
               </a:tr>
-              <a:tr h="372291">
+              <a:tr h="473825">
+                <a:tc>
+                  <a:txBody>
+                    <a:bodyPr/>
+                    <a:lstStyle/>
+                    <a:p>
+                      <a:pPr algn="l"/>
+                      <a:r>
+                        <a:rPr sz="1000" b="0">
+                          <a:solidFill>
+                            <a:srgbClr val="333333"/>
+                          </a:solidFill>
+                          <a:latin typeface="WenQuanYi Micro Hei"/>
+                        </a:rPr>
+                        <a:t>13:35</a:t>
+                      </a:r>
+                    </a:p>
+                  </a:txBody>
+                  <a:tcPr>
+                    <a:solidFill>
+                      <a:srgbClr val="D9E1F2"/>
+                    </a:solidFill>
+                  </a:tcPr>
+                </a:tc>
                 <a:tc>
                   <a:txBody>
                     <a:bodyPr/>
@@ -12645,7 +12857,7 @@
                           </a:solidFill>
                           <a:latin typeface="WenQuanYi Micro Hei"/>
                         </a:rPr>
-                        <a:t>恒生研究院院长</a:t>
+                        <a:t>恒生电子研究院院长</a:t>
                       </a:r>
                     </a:p>
                   </a:txBody>
@@ -12656,7 +12868,30 @@
                   </a:tcPr>
                 </a:tc>
               </a:tr>
-              <a:tr h="372291">
+              <a:tr h="473825">
+                <a:tc>
+                  <a:txBody>
+                    <a:bodyPr/>
+                    <a:lstStyle/>
+                    <a:p>
+                      <a:pPr algn="l"/>
+                      <a:r>
+                        <a:rPr sz="1000" b="0">
+                          <a:solidFill>
+                            <a:srgbClr val="333333"/>
+                          </a:solidFill>
+                          <a:latin typeface="WenQuanYi Micro Hei"/>
+                        </a:rPr>
+                        <a:t>14:00</a:t>
+                      </a:r>
+                    </a:p>
+                  </a:txBody>
+                  <a:tcPr>
+                    <a:solidFill>
+                      <a:srgbClr val="FFFFFF"/>
+                    </a:solidFill>
+                  </a:tcPr>
+                </a:tc>
                 <a:tc>
                   <a:txBody>
                     <a:bodyPr/>
@@ -12750,7 +12985,147 @@
                   </a:tcPr>
                 </a:tc>
               </a:tr>
-              <a:tr h="372291">
+              <a:tr h="473825">
+                <a:tc>
+                  <a:txBody>
+                    <a:bodyPr/>
+                    <a:lstStyle/>
+                    <a:p>
+                      <a:pPr algn="l"/>
+                      <a:r>
+                        <a:rPr sz="1000" b="0">
+                          <a:solidFill>
+                            <a:srgbClr val="333333"/>
+                          </a:solidFill>
+                          <a:latin typeface="WenQuanYi Micro Hei"/>
+                        </a:rPr>
+                        <a:t>14:25</a:t>
+                      </a:r>
+                    </a:p>
+                  </a:txBody>
+                  <a:tcPr>
+                    <a:solidFill>
+                      <a:srgbClr val="D9E1F2"/>
+                    </a:solidFill>
+                  </a:tcPr>
+                </a:tc>
+                <a:tc>
+                  <a:txBody>
+                    <a:bodyPr/>
+                    <a:lstStyle/>
+                    <a:p>
+                      <a:pPr algn="l"/>
+                      <a:r>
+                        <a:rPr sz="1000" b="0">
+                          <a:solidFill>
+                            <a:srgbClr val="333333"/>
+                          </a:solidFill>
+                          <a:latin typeface="WenQuanYi Micro Hei"/>
+                        </a:rPr>
+                        <a:t>★ 颁奖典礼</a:t>
+                      </a:r>
+                    </a:p>
+                  </a:txBody>
+                  <a:tcPr>
+                    <a:solidFill>
+                      <a:srgbClr val="D9E1F2"/>
+                    </a:solidFill>
+                  </a:tcPr>
+                </a:tc>
+                <a:tc>
+                  <a:txBody>
+                    <a:bodyPr/>
+                    <a:lstStyle/>
+                    <a:p>
+                      <a:pPr algn="l"/>
+                      <a:r>
+                        <a:rPr sz="1000" b="0">
+                          <a:solidFill>
+                            <a:srgbClr val="333333"/>
+                          </a:solidFill>
+                          <a:latin typeface="WenQuanYi Micro Hei"/>
+                        </a:rPr>
+                        <a:t>主礼嘉宾 ×5</a:t>
+                      </a:r>
+                    </a:p>
+                  </a:txBody>
+                  <a:tcPr>
+                    <a:solidFill>
+                      <a:srgbClr val="D9E1F2"/>
+                    </a:solidFill>
+                  </a:tcPr>
+                </a:tc>
+                <a:tc>
+                  <a:txBody>
+                    <a:bodyPr/>
+                    <a:lstStyle/>
+                    <a:p>
+                      <a:pPr algn="l"/>
+                      <a:r>
+                        <a:rPr sz="1000" b="0">
+                          <a:solidFill>
+                            <a:srgbClr val="333333"/>
+                          </a:solidFill>
+                          <a:latin typeface="WenQuanYi Micro Hei"/>
+                        </a:rPr>
+                        <a:t>姚志勇、胡继刚、黄欣、福布斯-代表、绿城-代表</a:t>
+                      </a:r>
+                    </a:p>
+                  </a:txBody>
+                  <a:tcPr>
+                    <a:solidFill>
+                      <a:srgbClr val="D9E1F2"/>
+                    </a:solidFill>
+                  </a:tcPr>
+                </a:tc>
+                <a:tc>
+                  <a:txBody>
+                    <a:bodyPr/>
+                    <a:lstStyle/>
+                    <a:p>
+                      <a:pPr algn="l"/>
+                      <a:r>
+                        <a:rPr sz="1000" b="0">
+                          <a:solidFill>
+                            <a:srgbClr val="333333"/>
+                          </a:solidFill>
+                          <a:latin typeface="WenQuanYi Micro Hei"/>
+                        </a:rPr>
+                        <a:t>高光启幕</a:t>
+                      </a:r>
+                    </a:p>
+                  </a:txBody>
+                  <a:tcPr>
+                    <a:solidFill>
+                      <a:srgbClr val="D9E1F2"/>
+                    </a:solidFill>
+                  </a:tcPr>
+                </a:tc>
+              </a:tr>
+              <a:tr h="473825">
+                <a:tc>
+                  <a:txBody>
+                    <a:bodyPr/>
+                    <a:lstStyle/>
+                    <a:p>
+                      <a:pPr algn="l"/>
+                      <a:r>
+                        <a:rPr sz="1000" b="0">
+                          <a:solidFill>
+                            <a:srgbClr val="333333"/>
+                          </a:solidFill>
+                          <a:latin typeface="WenQuanYi Micro Hei"/>
+                        </a:rPr>
+                        <a:t>14:40</a:t>
+                      </a:r>
+                    </a:p>
+                  </a:txBody>
+                  <a:tcPr>
+                    <a:solidFill>
+                      <a:srgbClr val="FFFFFF"/>
+                    </a:solidFill>
+                  </a:tcPr>
+                </a:tc>
                 <a:tc>
                   <a:txBody>
                     <a:bodyPr/>
@@ -12770,147 +13145,170 @@
                   </a:txBody>
                   <a:tcPr>
                     <a:solidFill>
-                      <a:srgbClr val="D9E1F2"/>
-                    </a:solidFill>
-                  </a:tcPr>
-                </a:tc>
-                <a:tc>
-                  <a:txBody>
-                    <a:bodyPr/>
-                    <a:lstStyle/>
-                    <a:p>
-                      <a:pPr algn="l"/>
-                      <a:r>
-                        <a:rPr sz="1000" b="0">
-                          <a:solidFill>
-                            <a:srgbClr val="333333"/>
-                          </a:solidFill>
-                          <a:latin typeface="WenQuanYi Micro Hei"/>
-                        </a:rPr>
-                        <a:t>主持</a:t>
-                      </a:r>
-                    </a:p>
-                  </a:txBody>
-                  <a:tcPr>
-                    <a:solidFill>
-                      <a:srgbClr val="D9E1F2"/>
-                    </a:solidFill>
-                  </a:tcPr>
-                </a:tc>
-                <a:tc>
-                  <a:txBody>
-                    <a:bodyPr/>
-                    <a:lstStyle/>
-                    <a:p>
-                      <a:pPr algn="l"/>
-                      <a:r>
-                        <a:rPr sz="1000" b="0">
-                          <a:solidFill>
-                            <a:srgbClr val="333333"/>
-                          </a:solidFill>
-                          <a:latin typeface="WenQuanYi Micro Hei"/>
-                        </a:rPr>
-                        <a:t>王珏</a:t>
-                      </a:r>
-                    </a:p>
-                  </a:txBody>
-                  <a:tcPr>
-                    <a:solidFill>
-                      <a:srgbClr val="D9E1F2"/>
-                    </a:solidFill>
-                  </a:tcPr>
-                </a:tc>
-                <a:tc>
-                  <a:txBody>
-                    <a:bodyPr/>
-                    <a:lstStyle/>
-                    <a:p>
-                      <a:pPr algn="l"/>
-                      <a:r>
-                        <a:rPr sz="1000" b="0">
-                          <a:solidFill>
-                            <a:srgbClr val="333333"/>
-                          </a:solidFill>
-                          <a:latin typeface="WenQuanYi Micro Hei"/>
-                        </a:rPr>
-                        <a:t>北大经院上海校友会理事</a:t>
-                      </a:r>
-                    </a:p>
-                  </a:txBody>
-                  <a:tcPr>
-                    <a:solidFill>
-                      <a:srgbClr val="D9E1F2"/>
+                      <a:srgbClr val="FFFFFF"/>
+                    </a:solidFill>
+                  </a:tcPr>
+                </a:tc>
+                <a:tc>
+                  <a:txBody>
+                    <a:bodyPr/>
+                    <a:lstStyle/>
+                    <a:p>
+                      <a:pPr algn="l"/>
+                      <a:r>
+                        <a:rPr sz="1000" b="0">
+                          <a:solidFill>
+                            <a:srgbClr val="333333"/>
+                          </a:solidFill>
+                          <a:latin typeface="WenQuanYi Micro Hei"/>
+                        </a:rPr>
+                        <a:t>主持 + 嘉宾 ×4</a:t>
+                      </a:r>
+                    </a:p>
+                  </a:txBody>
+                  <a:tcPr>
+                    <a:solidFill>
+                      <a:srgbClr val="FFFFFF"/>
+                    </a:solidFill>
+                  </a:tcPr>
+                </a:tc>
+                <a:tc>
+                  <a:txBody>
+                    <a:bodyPr/>
+                    <a:lstStyle/>
+                    <a:p>
+                      <a:pPr algn="l"/>
+                      <a:r>
+                        <a:rPr sz="1000" b="0">
+                          <a:solidFill>
+                            <a:srgbClr val="333333"/>
+                          </a:solidFill>
+                          <a:latin typeface="WenQuanYi Micro Hei"/>
+                        </a:rPr>
+                        <a:t>王珏 + 白硕、李龙、齐宝鑫、刘文平</a:t>
+                      </a:r>
+                    </a:p>
+                  </a:txBody>
+                  <a:tcPr>
+                    <a:solidFill>
+                      <a:srgbClr val="FFFFFF"/>
+                    </a:solidFill>
+                  </a:tcPr>
+                </a:tc>
+                <a:tc>
+                  <a:txBody>
+                    <a:bodyPr/>
+                    <a:lstStyle/>
+                    <a:p>
+                      <a:pPr algn="l"/>
+                      <a:r>
+                        <a:rPr sz="1000" b="0">
+                          <a:solidFill>
+                            <a:srgbClr val="333333"/>
+                          </a:solidFill>
+                          <a:latin typeface="WenQuanYi Micro Hei"/>
+                        </a:rPr>
+                        <a:t>AI 硬核圆桌</a:t>
+                      </a:r>
+                    </a:p>
+                  </a:txBody>
+                  <a:tcPr>
+                    <a:solidFill>
+                      <a:srgbClr val="FFFFFF"/>
                     </a:solidFill>
                   </a:tcPr>
                 </a:tc>
               </a:tr>
-              <a:tr h="372291">
-                <a:tc>
-                  <a:txBody>
-                    <a:bodyPr/>
-                    <a:lstStyle/>
-                    <a:p>
-                      <a:pPr algn="l"/>
-                      <a:r>
-                        <a:rPr sz="1000" b="0">
-                          <a:solidFill>
-                            <a:srgbClr val="333333"/>
-                          </a:solidFill>
-                          <a:latin typeface="WenQuanYi Micro Hei"/>
-                        </a:rPr>
-                        <a:t>圆桌一</a:t>
-                      </a:r>
-                    </a:p>
-                  </a:txBody>
-                  <a:tcPr>
-                    <a:solidFill>
-                      <a:srgbClr val="FFFFFF"/>
-                    </a:solidFill>
-                  </a:tcPr>
-                </a:tc>
-                <a:tc>
-                  <a:txBody>
-                    <a:bodyPr/>
-                    <a:lstStyle/>
-                    <a:p>
-                      <a:pPr algn="l"/>
-                      <a:r>
-                        <a:rPr sz="1000" b="0">
-                          <a:solidFill>
-                            <a:srgbClr val="333333"/>
-                          </a:solidFill>
-                          <a:latin typeface="WenQuanYi Micro Hei"/>
-                        </a:rPr>
-                        <a:t>嘉宾 ×4</a:t>
-                      </a:r>
-                    </a:p>
-                  </a:txBody>
-                  <a:tcPr>
-                    <a:solidFill>
-                      <a:srgbClr val="FFFFFF"/>
-                    </a:solidFill>
-                  </a:tcPr>
-                </a:tc>
-                <a:tc>
-                  <a:txBody>
-                    <a:bodyPr/>
-                    <a:lstStyle/>
-                    <a:p>
-                      <a:pPr algn="l"/>
-                      <a:r>
-                        <a:rPr sz="1000" b="0">
-                          <a:solidFill>
-                            <a:srgbClr val="333333"/>
-                          </a:solidFill>
-                          <a:latin typeface="WenQuanYi Micro Hei"/>
-                        </a:rPr>
-                        <a:t>白硕、李龙、齐宝鑫、刘文平</a:t>
-                      </a:r>
-                    </a:p>
-                  </a:txBody>
-                  <a:tcPr>
-                    <a:solidFill>
-                      <a:srgbClr val="FFFFFF"/>
+              <a:tr h="473825">
+                <a:tc>
+                  <a:txBody>
+                    <a:bodyPr/>
+                    <a:lstStyle/>
+                    <a:p>
+                      <a:pPr algn="l"/>
+                      <a:r>
+                        <a:rPr sz="1000" b="0">
+                          <a:solidFill>
+                            <a:srgbClr val="333333"/>
+                          </a:solidFill>
+                          <a:latin typeface="WenQuanYi Micro Hei"/>
+                        </a:rPr>
+                        <a:t>15:20</a:t>
+                      </a:r>
+                    </a:p>
+                  </a:txBody>
+                  <a:tcPr>
+                    <a:solidFill>
+                      <a:srgbClr val="D9E1F2"/>
+                    </a:solidFill>
+                  </a:tcPr>
+                </a:tc>
+                <a:tc>
+                  <a:txBody>
+                    <a:bodyPr/>
+                    <a:lstStyle/>
+                    <a:p>
+                      <a:pPr algn="l"/>
+                      <a:r>
+                        <a:rPr sz="1000" b="0">
+                          <a:solidFill>
+                            <a:srgbClr val="333333"/>
+                          </a:solidFill>
+                          <a:latin typeface="WenQuanYi Micro Hei"/>
+                        </a:rPr>
+                        <a:t>圆桌二（巅峰对话）</a:t>
+                      </a:r>
+                    </a:p>
+                  </a:txBody>
+                  <a:tcPr>
+                    <a:solidFill>
+                      <a:srgbClr val="D9E1F2"/>
+                    </a:solidFill>
+                  </a:tcPr>
+                </a:tc>
+                <a:tc>
+                  <a:txBody>
+                    <a:bodyPr/>
+                    <a:lstStyle/>
+                    <a:p>
+                      <a:pPr algn="l"/>
+                      <a:r>
+                        <a:rPr sz="1000" b="0">
+                          <a:solidFill>
+                            <a:srgbClr val="333333"/>
+                          </a:solidFill>
+                          <a:latin typeface="WenQuanYi Micro Hei"/>
+                        </a:rPr>
+                        <a:t>主持 + 嘉宾 ×5</a:t>
+                      </a:r>
+                    </a:p>
+                  </a:txBody>
+                  <a:tcPr>
+                    <a:solidFill>
+                      <a:srgbClr val="D9E1F2"/>
+                    </a:solidFill>
+                  </a:tcPr>
+                </a:tc>
+                <a:tc>
+                  <a:txBody>
+                    <a:bodyPr/>
+                    <a:lstStyle/>
+                    <a:p>
+                      <a:pPr algn="l"/>
+                      <a:r>
+                        <a:rPr sz="1000" b="0">
+                          <a:solidFill>
+                            <a:srgbClr val="333333"/>
+                          </a:solidFill>
+                          <a:latin typeface="WenQuanYi Micro Hei"/>
+                        </a:rPr>
+                        <a:t>胡继刚 + 刘帅华、徐泳泽、黎远、刘剑英、于敬</a:t>
+                      </a:r>
+                    </a:p>
+                  </a:txBody>
+                  <a:tcPr>
+                    <a:solidFill>
+                      <a:srgbClr val="D9E1F2"/>
                     </a:solidFill>
                   </a:tcPr>
                 </a:tc>
@@ -12933,172 +13331,218 @@
                   </a:txBody>
                   <a:tcPr>
                     <a:solidFill>
-                      <a:srgbClr val="FFFFFF"/>
+                      <a:srgbClr val="D9E1F2"/>
                     </a:solidFill>
                   </a:tcPr>
                 </a:tc>
               </a:tr>
-              <a:tr h="372291">
-                <a:tc>
-                  <a:txBody>
-                    <a:bodyPr/>
-                    <a:lstStyle/>
-                    <a:p>
-                      <a:pPr algn="l"/>
-                      <a:r>
-                        <a:rPr sz="1000" b="0">
-                          <a:solidFill>
-                            <a:srgbClr val="333333"/>
-                          </a:solidFill>
-                          <a:latin typeface="WenQuanYi Micro Hei"/>
-                        </a:rPr>
-                        <a:t>巅峰对话</a:t>
-                      </a:r>
-                    </a:p>
-                  </a:txBody>
-                  <a:tcPr>
-                    <a:solidFill>
-                      <a:srgbClr val="D9E1F2"/>
-                    </a:solidFill>
-                  </a:tcPr>
-                </a:tc>
-                <a:tc>
-                  <a:txBody>
-                    <a:bodyPr/>
-                    <a:lstStyle/>
-                    <a:p>
-                      <a:pPr algn="l"/>
-                      <a:r>
-                        <a:rPr sz="1000" b="0">
-                          <a:solidFill>
-                            <a:srgbClr val="333333"/>
-                          </a:solidFill>
-                          <a:latin typeface="WenQuanYi Micro Hei"/>
-                        </a:rPr>
-                        <a:t>主持</a:t>
-                      </a:r>
-                    </a:p>
-                  </a:txBody>
-                  <a:tcPr>
-                    <a:solidFill>
-                      <a:srgbClr val="D9E1F2"/>
-                    </a:solidFill>
-                  </a:tcPr>
-                </a:tc>
-                <a:tc>
-                  <a:txBody>
-                    <a:bodyPr/>
-                    <a:lstStyle/>
-                    <a:p>
-                      <a:pPr algn="l"/>
-                      <a:r>
-                        <a:rPr sz="1000" b="0">
-                          <a:solidFill>
-                            <a:srgbClr val="333333"/>
-                          </a:solidFill>
-                          <a:latin typeface="WenQuanYi Micro Hei"/>
-                        </a:rPr>
-                        <a:t>胡继刚</a:t>
-                      </a:r>
-                    </a:p>
-                  </a:txBody>
-                  <a:tcPr>
-                    <a:solidFill>
-                      <a:srgbClr val="D9E1F2"/>
-                    </a:solidFill>
-                  </a:tcPr>
-                </a:tc>
-                <a:tc>
-                  <a:txBody>
-                    <a:bodyPr/>
-                    <a:lstStyle/>
-                    <a:p>
-                      <a:pPr algn="l"/>
-                      <a:r>
-                        <a:rPr sz="1000" b="0">
-                          <a:solidFill>
-                            <a:srgbClr val="333333"/>
-                          </a:solidFill>
-                          <a:latin typeface="WenQuanYi Micro Hei"/>
-                        </a:rPr>
-                        <a:t>杨浦科企联执行会长</a:t>
-                      </a:r>
-                    </a:p>
-                  </a:txBody>
-                  <a:tcPr>
-                    <a:solidFill>
-                      <a:srgbClr val="D9E1F2"/>
+              <a:tr h="473825">
+                <a:tc>
+                  <a:txBody>
+                    <a:bodyPr/>
+                    <a:lstStyle/>
+                    <a:p>
+                      <a:pPr algn="l"/>
+                      <a:r>
+                        <a:rPr sz="1000" b="0">
+                          <a:solidFill>
+                            <a:srgbClr val="333333"/>
+                          </a:solidFill>
+                          <a:latin typeface="WenQuanYi Micro Hei"/>
+                        </a:rPr>
+                        <a:t>16:50</a:t>
+                      </a:r>
+                    </a:p>
+                  </a:txBody>
+                  <a:tcPr>
+                    <a:solidFill>
+                      <a:srgbClr val="FFFFFF"/>
+                    </a:solidFill>
+                  </a:tcPr>
+                </a:tc>
+                <a:tc>
+                  <a:txBody>
+                    <a:bodyPr/>
+                    <a:lstStyle/>
+                    <a:p>
+                      <a:pPr algn="l"/>
+                      <a:r>
+                        <a:rPr sz="1000" b="0">
+                          <a:solidFill>
+                            <a:srgbClr val="333333"/>
+                          </a:solidFill>
+                          <a:latin typeface="WenQuanYi Micro Hei"/>
+                        </a:rPr>
+                        <a:t>主旨 3</a:t>
+                      </a:r>
+                    </a:p>
+                  </a:txBody>
+                  <a:tcPr>
+                    <a:solidFill>
+                      <a:srgbClr val="FFFFFF"/>
+                    </a:solidFill>
+                  </a:tcPr>
+                </a:tc>
+                <a:tc>
+                  <a:txBody>
+                    <a:bodyPr/>
+                    <a:lstStyle/>
+                    <a:p>
+                      <a:pPr algn="l"/>
+                      <a:r>
+                        <a:rPr sz="1000" b="0">
+                          <a:solidFill>
+                            <a:srgbClr val="333333"/>
+                          </a:solidFill>
+                          <a:latin typeface="WenQuanYi Micro Hei"/>
+                        </a:rPr>
+                        <a:t>演讲台</a:t>
+                      </a:r>
+                    </a:p>
+                  </a:txBody>
+                  <a:tcPr>
+                    <a:solidFill>
+                      <a:srgbClr val="FFFFFF"/>
+                    </a:solidFill>
+                  </a:tcPr>
+                </a:tc>
+                <a:tc>
+                  <a:txBody>
+                    <a:bodyPr/>
+                    <a:lstStyle/>
+                    <a:p>
+                      <a:pPr algn="l"/>
+                      <a:r>
+                        <a:rPr sz="1000" b="0">
+                          <a:solidFill>
+                            <a:srgbClr val="333333"/>
+                          </a:solidFill>
+                          <a:latin typeface="WenQuanYi Micro Hei"/>
+                        </a:rPr>
+                        <a:t>王维军</a:t>
+                      </a:r>
+                    </a:p>
+                  </a:txBody>
+                  <a:tcPr>
+                    <a:solidFill>
+                      <a:srgbClr val="FFFFFF"/>
+                    </a:solidFill>
+                  </a:tcPr>
+                </a:tc>
+                <a:tc>
+                  <a:txBody>
+                    <a:bodyPr/>
+                    <a:lstStyle/>
+                    <a:p>
+                      <a:pPr algn="l"/>
+                      <a:r>
+                        <a:rPr sz="1000" b="0">
+                          <a:solidFill>
+                            <a:srgbClr val="333333"/>
+                          </a:solidFill>
+                          <a:latin typeface="WenQuanYi Micro Hei"/>
+                        </a:rPr>
+                        <a:t>泓塬资产董事长</a:t>
+                      </a:r>
+                    </a:p>
+                  </a:txBody>
+                  <a:tcPr>
+                    <a:solidFill>
+                      <a:srgbClr val="FFFFFF"/>
                     </a:solidFill>
                   </a:tcPr>
                 </a:tc>
               </a:tr>
-              <a:tr h="372291">
-                <a:tc>
-                  <a:txBody>
-                    <a:bodyPr/>
-                    <a:lstStyle/>
-                    <a:p>
-                      <a:pPr algn="l"/>
-                      <a:r>
-                        <a:rPr sz="1000" b="0">
-                          <a:solidFill>
-                            <a:srgbClr val="333333"/>
-                          </a:solidFill>
-                          <a:latin typeface="WenQuanYi Micro Hei"/>
-                        </a:rPr>
-                        <a:t>巅峰对话</a:t>
-                      </a:r>
-                    </a:p>
-                  </a:txBody>
-                  <a:tcPr>
-                    <a:solidFill>
-                      <a:srgbClr val="FFFFFF"/>
-                    </a:solidFill>
-                  </a:tcPr>
-                </a:tc>
-                <a:tc>
-                  <a:txBody>
-                    <a:bodyPr/>
-                    <a:lstStyle/>
-                    <a:p>
-                      <a:pPr algn="l"/>
-                      <a:r>
-                        <a:rPr sz="1000" b="0">
-                          <a:solidFill>
-                            <a:srgbClr val="333333"/>
-                          </a:solidFill>
-                          <a:latin typeface="WenQuanYi Micro Hei"/>
-                        </a:rPr>
-                        <a:t>嘉宾 ×5</a:t>
-                      </a:r>
-                    </a:p>
-                  </a:txBody>
-                  <a:tcPr>
-                    <a:solidFill>
-                      <a:srgbClr val="FFFFFF"/>
-                    </a:solidFill>
-                  </a:tcPr>
-                </a:tc>
-                <a:tc>
-                  <a:txBody>
-                    <a:bodyPr/>
-                    <a:lstStyle/>
-                    <a:p>
-                      <a:pPr algn="l"/>
-                      <a:r>
-                        <a:rPr sz="1000" b="0">
-                          <a:solidFill>
-                            <a:srgbClr val="333333"/>
-                          </a:solidFill>
-                          <a:latin typeface="WenQuanYi Micro Hei"/>
-                        </a:rPr>
-                        <a:t>刘帅华、徐泳泽、黎远、刘剑英、于敬</a:t>
-                      </a:r>
-                    </a:p>
-                  </a:txBody>
-                  <a:tcPr>
-                    <a:solidFill>
-                      <a:srgbClr val="FFFFFF"/>
+              <a:tr h="473825">
+                <a:tc>
+                  <a:txBody>
+                    <a:bodyPr/>
+                    <a:lstStyle/>
+                    <a:p>
+                      <a:pPr algn="l"/>
+                      <a:r>
+                        <a:rPr sz="1000" b="0">
+                          <a:solidFill>
+                            <a:srgbClr val="333333"/>
+                          </a:solidFill>
+                          <a:latin typeface="WenQuanYi Micro Hei"/>
+                        </a:rPr>
+                        <a:t>17:10</a:t>
+                      </a:r>
+                    </a:p>
+                  </a:txBody>
+                  <a:tcPr>
+                    <a:solidFill>
+                      <a:srgbClr val="D9E1F2"/>
+                    </a:solidFill>
+                  </a:tcPr>
+                </a:tc>
+                <a:tc>
+                  <a:txBody>
+                    <a:bodyPr/>
+                    <a:lstStyle/>
+                    <a:p>
+                      <a:pPr algn="l"/>
+                      <a:r>
+                        <a:rPr sz="1000" b="0">
+                          <a:solidFill>
+                            <a:srgbClr val="333333"/>
+                          </a:solidFill>
+                          <a:latin typeface="WenQuanYi Micro Hei"/>
+                        </a:rPr>
+                        <a:t>主旨 4</a:t>
+                      </a:r>
+                    </a:p>
+                  </a:txBody>
+                  <a:tcPr>
+                    <a:solidFill>
+                      <a:srgbClr val="D9E1F2"/>
+                    </a:solidFill>
+                  </a:tcPr>
+                </a:tc>
+                <a:tc>
+                  <a:txBody>
+                    <a:bodyPr/>
+                    <a:lstStyle/>
+                    <a:p>
+                      <a:pPr algn="l"/>
+                      <a:r>
+                        <a:rPr sz="1000" b="0">
+                          <a:solidFill>
+                            <a:srgbClr val="333333"/>
+                          </a:solidFill>
+                          <a:latin typeface="WenQuanYi Micro Hei"/>
+                        </a:rPr>
+                        <a:t>演讲台</a:t>
+                      </a:r>
+                    </a:p>
+                  </a:txBody>
+                  <a:tcPr>
+                    <a:solidFill>
+                      <a:srgbClr val="D9E1F2"/>
+                    </a:solidFill>
+                  </a:tcPr>
+                </a:tc>
+                <a:tc>
+                  <a:txBody>
+                    <a:bodyPr/>
+                    <a:lstStyle/>
+                    <a:p>
+                      <a:pPr algn="l"/>
+                      <a:r>
+                        <a:rPr sz="1000" b="0">
+                          <a:solidFill>
+                            <a:srgbClr val="333333"/>
+                          </a:solidFill>
+                          <a:latin typeface="WenQuanYi Micro Hei"/>
+                        </a:rPr>
+                        <a:t>寇文红</a:t>
+                      </a:r>
+                    </a:p>
+                  </a:txBody>
+                  <a:tcPr>
+                    <a:solidFill>
+                      <a:srgbClr val="D9E1F2"/>
                     </a:solidFill>
                   </a:tcPr>
                 </a:tc>
@@ -13121,32 +13565,55 @@
                   </a:txBody>
                   <a:tcPr>
                     <a:solidFill>
-                      <a:srgbClr val="FFFFFF"/>
+                      <a:srgbClr val="D9E1F2"/>
                     </a:solidFill>
                   </a:tcPr>
                 </a:tc>
               </a:tr>
-              <a:tr h="372291">
-                <a:tc>
-                  <a:txBody>
-                    <a:bodyPr/>
-                    <a:lstStyle/>
-                    <a:p>
-                      <a:pPr algn="l"/>
-                      <a:r>
-                        <a:rPr sz="1000" b="0">
-                          <a:solidFill>
-                            <a:srgbClr val="333333"/>
-                          </a:solidFill>
-                          <a:latin typeface="WenQuanYi Micro Hei"/>
-                        </a:rPr>
-                        <a:t>主旨 3</a:t>
-                      </a:r>
-                    </a:p>
-                  </a:txBody>
-                  <a:tcPr>
-                    <a:solidFill>
-                      <a:srgbClr val="D9E1F2"/>
+              <a:tr h="473825">
+                <a:tc>
+                  <a:txBody>
+                    <a:bodyPr/>
+                    <a:lstStyle/>
+                    <a:p>
+                      <a:pPr algn="l"/>
+                      <a:r>
+                        <a:rPr sz="1000" b="0">
+                          <a:solidFill>
+                            <a:srgbClr val="333333"/>
+                          </a:solidFill>
+                          <a:latin typeface="WenQuanYi Micro Hei"/>
+                        </a:rPr>
+                        <a:t>17:30</a:t>
+                      </a:r>
+                    </a:p>
+                  </a:txBody>
+                  <a:tcPr>
+                    <a:solidFill>
+                      <a:srgbClr val="FFFFFF"/>
+                    </a:solidFill>
+                  </a:tcPr>
+                </a:tc>
+                <a:tc>
+                  <a:txBody>
+                    <a:bodyPr/>
+                    <a:lstStyle/>
+                    <a:p>
+                      <a:pPr algn="l"/>
+                      <a:r>
+                        <a:rPr sz="1000" b="0">
+                          <a:solidFill>
+                            <a:srgbClr val="333333"/>
+                          </a:solidFill>
+                          <a:latin typeface="WenQuanYi Micro Hei"/>
+                        </a:rPr>
+                        <a:t>主旨 5</a:t>
+                      </a:r>
+                    </a:p>
+                  </a:txBody>
+                  <a:tcPr>
+                    <a:solidFill>
+                      <a:srgbClr val="FFFFFF"/>
                     </a:solidFill>
                   </a:tcPr>
                 </a:tc>
@@ -13169,523 +13636,170 @@
                   </a:txBody>
                   <a:tcPr>
                     <a:solidFill>
-                      <a:srgbClr val="D9E1F2"/>
-                    </a:solidFill>
-                  </a:tcPr>
-                </a:tc>
-                <a:tc>
-                  <a:txBody>
-                    <a:bodyPr/>
-                    <a:lstStyle/>
-                    <a:p>
-                      <a:pPr algn="l"/>
-                      <a:r>
-                        <a:rPr sz="1000" b="0">
-                          <a:solidFill>
-                            <a:srgbClr val="333333"/>
-                          </a:solidFill>
-                          <a:latin typeface="WenQuanYi Micro Hei"/>
-                        </a:rPr>
-                        <a:t>王维军</a:t>
-                      </a:r>
-                    </a:p>
-                  </a:txBody>
-                  <a:tcPr>
-                    <a:solidFill>
-                      <a:srgbClr val="D9E1F2"/>
-                    </a:solidFill>
-                  </a:tcPr>
-                </a:tc>
-                <a:tc>
-                  <a:txBody>
-                    <a:bodyPr/>
-                    <a:lstStyle/>
-                    <a:p>
-                      <a:pPr algn="l"/>
-                      <a:r>
-                        <a:rPr sz="1000" b="0">
-                          <a:solidFill>
-                            <a:srgbClr val="333333"/>
-                          </a:solidFill>
-                          <a:latin typeface="WenQuanYi Micro Hei"/>
-                        </a:rPr>
-                        <a:t>泓塬资产董事长</a:t>
-                      </a:r>
-                    </a:p>
-                  </a:txBody>
-                  <a:tcPr>
-                    <a:solidFill>
-                      <a:srgbClr val="D9E1F2"/>
+                      <a:srgbClr val="FFFFFF"/>
+                    </a:solidFill>
+                  </a:tcPr>
+                </a:tc>
+                <a:tc>
+                  <a:txBody>
+                    <a:bodyPr/>
+                    <a:lstStyle/>
+                    <a:p>
+                      <a:pPr algn="l"/>
+                      <a:r>
+                        <a:rPr sz="1000" b="0">
+                          <a:solidFill>
+                            <a:srgbClr val="333333"/>
+                          </a:solidFill>
+                          <a:latin typeface="WenQuanYi Micro Hei"/>
+                        </a:rPr>
+                        <a:t>张露瑶 博士</a:t>
+                      </a:r>
+                    </a:p>
+                  </a:txBody>
+                  <a:tcPr>
+                    <a:solidFill>
+                      <a:srgbClr val="FFFFFF"/>
+                    </a:solidFill>
+                  </a:tcPr>
+                </a:tc>
+                <a:tc>
+                  <a:txBody>
+                    <a:bodyPr/>
+                    <a:lstStyle/>
+                    <a:p>
+                      <a:pPr algn="l"/>
+                      <a:r>
+                        <a:rPr sz="1000" b="0">
+                          <a:solidFill>
+                            <a:srgbClr val="333333"/>
+                          </a:solidFill>
+                          <a:latin typeface="WenQuanYi Micro Hei"/>
+                        </a:rPr>
+                        <a:t>昆山杜克大学助理教授</a:t>
+                      </a:r>
+                    </a:p>
+                  </a:txBody>
+                  <a:tcPr>
+                    <a:solidFill>
+                      <a:srgbClr val="FFFFFF"/>
                     </a:solidFill>
                   </a:tcPr>
                 </a:tc>
               </a:tr>
-              <a:tr h="372291">
-                <a:tc>
-                  <a:txBody>
-                    <a:bodyPr/>
-                    <a:lstStyle/>
-                    <a:p>
-                      <a:pPr algn="l"/>
-                      <a:r>
-                        <a:rPr sz="1000" b="0">
-                          <a:solidFill>
-                            <a:srgbClr val="333333"/>
-                          </a:solidFill>
-                          <a:latin typeface="WenQuanYi Micro Hei"/>
-                        </a:rPr>
-                        <a:t>主旨 4</a:t>
-                      </a:r>
-                    </a:p>
-                  </a:txBody>
-                  <a:tcPr>
-                    <a:solidFill>
-                      <a:srgbClr val="FFFFFF"/>
-                    </a:solidFill>
-                  </a:tcPr>
-                </a:tc>
-                <a:tc>
-                  <a:txBody>
-                    <a:bodyPr/>
-                    <a:lstStyle/>
-                    <a:p>
-                      <a:pPr algn="l"/>
-                      <a:r>
-                        <a:rPr sz="1000" b="0">
-                          <a:solidFill>
-                            <a:srgbClr val="333333"/>
-                          </a:solidFill>
-                          <a:latin typeface="WenQuanYi Micro Hei"/>
-                        </a:rPr>
-                        <a:t>演讲台</a:t>
-                      </a:r>
-                    </a:p>
-                  </a:txBody>
-                  <a:tcPr>
-                    <a:solidFill>
-                      <a:srgbClr val="FFFFFF"/>
-                    </a:solidFill>
-                  </a:tcPr>
-                </a:tc>
-                <a:tc>
-                  <a:txBody>
-                    <a:bodyPr/>
-                    <a:lstStyle/>
-                    <a:p>
-                      <a:pPr algn="l"/>
-                      <a:r>
-                        <a:rPr sz="1000" b="0">
-                          <a:solidFill>
-                            <a:srgbClr val="333333"/>
-                          </a:solidFill>
-                          <a:latin typeface="WenQuanYi Micro Hei"/>
-                        </a:rPr>
-                        <a:t>寇文红</a:t>
-                      </a:r>
-                    </a:p>
-                  </a:txBody>
-                  <a:tcPr>
-                    <a:solidFill>
-                      <a:srgbClr val="FFFFFF"/>
-                    </a:solidFill>
-                  </a:tcPr>
-                </a:tc>
-                <a:tc>
-                  <a:txBody>
-                    <a:bodyPr/>
-                    <a:lstStyle/>
-                    <a:p>
-                      <a:pPr algn="l"/>
-                      <a:r>
-                        <a:rPr sz="1000" b="0">
-                          <a:solidFill>
-                            <a:srgbClr val="333333"/>
-                          </a:solidFill>
-                          <a:latin typeface="WenQuanYi Micro Hei"/>
-                        </a:rPr>
-                        <a:t>《跨越自然利率陷阱》作者</a:t>
-                      </a:r>
-                    </a:p>
-                  </a:txBody>
-                  <a:tcPr>
-                    <a:solidFill>
-                      <a:srgbClr val="FFFFFF"/>
-                    </a:solidFill>
-                  </a:tcPr>
-                </a:tc>
-              </a:tr>
-              <a:tr h="372291">
-                <a:tc>
-                  <a:txBody>
-                    <a:bodyPr/>
-                    <a:lstStyle/>
-                    <a:p>
-                      <a:pPr algn="l"/>
-                      <a:r>
-                        <a:rPr sz="1000" b="0">
-                          <a:solidFill>
-                            <a:srgbClr val="333333"/>
-                          </a:solidFill>
-                          <a:latin typeface="WenQuanYi Micro Hei"/>
-                        </a:rPr>
-                        <a:t>主旨 5</a:t>
-                      </a:r>
-                    </a:p>
-                  </a:txBody>
-                  <a:tcPr>
-                    <a:solidFill>
-                      <a:srgbClr val="D9E1F2"/>
-                    </a:solidFill>
-                  </a:tcPr>
-                </a:tc>
-                <a:tc>
-                  <a:txBody>
-                    <a:bodyPr/>
-                    <a:lstStyle/>
-                    <a:p>
-                      <a:pPr algn="l"/>
-                      <a:r>
-                        <a:rPr sz="1000" b="0">
-                          <a:solidFill>
-                            <a:srgbClr val="333333"/>
-                          </a:solidFill>
-                          <a:latin typeface="WenQuanYi Micro Hei"/>
-                        </a:rPr>
-                        <a:t>演讲台</a:t>
-                      </a:r>
-                    </a:p>
-                  </a:txBody>
-                  <a:tcPr>
-                    <a:solidFill>
-                      <a:srgbClr val="D9E1F2"/>
-                    </a:solidFill>
-                  </a:tcPr>
-                </a:tc>
-                <a:tc>
-                  <a:txBody>
-                    <a:bodyPr/>
-                    <a:lstStyle/>
-                    <a:p>
-                      <a:pPr algn="l"/>
-                      <a:r>
-                        <a:rPr sz="1000" b="0">
-                          <a:solidFill>
-                            <a:srgbClr val="333333"/>
-                          </a:solidFill>
-                          <a:latin typeface="WenQuanYi Micro Hei"/>
-                        </a:rPr>
-                        <a:t>张露瑶 博士</a:t>
-                      </a:r>
-                    </a:p>
-                  </a:txBody>
-                  <a:tcPr>
-                    <a:solidFill>
-                      <a:srgbClr val="D9E1F2"/>
-                    </a:solidFill>
-                  </a:tcPr>
-                </a:tc>
-                <a:tc>
-                  <a:txBody>
-                    <a:bodyPr/>
-                    <a:lstStyle/>
-                    <a:p>
-                      <a:pPr algn="l"/>
-                      <a:r>
-                        <a:rPr sz="1000" b="0">
-                          <a:solidFill>
-                            <a:srgbClr val="333333"/>
-                          </a:solidFill>
-                          <a:latin typeface="WenQuanYi Micro Hei"/>
-                        </a:rPr>
-                        <a:t>昆山杜克大学助理教授</a:t>
-                      </a:r>
-                    </a:p>
-                  </a:txBody>
-                  <a:tcPr>
-                    <a:solidFill>
-                      <a:srgbClr val="D9E1F2"/>
-                    </a:solidFill>
-                  </a:tcPr>
-                </a:tc>
-              </a:tr>
-              <a:tr h="372291">
-                <a:tc>
-                  <a:txBody>
-                    <a:bodyPr/>
-                    <a:lstStyle/>
-                    <a:p>
-                      <a:pPr algn="l"/>
-                      <a:r>
-                        <a:rPr sz="1000" b="0">
-                          <a:solidFill>
-                            <a:srgbClr val="333333"/>
-                          </a:solidFill>
-                          <a:latin typeface="WenQuanYi Micro Hei"/>
-                        </a:rPr>
-                        <a:t>圆桌二</a:t>
-                      </a:r>
-                    </a:p>
-                  </a:txBody>
-                  <a:tcPr>
-                    <a:solidFill>
-                      <a:srgbClr val="FFFFFF"/>
-                    </a:solidFill>
-                  </a:tcPr>
-                </a:tc>
-                <a:tc>
-                  <a:txBody>
-                    <a:bodyPr/>
-                    <a:lstStyle/>
-                    <a:p>
-                      <a:pPr algn="l"/>
-                      <a:r>
-                        <a:rPr sz="1000" b="0">
-                          <a:solidFill>
-                            <a:srgbClr val="333333"/>
-                          </a:solidFill>
-                          <a:latin typeface="WenQuanYi Micro Hei"/>
-                        </a:rPr>
-                        <a:t>主持</a:t>
-                      </a:r>
-                    </a:p>
-                  </a:txBody>
-                  <a:tcPr>
-                    <a:solidFill>
-                      <a:srgbClr val="FFFFFF"/>
-                    </a:solidFill>
-                  </a:tcPr>
-                </a:tc>
-                <a:tc>
-                  <a:txBody>
-                    <a:bodyPr/>
-                    <a:lstStyle/>
-                    <a:p>
-                      <a:pPr algn="l"/>
-                      <a:r>
-                        <a:rPr sz="1000" b="0">
-                          <a:solidFill>
-                            <a:srgbClr val="333333"/>
-                          </a:solidFill>
-                          <a:latin typeface="WenQuanYi Micro Hei"/>
-                        </a:rPr>
-                        <a:t>黄欣</a:t>
-                      </a:r>
-                    </a:p>
-                  </a:txBody>
-                  <a:tcPr>
-                    <a:solidFill>
-                      <a:srgbClr val="FFFFFF"/>
-                    </a:solidFill>
-                  </a:tcPr>
-                </a:tc>
-                <a:tc>
-                  <a:txBody>
-                    <a:bodyPr/>
-                    <a:lstStyle/>
-                    <a:p>
-                      <a:pPr algn="l"/>
-                      <a:r>
-                        <a:rPr sz="1000" b="0">
-                          <a:solidFill>
-                            <a:srgbClr val="333333"/>
-                          </a:solidFill>
-                          <a:latin typeface="WenQuanYi Micro Hei"/>
-                        </a:rPr>
-                        <a:t>北大经院上海校友会秘书长</a:t>
-                      </a:r>
-                    </a:p>
-                  </a:txBody>
-                  <a:tcPr>
-                    <a:solidFill>
-                      <a:srgbClr val="FFFFFF"/>
-                    </a:solidFill>
-                  </a:tcPr>
-                </a:tc>
-              </a:tr>
-              <a:tr h="372291">
-                <a:tc>
-                  <a:txBody>
-                    <a:bodyPr/>
-                    <a:lstStyle/>
-                    <a:p>
-                      <a:pPr algn="l"/>
-                      <a:r>
-                        <a:rPr sz="1000" b="0">
-                          <a:solidFill>
-                            <a:srgbClr val="333333"/>
-                          </a:solidFill>
-                          <a:latin typeface="WenQuanYi Micro Hei"/>
-                        </a:rPr>
-                        <a:t>圆桌二</a:t>
-                      </a:r>
-                    </a:p>
-                  </a:txBody>
-                  <a:tcPr>
-                    <a:solidFill>
-                      <a:srgbClr val="D9E1F2"/>
-                    </a:solidFill>
-                  </a:tcPr>
-                </a:tc>
-                <a:tc>
-                  <a:txBody>
-                    <a:bodyPr/>
-                    <a:lstStyle/>
-                    <a:p>
-                      <a:pPr algn="l"/>
-                      <a:r>
-                        <a:rPr sz="1000" b="0">
-                          <a:solidFill>
-                            <a:srgbClr val="333333"/>
-                          </a:solidFill>
-                          <a:latin typeface="WenQuanYi Micro Hei"/>
-                        </a:rPr>
-                        <a:t>嘉宾 ×4</a:t>
-                      </a:r>
-                    </a:p>
-                  </a:txBody>
-                  <a:tcPr>
-                    <a:solidFill>
-                      <a:srgbClr val="D9E1F2"/>
-                    </a:solidFill>
-                  </a:tcPr>
-                </a:tc>
-                <a:tc>
-                  <a:txBody>
-                    <a:bodyPr/>
-                    <a:lstStyle/>
-                    <a:p>
-                      <a:pPr algn="l"/>
-                      <a:r>
-                        <a:rPr sz="1000" b="0">
-                          <a:solidFill>
-                            <a:srgbClr val="333333"/>
-                          </a:solidFill>
-                          <a:latin typeface="WenQuanYi Micro Hei"/>
-                        </a:rPr>
-                        <a:t>曲承东、刘胜利、饶雪莹、马俊杰</a:t>
-                      </a:r>
-                    </a:p>
-                  </a:txBody>
-                  <a:tcPr>
-                    <a:solidFill>
-                      <a:srgbClr val="D9E1F2"/>
-                    </a:solidFill>
-                  </a:tcPr>
-                </a:tc>
-                <a:tc>
-                  <a:txBody>
-                    <a:bodyPr/>
-                    <a:lstStyle/>
-                    <a:p>
-                      <a:pPr algn="l"/>
-                      <a:r>
-                        <a:rPr sz="1000" b="0">
-                          <a:solidFill>
-                            <a:srgbClr val="333333"/>
-                          </a:solidFill>
-                          <a:latin typeface="WenQuanYi Micro Hei"/>
-                        </a:rPr>
-                        <a:t>—</a:t>
-                      </a:r>
-                    </a:p>
-                  </a:txBody>
-                  <a:tcPr>
-                    <a:solidFill>
-                      <a:srgbClr val="D9E1F2"/>
-                    </a:solidFill>
-                  </a:tcPr>
-                </a:tc>
-              </a:tr>
-              <a:tr h="372297">
-                <a:tc>
-                  <a:txBody>
-                    <a:bodyPr/>
-                    <a:lstStyle/>
-                    <a:p>
-                      <a:pPr algn="l"/>
-                      <a:r>
-                        <a:rPr sz="1000" b="0">
-                          <a:solidFill>
-                            <a:srgbClr val="333333"/>
-                          </a:solidFill>
-                          <a:latin typeface="WenQuanYi Micro Hei"/>
-                        </a:rPr>
-                        <a:t>颁奖典礼</a:t>
-                      </a:r>
-                    </a:p>
-                  </a:txBody>
-                  <a:tcPr>
-                    <a:solidFill>
-                      <a:srgbClr val="FFFFFF"/>
-                    </a:solidFill>
-                  </a:tcPr>
-                </a:tc>
-                <a:tc>
-                  <a:txBody>
-                    <a:bodyPr/>
-                    <a:lstStyle/>
-                    <a:p>
-                      <a:pPr algn="l"/>
-                      <a:r>
-                        <a:rPr sz="1000" b="0">
-                          <a:solidFill>
-                            <a:srgbClr val="333333"/>
-                          </a:solidFill>
-                          <a:latin typeface="WenQuanYi Micro Hei"/>
-                        </a:rPr>
-                        <a:t>颁奖嘉宾 ×4</a:t>
-                      </a:r>
-                    </a:p>
-                  </a:txBody>
-                  <a:tcPr>
-                    <a:solidFill>
-                      <a:srgbClr val="FFFFFF"/>
-                    </a:solidFill>
-                  </a:tcPr>
-                </a:tc>
-                <a:tc>
-                  <a:txBody>
-                    <a:bodyPr/>
-                    <a:lstStyle/>
-                    <a:p>
-                      <a:pPr algn="l"/>
-                      <a:r>
-                        <a:rPr sz="1000" b="0">
-                          <a:solidFill>
-                            <a:srgbClr val="333333"/>
-                          </a:solidFill>
-                          <a:latin typeface="WenQuanYi Micro Hei"/>
-                        </a:rPr>
-                        <a:t>姚志勇、胡继刚、黄欣、绿城-代表</a:t>
-                      </a:r>
-                    </a:p>
-                  </a:txBody>
-                  <a:tcPr>
-                    <a:solidFill>
-                      <a:srgbClr val="FFFFFF"/>
-                    </a:solidFill>
-                  </a:tcPr>
-                </a:tc>
-                <a:tc>
-                  <a:txBody>
-                    <a:bodyPr/>
-                    <a:lstStyle/>
-                    <a:p>
-                      <a:pPr algn="l"/>
-                      <a:r>
-                        <a:rPr sz="1000" b="0">
-                          <a:solidFill>
-                            <a:srgbClr val="333333"/>
-                          </a:solidFill>
-                          <a:latin typeface="WenQuanYi Micro Hei"/>
-                        </a:rPr>
-                        <a:t>—</a:t>
-                      </a:r>
-                    </a:p>
-                  </a:txBody>
-                  <a:tcPr>
-                    <a:solidFill>
-                      <a:srgbClr val="FFFFFF"/>
+              <a:tr h="473830">
+                <a:tc>
+                  <a:txBody>
+                    <a:bodyPr/>
+                    <a:lstStyle/>
+                    <a:p>
+                      <a:pPr algn="l"/>
+                      <a:r>
+                        <a:rPr sz="1000" b="0">
+                          <a:solidFill>
+                            <a:srgbClr val="333333"/>
+                          </a:solidFill>
+                          <a:latin typeface="WenQuanYi Micro Hei"/>
+                        </a:rPr>
+                        <a:t>17:50</a:t>
+                      </a:r>
+                    </a:p>
+                  </a:txBody>
+                  <a:tcPr>
+                    <a:solidFill>
+                      <a:srgbClr val="D9E1F2"/>
+                    </a:solidFill>
+                  </a:tcPr>
+                </a:tc>
+                <a:tc>
+                  <a:txBody>
+                    <a:bodyPr/>
+                    <a:lstStyle/>
+                    <a:p>
+                      <a:pPr algn="l"/>
+                      <a:r>
+                        <a:rPr sz="1000" b="0">
+                          <a:solidFill>
+                            <a:srgbClr val="333333"/>
+                          </a:solidFill>
+                          <a:latin typeface="WenQuanYi Micro Hei"/>
+                        </a:rPr>
+                        <a:t>圆桌三 + 闭幕</a:t>
+                      </a:r>
+                    </a:p>
+                  </a:txBody>
+                  <a:tcPr>
+                    <a:solidFill>
+                      <a:srgbClr val="D9E1F2"/>
+                    </a:solidFill>
+                  </a:tcPr>
+                </a:tc>
+                <a:tc>
+                  <a:txBody>
+                    <a:bodyPr/>
+                    <a:lstStyle/>
+                    <a:p>
+                      <a:pPr algn="l"/>
+                      <a:r>
+                        <a:rPr sz="1000" b="0">
+                          <a:solidFill>
+                            <a:srgbClr val="333333"/>
+                          </a:solidFill>
+                          <a:latin typeface="WenQuanYi Micro Hei"/>
+                        </a:rPr>
+                        <a:t>主持 + 嘉宾 ×4</a:t>
+                      </a:r>
+                    </a:p>
+                  </a:txBody>
+                  <a:tcPr>
+                    <a:solidFill>
+                      <a:srgbClr val="D9E1F2"/>
+                    </a:solidFill>
+                  </a:tcPr>
+                </a:tc>
+                <a:tc>
+                  <a:txBody>
+                    <a:bodyPr/>
+                    <a:lstStyle/>
+                    <a:p>
+                      <a:pPr algn="l"/>
+                      <a:r>
+                        <a:rPr sz="1000" b="0">
+                          <a:solidFill>
+                            <a:srgbClr val="333333"/>
+                          </a:solidFill>
+                          <a:latin typeface="WenQuanYi Micro Hei"/>
+                        </a:rPr>
+                        <a:t>黄欣 + 曲承东、刘胜利、饶雪莹、马俊杰</a:t>
+                      </a:r>
+                    </a:p>
+                  </a:txBody>
+                  <a:tcPr>
+                    <a:solidFill>
+                      <a:srgbClr val="D9E1F2"/>
+                    </a:solidFill>
+                  </a:tcPr>
+                </a:tc>
+                <a:tc>
+                  <a:txBody>
+                    <a:bodyPr/>
+                    <a:lstStyle/>
+                    <a:p>
+                      <a:pPr algn="l"/>
+                      <a:r>
+                        <a:rPr sz="1000" b="0">
+                          <a:solidFill>
+                            <a:srgbClr val="333333"/>
+                          </a:solidFill>
+                          <a:latin typeface="WenQuanYi Micro Hei"/>
+                        </a:rPr>
+                        <a:t>投资大圆桌</a:t>
+                      </a:r>
+                    </a:p>
+                  </a:txBody>
+                  <a:tcPr>
+                    <a:solidFill>
+                      <a:srgbClr val="D9E1F2"/>
                     </a:solidFill>
                   </a:tcPr>
                 </a:tc>
@@ -13720,11 +13834,11 @@
             <a:r>
               <a:rPr sz="1100" b="1">
                 <a:solidFill>
-                  <a:srgbClr val="1F4E79"/>
+                  <a:srgbClr val="C0392B"/>
                 </a:solidFill>
                 <a:latin typeface="WenQuanYi Micro Hei"/>
               </a:rPr>
-              <a:t>输出总数：30 张（含 5 张备用），A4 折立式双面；蔡杰、朱铭喆（B组）5/22 12:00 前完成主席台陈列。</a:t>
+              <a:t>输出总数：32 张（含备用 5 张）；★ 颁奖典礼前移至 14:25-14:40；福布斯颁奖物料须 5/22 12:00 前到位。</a:t>
             </a:r>
           </a:p>
         </p:txBody>
@@ -15675,7 +15789,7 @@
         </p:nvGraphicFramePr>
         <p:xfrm>
           <a:off x="365760" y="1005840"/>
-          <a:ext cx="11430000" cy="5212080"/>
+          <a:ext cx="11429997" cy="5212080"/>
         </p:xfrm>
         <a:graphic>
           <a:graphicData uri="http://schemas.openxmlformats.org/drawingml/2006/table">
@@ -15684,12 +15798,12 @@
                 <a:tableStyleId>{5C22544A-7EE6-4342-B048-85BDC9FD1C3A}</a:tableStyleId>
               </a:tblPr>
               <a:tblGrid>
-                <a:gridCol w="548640"/>
-                <a:gridCol w="2286000"/>
-                <a:gridCol w="2743200"/>
-                <a:gridCol w="1645920"/>
-                <a:gridCol w="2926080"/>
-                <a:gridCol w="1280160"/>
+                <a:gridCol w="540000"/>
+                <a:gridCol w="2429999"/>
+                <a:gridCol w="2879999"/>
+                <a:gridCol w="1620000"/>
+                <a:gridCol w="2699999"/>
+                <a:gridCol w="1260000"/>
               </a:tblGrid>
               <a:tr h="473825">
                 <a:tc>
@@ -15891,7 +16005,7 @@
                           </a:solidFill>
                           <a:latin typeface="WenQuanYi Micro Hei"/>
                         </a:rPr>
-                        <a:t>晚宴背景 KT 板</a:t>
+                        <a:t>【绿城·潮鸣】KT 板 + 邀请码核验物料</a:t>
                       </a:r>
                     </a:p>
                   </a:txBody>
@@ -16031,7 +16145,7 @@
                           </a:solidFill>
                           <a:latin typeface="WenQuanYi Micro Hei"/>
                         </a:rPr>
-                        <a:t>晚宴礼品 500 份</a:t>
+                        <a:t>晚宴定制礼品 500 份</a:t>
                       </a:r>
                     </a:p>
                   </a:txBody>
@@ -16288,53 +16402,53 @@
                           </a:solidFill>
                           <a:latin typeface="WenQuanYi Micro Hei"/>
                         </a:rPr>
-                        <a:t>福布斯中国（战略）</a:t>
-                      </a:r>
-                    </a:p>
-                  </a:txBody>
-                  <a:tcPr>
-                    <a:solidFill>
-                      <a:srgbClr val="D9E1F2"/>
-                    </a:solidFill>
-                  </a:tcPr>
-                </a:tc>
-                <a:tc>
-                  <a:txBody>
-                    <a:bodyPr/>
-                    <a:lstStyle/>
-                    <a:p>
-                      <a:pPr algn="l"/>
-                      <a:r>
-                        <a:rPr sz="1000" b="0">
-                          <a:solidFill>
-                            <a:srgbClr val="333333"/>
-                          </a:solidFill>
-                          <a:latin typeface="WenQuanYi Micro Hei"/>
-                        </a:rPr>
-                        <a:t>颁奖物料</a:t>
-                      </a:r>
-                    </a:p>
-                  </a:txBody>
-                  <a:tcPr>
-                    <a:solidFill>
-                      <a:srgbClr val="D9E1F2"/>
-                    </a:solidFill>
-                  </a:tcPr>
-                </a:tc>
-                <a:tc>
-                  <a:txBody>
-                    <a:bodyPr/>
-                    <a:lstStyle/>
-                    <a:p>
-                      <a:pPr algn="l"/>
-                      <a:r>
-                        <a:rPr sz="1000" b="0">
-                          <a:solidFill>
-                            <a:srgbClr val="333333"/>
-                          </a:solidFill>
-                          <a:latin typeface="WenQuanYi Micro Hei"/>
-                        </a:rPr>
-                        <a:t>5/22 12:00</a:t>
+                        <a:t>福布斯中国 AI 评选委员会（战略）</a:t>
+                      </a:r>
+                    </a:p>
+                  </a:txBody>
+                  <a:tcPr>
+                    <a:solidFill>
+                      <a:srgbClr val="D9E1F2"/>
+                    </a:solidFill>
+                  </a:tcPr>
+                </a:tc>
+                <a:tc>
+                  <a:txBody>
+                    <a:bodyPr/>
+                    <a:lstStyle/>
+                    <a:p>
+                      <a:pPr algn="l"/>
+                      <a:r>
+                        <a:rPr sz="1000" b="0">
+                          <a:solidFill>
+                            <a:srgbClr val="333333"/>
+                          </a:solidFill>
+                          <a:latin typeface="WenQuanYi Micro Hei"/>
+                        </a:rPr>
+                        <a:t>★ 奖杯 / 证书 / 颁奖背景板</a:t>
+                      </a:r>
+                    </a:p>
+                  </a:txBody>
+                  <a:tcPr>
+                    <a:solidFill>
+                      <a:srgbClr val="D9E1F2"/>
+                    </a:solidFill>
+                  </a:tcPr>
+                </a:tc>
+                <a:tc>
+                  <a:txBody>
+                    <a:bodyPr/>
+                    <a:lstStyle/>
+                    <a:p>
+                      <a:pPr algn="l"/>
+                      <a:r>
+                        <a:rPr sz="1000" b="0">
+                          <a:solidFill>
+                            <a:srgbClr val="333333"/>
+                          </a:solidFill>
+                          <a:latin typeface="WenQuanYi Micro Hei"/>
+                        </a:rPr>
+                        <a:t>5/22 12:00 必到</a:t>
                       </a:r>
                     </a:p>
                   </a:txBody>
@@ -16428,7 +16542,7 @@
                           </a:solidFill>
                           <a:latin typeface="WenQuanYi Micro Hei"/>
                         </a:rPr>
-                        <a:t>蔚来（特约）</a:t>
+                        <a:t>蔚来汽车（特约）</a:t>
                       </a:r>
                     </a:p>
                   </a:txBody>

--- a/5月22日峰会/导出文件/2026峰会会务汇报.pptx
+++ b/5月22日峰会/导出文件/2026峰会会务汇报.pptx
@@ -18,6 +18,8 @@
     <p:sldId id="266" r:id="rId17"/>
     <p:sldId id="267" r:id="rId18"/>
     <p:sldId id="268" r:id="rId19"/>
+    <p:sldId id="269" r:id="rId20"/>
+    <p:sldId id="270" r:id="rId21"/>
   </p:sldIdLst>
   <p:sldSz cx="12191695" cy="6858000" type="screen4x3"/>
   <p:notesSz cx="6858000" cy="9144000"/>
@@ -3683,7 +3685,7 @@
                 </a:solidFill>
                 <a:latin typeface="WenQuanYi Micro Hei"/>
               </a:rPr>
-              <a:t>本届峰会得以呈现，特别感谢——晚宴冠名战略合作伙伴 绿城中国；战略合作伙伴 腾讯云、福布斯中国人工智能科技企业评选委员会；特约赞助商 蔚来汽车、泰隆银行；赞助方 茶活力、美年大健康、复金汇、古井贡酒·年份原浆。让我们再次以掌声致谢。</a:t>
+              <a:t>本届峰会得以呈现，特别感谢——晚宴冠名战略合作伙伴 绿城中国；战略合作伙伴 腾讯云；特约赞助商 蔚来汽车、华为鸿蒙汽车、泰隆银行；赞助方 茶活力、美年大健康、复金汇、古井贡酒·年份原浆。让我们再次以掌声致谢。</a:t>
             </a:r>
           </a:p>
         </p:txBody>
@@ -3901,7 +3903,7 @@
                           </a:solidFill>
                           <a:latin typeface="WenQuanYi Micro Hei"/>
                         </a:rPr>
-                        <a:t>感谢福布斯中国 AI 评选委员会 联合颁布本届年度领军机构。</a:t>
+                        <a:t>本届颁奖典礼共同表彰行业领军机构，为全天硬核产业博弈奠定荣誉基调。</a:t>
                       </a:r>
                     </a:p>
                   </a:txBody>
@@ -4277,7 +4279,7 @@
                           </a:solidFill>
                           <a:latin typeface="WenQuanYi Micro Hei"/>
                         </a:rPr>
-                        <a:t>感谢特约赞助商 泰隆银行，深耕科技金融。</a:t>
+                        <a:t>感谢特约赞助商 泰隆银行；感谢 蔚来汽车、华为鸿蒙汽车（华为展车在入口外）。</a:t>
                       </a:r>
                     </a:p>
                   </a:txBody>
@@ -4465,7 +4467,7 @@
                           </a:solidFill>
                           <a:latin typeface="WenQuanYi Micro Hei"/>
                         </a:rPr>
-                        <a:t>晚宴由 绿城中国 冠名，古井贡酒 为晚宴用酒，蔚来汽车 为出行合作伙伴。</a:t>
+                        <a:t>晚宴由 绿城中国 冠名，古井贡酒 为晚宴用酒，蔚来汽车 + 华为鸿蒙汽车 为出行合作伙伴。</a:t>
                       </a:r>
                     </a:p>
                   </a:txBody>
@@ -4881,7 +4883,7 @@
                           </a:solidFill>
                           <a:latin typeface="WenQuanYi Micro Hei"/>
                         </a:rPr>
-                        <a:t>【绿城·潮鸣】LOGO 全景、冠名牌特写、邀请码核验入场剪影、致辞特写</a:t>
+                        <a:t>【绿城·潮鸣】LOGO、冠名牌、邀请码核验入场、缪川/笪浩 致辞</a:t>
                       </a:r>
                     </a:p>
                   </a:txBody>
@@ -4998,7 +5000,7 @@
                           </a:solidFill>
                           <a:latin typeface="WenQuanYi Micro Hei"/>
                         </a:rPr>
-                        <a:t>LOGO 墙、徐泳泽圆桌二发言镜头 ≥6</a:t>
+                        <a:t>LOGO 墙、徐泳泽圆桌二发言 ≥6</a:t>
                       </a:r>
                     </a:p>
                   </a:txBody>
@@ -5092,76 +5094,76 @@
                           </a:solidFill>
                           <a:latin typeface="WenQuanYi Micro Hei"/>
                         </a:rPr>
-                        <a:t>福布斯中国 AI 评选委员会</a:t>
-                      </a:r>
-                    </a:p>
-                  </a:txBody>
-                  <a:tcPr>
-                    <a:solidFill>
-                      <a:srgbClr val="FFFFFF"/>
-                    </a:solidFill>
-                  </a:tcPr>
-                </a:tc>
-                <a:tc>
-                  <a:txBody>
-                    <a:bodyPr/>
-                    <a:lstStyle/>
-                    <a:p>
-                      <a:pPr algn="l"/>
-                      <a:r>
-                        <a:rPr sz="1000" b="0">
-                          <a:solidFill>
-                            <a:srgbClr val="333333"/>
-                          </a:solidFill>
-                          <a:latin typeface="WenQuanYi Micro Hei"/>
-                        </a:rPr>
-                        <a:t>★ 奖杯 / 证书、颁奖瞬间合影、获奖代表镜头</a:t>
-                      </a:r>
-                    </a:p>
-                  </a:txBody>
-                  <a:tcPr>
-                    <a:solidFill>
-                      <a:srgbClr val="FFFFFF"/>
-                    </a:solidFill>
-                  </a:tcPr>
-                </a:tc>
-                <a:tc>
-                  <a:txBody>
-                    <a:bodyPr/>
-                    <a:lstStyle/>
-                    <a:p>
-                      <a:pPr algn="l"/>
-                      <a:r>
-                        <a:rPr sz="1000" b="0">
-                          <a:solidFill>
-                            <a:srgbClr val="333333"/>
-                          </a:solidFill>
-                          <a:latin typeface="WenQuanYi Micro Hei"/>
-                        </a:rPr>
-                        <a:t>★ 14:25-14:40 颁奖典礼</a:t>
-                      </a:r>
-                    </a:p>
-                  </a:txBody>
-                  <a:tcPr>
-                    <a:solidFill>
-                      <a:srgbClr val="FFFFFF"/>
-                    </a:solidFill>
-                  </a:tcPr>
-                </a:tc>
-                <a:tc>
-                  <a:txBody>
-                    <a:bodyPr/>
-                    <a:lstStyle/>
-                    <a:p>
-                      <a:pPr algn="l"/>
-                      <a:r>
-                        <a:rPr sz="1000" b="0">
-                          <a:solidFill>
-                            <a:srgbClr val="333333"/>
-                          </a:solidFill>
-                          <a:latin typeface="WenQuanYi Micro Hei"/>
-                        </a:rPr>
-                        <a:t>合影 ≥5 + 1min 视频</a:t>
+                        <a:t>★ 华为鸿蒙汽车（新增）</a:t>
+                      </a:r>
+                    </a:p>
+                  </a:txBody>
+                  <a:tcPr>
+                    <a:solidFill>
+                      <a:srgbClr val="FFFFFF"/>
+                    </a:solidFill>
+                  </a:tcPr>
+                </a:tc>
+                <a:tc>
+                  <a:txBody>
+                    <a:bodyPr/>
+                    <a:lstStyle/>
+                    <a:p>
+                      <a:pPr algn="l"/>
+                      <a:r>
+                        <a:rPr sz="1000" b="0">
+                          <a:solidFill>
+                            <a:srgbClr val="333333"/>
+                          </a:solidFill>
+                          <a:latin typeface="WenQuanYi Micro Hei"/>
+                        </a:rPr>
+                        <a:t>★ 展车 360° + 内饰 + 车标 LOGO + 嘉宾试车</a:t>
+                      </a:r>
+                    </a:p>
+                  </a:txBody>
+                  <a:tcPr>
+                    <a:solidFill>
+                      <a:srgbClr val="FFFFFF"/>
+                    </a:solidFill>
+                  </a:tcPr>
+                </a:tc>
+                <a:tc>
+                  <a:txBody>
+                    <a:bodyPr/>
+                    <a:lstStyle/>
+                    <a:p>
+                      <a:pPr algn="l"/>
+                      <a:r>
+                        <a:rPr sz="1000" b="0">
+                          <a:solidFill>
+                            <a:srgbClr val="333333"/>
+                          </a:solidFill>
+                          <a:latin typeface="WenQuanYi Micro Hei"/>
+                        </a:rPr>
+                        <a:t>09:00 / 全天 / 中场 16:00</a:t>
+                      </a:r>
+                    </a:p>
+                  </a:txBody>
+                  <a:tcPr>
+                    <a:solidFill>
+                      <a:srgbClr val="FFFFFF"/>
+                    </a:solidFill>
+                  </a:tcPr>
+                </a:tc>
+                <a:tc>
+                  <a:txBody>
+                    <a:bodyPr/>
+                    <a:lstStyle/>
+                    <a:p>
+                      <a:pPr algn="l"/>
+                      <a:r>
+                        <a:rPr sz="1000" b="0">
+                          <a:solidFill>
+                            <a:srgbClr val="333333"/>
+                          </a:solidFill>
+                          <a:latin typeface="WenQuanYi Micro Hei"/>
+                        </a:rPr>
+                        <a:t>展车 ≥10 + 视频 30s</a:t>
                       </a:r>
                     </a:p>
                   </a:txBody>
@@ -5232,7 +5234,7 @@
                           </a:solidFill>
                           <a:latin typeface="WenQuanYi Micro Hei"/>
                         </a:rPr>
-                        <a:t>展车 + 内饰 + 嘉宾驻足</a:t>
+                        <a:t>大厅易拉宝 + 礼品 + 嘉宾领取；李睿镜头</a:t>
                       </a:r>
                     </a:p>
                   </a:txBody>
@@ -5278,7 +5280,7 @@
                           </a:solidFill>
                           <a:latin typeface="WenQuanYi Micro Hei"/>
                         </a:rPr>
-                        <a:t>展车 ≥8</a:t>
+                        <a:t>≥6</a:t>
                       </a:r>
                     </a:p>
                   </a:txBody>
@@ -5466,7 +5468,7 @@
                           </a:solidFill>
                           <a:latin typeface="WenQuanYi Micro Hei"/>
                         </a:rPr>
-                        <a:t>茶歇区品茶 + 体验台特写</a:t>
+                        <a:t>茶歇区品茶 + 体验台 + 孟高举镜头</a:t>
                       </a:r>
                     </a:p>
                   </a:txBody>
@@ -5583,7 +5585,7 @@
                           </a:solidFill>
                           <a:latin typeface="WenQuanYi Micro Hei"/>
                         </a:rPr>
-                        <a:t>健康检测 + 嘉宾参与</a:t>
+                        <a:t>健康检测 + 鲁菲菲镜头</a:t>
                       </a:r>
                     </a:p>
                   </a:txBody>
@@ -5700,7 +5702,7 @@
                           </a:solidFill>
                           <a:latin typeface="WenQuanYi Micro Hei"/>
                         </a:rPr>
-                        <a:t>签到礼品台 + 嘉宾领取 + 圆桌三镜头</a:t>
+                        <a:t>签到礼品台 + 嘉宾领取 + 袁一栋 + 圆桌三</a:t>
                       </a:r>
                     </a:p>
                   </a:txBody>
@@ -5817,7 +5819,7 @@
                           </a:solidFill>
                           <a:latin typeface="WenQuanYi Micro Hei"/>
                         </a:rPr>
-                        <a:t>餐桌酒瓶 + 嘉宾举杯</a:t>
+                        <a:t>T01-T10 餐桌酒瓶 + 举杯；李旭欢镜头</a:t>
                       </a:r>
                     </a:p>
                   </a:txBody>
@@ -5863,7 +5865,7 @@
                           </a:solidFill>
                           <a:latin typeface="WenQuanYi Micro Hei"/>
                         </a:rPr>
-                        <a:t>≥8</a:t>
+                        <a:t>≥10</a:t>
                       </a:r>
                     </a:p>
                   </a:txBody>
@@ -6181,7 +6183,7 @@
         </p:nvGraphicFramePr>
         <p:xfrm>
           <a:off x="365760" y="1005840"/>
-          <a:ext cx="11430000" cy="4114800"/>
+          <a:ext cx="11430000" cy="4206240"/>
         </p:xfrm>
         <a:graphic>
           <a:graphicData uri="http://schemas.openxmlformats.org/drawingml/2006/table">
@@ -6191,10 +6193,10 @@
               </a:tblPr>
               <a:tblGrid>
                 <a:gridCol w="2286000"/>
-                <a:gridCol w="6675120"/>
-                <a:gridCol w="2468880"/>
+                <a:gridCol w="6858000"/>
+                <a:gridCol w="2286000"/>
               </a:tblGrid>
-              <a:tr h="411480">
+              <a:tr h="420624">
                 <a:tc>
                   <a:txBody>
                     <a:bodyPr/>
@@ -6265,7 +6267,7 @@
                   </a:tcPr>
                 </a:tc>
               </a:tr>
-              <a:tr h="411480">
+              <a:tr h="420624">
                 <a:tc>
                   <a:txBody>
                     <a:bodyPr/>
@@ -6302,30 +6304,30 @@
                           </a:solidFill>
                           <a:latin typeface="WenQuanYi Micro Hei"/>
                         </a:rPr>
-                        <a:t>赞助商口播文案、对接人、物资清单回收；福布斯获奖名单 / 颁奖嘉宾确认；绿城晚宴邀请码机制确认</a:t>
-                      </a:r>
-                    </a:p>
-                  </a:txBody>
-                  <a:tcPr>
-                    <a:solidFill>
-                      <a:srgbClr val="FFFFFF"/>
-                    </a:solidFill>
-                  </a:tcPr>
-                </a:tc>
-                <a:tc>
-                  <a:txBody>
-                    <a:bodyPr/>
-                    <a:lstStyle/>
-                    <a:p>
-                      <a:pPr algn="l"/>
-                      <a:r>
-                        <a:rPr sz="1000" b="0">
-                          <a:solidFill>
-                            <a:srgbClr val="333333"/>
-                          </a:solidFill>
-                          <a:latin typeface="WenQuanYi Micro Hei"/>
-                        </a:rPr>
-                        <a:t>胡继刚 / 王珏</a:t>
+                        <a:t>赞助商口播 / 对接人 / 物资清单回收；颁奖嘉宾确认；绿城晚宴邀请码机制确认</a:t>
+                      </a:r>
+                    </a:p>
+                  </a:txBody>
+                  <a:tcPr>
+                    <a:solidFill>
+                      <a:srgbClr val="FFFFFF"/>
+                    </a:solidFill>
+                  </a:tcPr>
+                </a:tc>
+                <a:tc>
+                  <a:txBody>
+                    <a:bodyPr/>
+                    <a:lstStyle/>
+                    <a:p>
+                      <a:pPr algn="l"/>
+                      <a:r>
+                        <a:rPr sz="1000" b="0">
+                          <a:solidFill>
+                            <a:srgbClr val="333333"/>
+                          </a:solidFill>
+                          <a:latin typeface="WenQuanYi Micro Hei"/>
+                        </a:rPr>
+                        <a:t>胡继刚 / 王珏 / 陈潇</a:t>
                       </a:r>
                     </a:p>
                   </a:txBody>
@@ -6336,7 +6338,7 @@
                   </a:tcPr>
                 </a:tc>
               </a:tr>
-              <a:tr h="411480">
+              <a:tr h="420624">
                 <a:tc>
                   <a:txBody>
                     <a:bodyPr/>
@@ -6373,7 +6375,7 @@
                           </a:solidFill>
                           <a:latin typeface="WenQuanYi Micro Hei"/>
                         </a:rPr>
-                        <a:t>圆桌桌号牌、圆桌大卡、席卡、胸卡 完成印刷</a:t>
+                        <a:t>圆桌桌号牌、圆桌大卡、席卡（每桌 12 人）、胸卡 完成印刷</a:t>
                       </a:r>
                     </a:p>
                   </a:txBody>
@@ -6407,7 +6409,7 @@
                   </a:tcPr>
                 </a:tc>
               </a:tr>
-              <a:tr h="411480">
+              <a:tr h="420624">
                 <a:tc>
                   <a:txBody>
                     <a:bodyPr/>
@@ -6444,30 +6446,30 @@
                           </a:solidFill>
                           <a:latin typeface="WenQuanYi Micro Hei"/>
                         </a:rPr>
-                        <a:t>T11-T50 晚宴桌名单最终确认</a:t>
-                      </a:r>
-                    </a:p>
-                  </a:txBody>
-                  <a:tcPr>
-                    <a:solidFill>
-                      <a:srgbClr val="FFFFFF"/>
-                    </a:solidFill>
-                  </a:tcPr>
-                </a:tc>
-                <a:tc>
-                  <a:txBody>
-                    <a:bodyPr/>
-                    <a:lstStyle/>
-                    <a:p>
-                      <a:pPr algn="l"/>
-                      <a:r>
-                        <a:rPr sz="1000" b="0">
-                          <a:solidFill>
-                            <a:srgbClr val="333333"/>
-                          </a:solidFill>
-                          <a:latin typeface="WenQuanYi Micro Hei"/>
-                        </a:rPr>
-                        <a:t>王珏 / 黄欣 / 安淑娟</a:t>
+                        <a:t>T11-T42 晚宴桌名单最终确认（每桌 12 人 + 绿城每桌 1 人）</a:t>
+                      </a:r>
+                    </a:p>
+                  </a:txBody>
+                  <a:tcPr>
+                    <a:solidFill>
+                      <a:srgbClr val="FFFFFF"/>
+                    </a:solidFill>
+                  </a:tcPr>
+                </a:tc>
+                <a:tc>
+                  <a:txBody>
+                    <a:bodyPr/>
+                    <a:lstStyle/>
+                    <a:p>
+                      <a:pPr algn="l"/>
+                      <a:r>
+                        <a:rPr sz="1000" b="0">
+                          <a:solidFill>
+                            <a:srgbClr val="333333"/>
+                          </a:solidFill>
+                          <a:latin typeface="WenQuanYi Micro Hei"/>
+                        </a:rPr>
+                        <a:t>王珏 / 陈潇 / 安淑娟</a:t>
                       </a:r>
                     </a:p>
                   </a:txBody>
@@ -6478,21 +6480,21 @@
                   </a:tcPr>
                 </a:tc>
               </a:tr>
-              <a:tr h="411480">
-                <a:tc>
-                  <a:txBody>
-                    <a:bodyPr/>
-                    <a:lstStyle/>
-                    <a:p>
-                      <a:pPr algn="l"/>
-                      <a:r>
-                        <a:rPr sz="1000" b="0">
-                          <a:solidFill>
-                            <a:srgbClr val="333333"/>
-                          </a:solidFill>
-                          <a:latin typeface="WenQuanYi Micro Hei"/>
-                        </a:rPr>
-                        <a:t>5/22 08:00-10:00</a:t>
+              <a:tr h="420624">
+                <a:tc>
+                  <a:txBody>
+                    <a:bodyPr/>
+                    <a:lstStyle/>
+                    <a:p>
+                      <a:pPr algn="l"/>
+                      <a:r>
+                        <a:rPr sz="1000" b="0">
+                          <a:solidFill>
+                            <a:srgbClr val="333333"/>
+                          </a:solidFill>
+                          <a:latin typeface="WenQuanYi Micro Hei"/>
+                        </a:rPr>
+                        <a:t>★ 5/22 09:00-11:00</a:t>
                       </a:r>
                     </a:p>
                   </a:txBody>
@@ -6515,7 +6517,7 @@
                           </a:solidFill>
                           <a:latin typeface="WenQuanYi Micro Hei"/>
                         </a:rPr>
-                        <a:t>各赞助方物资陆续到场签收 / 上架</a:t>
+                        <a:t>★ 所有赞助方物资统一到场签收 + 按摆放顺序图就位（含华为展车 09:00-10:00）</a:t>
                       </a:r>
                     </a:p>
                   </a:txBody>
@@ -6549,7 +6551,7 @@
                   </a:tcPr>
                 </a:tc>
               </a:tr>
-              <a:tr h="411480">
+              <a:tr h="420624">
                 <a:tc>
                   <a:txBody>
                     <a:bodyPr/>
@@ -6586,7 +6588,7 @@
                           </a:solidFill>
                           <a:latin typeface="WenQuanYi Micro Hei"/>
                         </a:rPr>
-                        <a:t>★ 台卡、主席台陈列就位；福布斯颁奖物料必到</a:t>
+                        <a:t>台卡、主席台陈列就位（无福布斯物料）</a:t>
                       </a:r>
                     </a:p>
                   </a:txBody>
@@ -6620,7 +6622,7 @@
                   </a:tcPr>
                 </a:tc>
               </a:tr>
-              <a:tr h="411480">
+              <a:tr h="420624">
                 <a:tc>
                   <a:txBody>
                     <a:bodyPr/>
@@ -6691,7 +6693,7 @@
                   </a:tcPr>
                 </a:tc>
               </a:tr>
-              <a:tr h="411480">
+              <a:tr h="420624">
                 <a:tc>
                   <a:txBody>
                     <a:bodyPr/>
@@ -6762,21 +6764,21 @@
                   </a:tcPr>
                 </a:tc>
               </a:tr>
-              <a:tr h="411480">
-                <a:tc>
-                  <a:txBody>
-                    <a:bodyPr/>
-                    <a:lstStyle/>
-                    <a:p>
-                      <a:pPr algn="l"/>
-                      <a:r>
-                        <a:rPr sz="1000" b="0">
-                          <a:solidFill>
-                            <a:srgbClr val="333333"/>
-                          </a:solidFill>
-                          <a:latin typeface="WenQuanYi Micro Hei"/>
-                        </a:rPr>
-                        <a:t>5/22 14:25-14:40</a:t>
+              <a:tr h="420624">
+                <a:tc>
+                  <a:txBody>
+                    <a:bodyPr/>
+                    <a:lstStyle/>
+                    <a:p>
+                      <a:pPr algn="l"/>
+                      <a:r>
+                        <a:rPr sz="1000" b="0">
+                          <a:solidFill>
+                            <a:srgbClr val="333333"/>
+                          </a:solidFill>
+                          <a:latin typeface="WenQuanYi Micro Hei"/>
+                        </a:rPr>
+                        <a:t>★ 5/22 14:25-14:40</a:t>
                       </a:r>
                     </a:p>
                   </a:txBody>
@@ -6799,7 +6801,7 @@
                           </a:solidFill>
                           <a:latin typeface="WenQuanYi Micro Hei"/>
                         </a:rPr>
-                        <a:t>★ 第四届 2026 人工智能商业化落地颁奖典礼（高光启幕）</a:t>
+                        <a:t>★ 第四届颁奖典礼（高光启幕 · 黄欣不参加 / 福布斯不参与）</a:t>
                       </a:r>
                     </a:p>
                   </a:txBody>
@@ -6822,7 +6824,7 @@
                           </a:solidFill>
                           <a:latin typeface="WenQuanYi Micro Hei"/>
                         </a:rPr>
-                        <a:t>—</a:t>
+                        <a:t>姚志勇 + 胡继刚 + 9 位颁奖嘉宾</a:t>
                       </a:r>
                     </a:p>
                   </a:txBody>
@@ -6833,7 +6835,7 @@
                   </a:tcPr>
                 </a:tc>
               </a:tr>
-              <a:tr h="411480">
+              <a:tr h="420624">
                 <a:tc>
                   <a:txBody>
                     <a:bodyPr/>
@@ -6870,7 +6872,7 @@
                           </a:solidFill>
                           <a:latin typeface="WenQuanYi Micro Hei"/>
                         </a:rPr>
-                        <a:t>【绿城·潮鸣】星耀北外滩——AI 领袖定制晚宴 开始</a:t>
+                        <a:t>【绿城·潮鸣】星耀北外滩——AI 领袖定制晚宴 开始（每桌 12 人）</a:t>
                       </a:r>
                     </a:p>
                   </a:txBody>
@@ -6916,8 +6918,8 @@
         </p:nvSpPr>
         <p:spPr>
           <a:xfrm>
-            <a:off x="365760" y="5303520"/>
-            <a:ext cx="11430000" cy="1188720"/>
+            <a:off x="365760" y="5394960"/>
+            <a:ext cx="11430000" cy="1097280"/>
           </a:xfrm>
           <a:prstGeom prst="rect">
             <a:avLst/>
@@ -6960,7 +6962,7 @@
         </p:nvSpPr>
         <p:spPr>
           <a:xfrm>
-            <a:off x="548640" y="5349240"/>
+            <a:off x="548640" y="5440680"/>
             <a:ext cx="11064240" cy="365760"/>
           </a:xfrm>
           <a:prstGeom prst="rect">
@@ -6995,8 +6997,8 @@
         </p:nvSpPr>
         <p:spPr>
           <a:xfrm>
-            <a:off x="548640" y="5715000"/>
-            <a:ext cx="11064240" cy="777240"/>
+            <a:off x="548640" y="5806440"/>
+            <a:ext cx="11064240" cy="685800"/>
           </a:xfrm>
           <a:prstGeom prst="rect">
             <a:avLst/>
@@ -7017,7 +7019,7 @@
                 </a:solidFill>
                 <a:latin typeface="WenQuanYi Micro Hei"/>
               </a:rPr>
-              <a:t>1) 绿城中国：到场 5 席名单、物资清单、对接人、邀请码核验机制、致辞嘉宾；   2) 福布斯中国 AI 评选委员会：获奖名单、颁奖嘉宾、颁奖物料（须 5/22 12:00 前到位）；   3) 蔚来汽车：展车 / 礼品、对接人；   4) 茶活力 / 美年大健康 / 古井贡酒：物资 / 对接人；   5) 缺号志愿者手机号（韦佳玉回收）。</a:t>
+              <a:t>1) 绿城中国：5 席（缪川/笪浩 + 3 位）+ 42 位“每桌 1 人”代表 + 邀请码机制 + 致辞嘉宾；   2) 华为鸿蒙汽车：展车型号 / 对接人 / 09:00-10:00 通道；   3) 蔚来汽车 / 李睿：物料；   4) 茶活力孟高举 / 美年鲁菲菲 / 古井李旭欢：物资 / 出席；   5) 缺号志愿者手机号（韦佳玉回收，李政春→李振春）。</a:t>
             </a:r>
           </a:p>
         </p:txBody>
@@ -7031,6 +7033,1949 @@
 </file>
 
 <file path=ppt/slides/slide13.xml><?xml version="1.0" encoding="utf-8"?>
+<p:sld xmlns:a="http://schemas.openxmlformats.org/drawingml/2006/main" xmlns:p="http://schemas.openxmlformats.org/presentationml/2006/main" xmlns:r="http://schemas.openxmlformats.org/officeDocument/2006/relationships">
+  <p:cSld>
+    <p:spTree>
+      <p:nvGrpSpPr>
+        <p:cNvPr id="1" name=""/>
+        <p:cNvGrpSpPr/>
+        <p:nvPr/>
+      </p:nvGrpSpPr>
+      <p:grpSpPr/>
+      <p:sp>
+        <p:nvSpPr>
+          <p:cNvPr id="2" name="Rectangle 1"/>
+          <p:cNvSpPr/>
+          <p:nvPr/>
+        </p:nvSpPr>
+        <p:spPr>
+          <a:xfrm>
+            <a:off x="0" y="0"/>
+            <a:ext cx="12191695" cy="822960"/>
+          </a:xfrm>
+          <a:prstGeom prst="rect">
+            <a:avLst/>
+          </a:prstGeom>
+          <a:solidFill>
+            <a:srgbClr val="1F4E79"/>
+          </a:solidFill>
+          <a:ln>
+            <a:noFill/>
+          </a:ln>
+          <a:effectLst/>
+        </p:spPr>
+        <p:style>
+          <a:lnRef idx="1">
+            <a:schemeClr val="accent1"/>
+          </a:lnRef>
+          <a:fillRef idx="3">
+            <a:schemeClr val="accent1"/>
+          </a:fillRef>
+          <a:effectRef idx="2">
+            <a:schemeClr val="accent1"/>
+          </a:effectRef>
+          <a:fontRef idx="minor">
+            <a:schemeClr val="lt1"/>
+          </a:fontRef>
+        </p:style>
+        <p:txBody>
+          <a:bodyPr rtlCol="0" anchor="ctr"/>
+          <a:lstStyle/>
+          <a:p>
+            <a:pPr algn="ctr"/>
+          </a:p>
+        </p:txBody>
+      </p:sp>
+      <p:sp>
+        <p:nvSpPr>
+          <p:cNvPr id="3" name="TextBox 2"/>
+          <p:cNvSpPr txBox="1"/>
+          <p:nvPr/>
+        </p:nvSpPr>
+        <p:spPr>
+          <a:xfrm>
+            <a:off x="365760" y="91440"/>
+            <a:ext cx="10972800" cy="640080"/>
+          </a:xfrm>
+          <a:prstGeom prst="rect">
+            <a:avLst/>
+          </a:prstGeom>
+          <a:noFill/>
+        </p:spPr>
+        <p:txBody>
+          <a:bodyPr wrap="square" anchor="ctr">
+            <a:spAutoFit/>
+          </a:bodyPr>
+          <a:lstStyle/>
+          <a:p>
+            <a:pPr algn="l"/>
+            <a:r>
+              <a:rPr sz="2400" b="1">
+                <a:solidFill>
+                  <a:srgbClr val="FFFFFF"/>
+                </a:solidFill>
+                <a:latin typeface="WenQuanYi Micro Hei"/>
+              </a:rPr>
+              <a:t>11 / ★ 颁奖典礼推荐名单（14:25-14:40）</a:t>
+            </a:r>
+          </a:p>
+        </p:txBody>
+      </p:sp>
+      <p:sp>
+        <p:nvSpPr>
+          <p:cNvPr id="4" name="Rectangle 3"/>
+          <p:cNvSpPr/>
+          <p:nvPr/>
+        </p:nvSpPr>
+        <p:spPr>
+          <a:xfrm>
+            <a:off x="0" y="6537960"/>
+            <a:ext cx="12191695" cy="320040"/>
+          </a:xfrm>
+          <a:prstGeom prst="rect">
+            <a:avLst/>
+          </a:prstGeom>
+          <a:solidFill>
+            <a:srgbClr val="305496"/>
+          </a:solidFill>
+          <a:ln>
+            <a:noFill/>
+          </a:ln>
+          <a:effectLst/>
+        </p:spPr>
+        <p:style>
+          <a:lnRef idx="1">
+            <a:schemeClr val="accent1"/>
+          </a:lnRef>
+          <a:fillRef idx="3">
+            <a:schemeClr val="accent1"/>
+          </a:fillRef>
+          <a:effectRef idx="2">
+            <a:schemeClr val="accent1"/>
+          </a:effectRef>
+          <a:fontRef idx="minor">
+            <a:schemeClr val="lt1"/>
+          </a:fontRef>
+        </p:style>
+        <p:txBody>
+          <a:bodyPr rtlCol="0" anchor="ctr"/>
+          <a:lstStyle/>
+          <a:p>
+            <a:pPr algn="ctr"/>
+          </a:p>
+        </p:txBody>
+      </p:sp>
+      <p:sp>
+        <p:nvSpPr>
+          <p:cNvPr id="5" name="TextBox 4"/>
+          <p:cNvSpPr txBox="1"/>
+          <p:nvPr/>
+        </p:nvSpPr>
+        <p:spPr>
+          <a:xfrm>
+            <a:off x="365760" y="6565392"/>
+            <a:ext cx="10972800" cy="274320"/>
+          </a:xfrm>
+          <a:prstGeom prst="rect">
+            <a:avLst/>
+          </a:prstGeom>
+          <a:noFill/>
+        </p:spPr>
+        <p:txBody>
+          <a:bodyPr wrap="square" anchor="ctr">
+            <a:spAutoFit/>
+          </a:bodyPr>
+          <a:lstStyle/>
+          <a:p>
+            <a:pPr algn="l"/>
+            <a:r>
+              <a:rPr sz="1000" b="0">
+                <a:solidFill>
+                  <a:srgbClr val="FFFFFF"/>
+                </a:solidFill>
+                <a:latin typeface="WenQuanYi Micro Hei"/>
+              </a:rPr>
+              <a:t>2026 AI 商业化落地与硬核投资破局峰会 · 5/22 一滴水</a:t>
+            </a:r>
+          </a:p>
+        </p:txBody>
+      </p:sp>
+      <p:sp>
+        <p:nvSpPr>
+          <p:cNvPr id="6" name="TextBox 5"/>
+          <p:cNvSpPr txBox="1"/>
+          <p:nvPr/>
+        </p:nvSpPr>
+        <p:spPr>
+          <a:xfrm>
+            <a:off x="365760" y="960120"/>
+            <a:ext cx="11430000" cy="320040"/>
+          </a:xfrm>
+          <a:prstGeom prst="rect">
+            <a:avLst/>
+          </a:prstGeom>
+          <a:noFill/>
+        </p:spPr>
+        <p:txBody>
+          <a:bodyPr wrap="square" anchor="t">
+            <a:spAutoFit/>
+          </a:bodyPr>
+          <a:lstStyle/>
+          <a:p>
+            <a:pPr algn="l"/>
+            <a:r>
+              <a:rPr sz="1300" b="1">
+                <a:solidFill>
+                  <a:srgbClr val="C0392B"/>
+                </a:solidFill>
+                <a:latin typeface="WenQuanYi Micro Hei"/>
+              </a:rPr>
+              <a:t>黄欣不参加 / 福布斯不参与 · 主礼：姚志勇 + 胡继刚</a:t>
+            </a:r>
+          </a:p>
+        </p:txBody>
+      </p:sp>
+      <p:graphicFrame>
+        <p:nvGraphicFramePr>
+          <p:cNvPr id="7" name="Table 6"/>
+          <p:cNvGraphicFramePr>
+            <a:graphicFrameLocks noGrp="1"/>
+          </p:cNvGraphicFramePr>
+          <p:nvPr/>
+        </p:nvGraphicFramePr>
+        <p:xfrm>
+          <a:off x="365760" y="1371600"/>
+          <a:ext cx="11430000" cy="4846320"/>
+        </p:xfrm>
+        <a:graphic>
+          <a:graphicData uri="http://schemas.openxmlformats.org/drawingml/2006/table">
+            <a:tbl>
+              <a:tblPr firstRow="1" bandRow="1">
+                <a:tableStyleId>{5C22544A-7EE6-4342-B048-85BDC9FD1C3A}</a:tableStyleId>
+              </a:tblPr>
+              <a:tblGrid>
+                <a:gridCol w="914400"/>
+                <a:gridCol w="4114800"/>
+                <a:gridCol w="3200400"/>
+                <a:gridCol w="3200400"/>
+              </a:tblGrid>
+              <a:tr h="692331">
+                <a:tc>
+                  <a:txBody>
+                    <a:bodyPr/>
+                    <a:lstStyle/>
+                    <a:p>
+                      <a:pPr algn="ctr"/>
+                      <a:r>
+                        <a:rPr sz="1200" b="1">
+                          <a:solidFill>
+                            <a:srgbClr val="FFFFFF"/>
+                          </a:solidFill>
+                          <a:latin typeface="WenQuanYi Micro Hei"/>
+                        </a:rPr>
+                        <a:t>奖项</a:t>
+                      </a:r>
+                    </a:p>
+                  </a:txBody>
+                  <a:tcPr>
+                    <a:solidFill>
+                      <a:srgbClr val="305496"/>
+                    </a:solidFill>
+                  </a:tcPr>
+                </a:tc>
+                <a:tc>
+                  <a:txBody>
+                    <a:bodyPr/>
+                    <a:lstStyle/>
+                    <a:p>
+                      <a:pPr algn="ctr"/>
+                      <a:r>
+                        <a:rPr sz="1200" b="1">
+                          <a:solidFill>
+                            <a:srgbClr val="FFFFFF"/>
+                          </a:solidFill>
+                          <a:latin typeface="WenQuanYi Micro Hei"/>
+                        </a:rPr>
+                        <a:t>建议奖项名称</a:t>
+                      </a:r>
+                    </a:p>
+                  </a:txBody>
+                  <a:tcPr>
+                    <a:solidFill>
+                      <a:srgbClr val="305496"/>
+                    </a:solidFill>
+                  </a:tcPr>
+                </a:tc>
+                <a:tc>
+                  <a:txBody>
+                    <a:bodyPr/>
+                    <a:lstStyle/>
+                    <a:p>
+                      <a:pPr algn="ctr"/>
+                      <a:r>
+                        <a:rPr sz="1200" b="1">
+                          <a:solidFill>
+                            <a:srgbClr val="FFFFFF"/>
+                          </a:solidFill>
+                          <a:latin typeface="WenQuanYi Micro Hei"/>
+                        </a:rPr>
+                        <a:t>颁奖嘉宾 1</a:t>
+                      </a:r>
+                    </a:p>
+                  </a:txBody>
+                  <a:tcPr>
+                    <a:solidFill>
+                      <a:srgbClr val="305496"/>
+                    </a:solidFill>
+                  </a:tcPr>
+                </a:tc>
+                <a:tc>
+                  <a:txBody>
+                    <a:bodyPr/>
+                    <a:lstStyle/>
+                    <a:p>
+                      <a:pPr algn="ctr"/>
+                      <a:r>
+                        <a:rPr sz="1200" b="1">
+                          <a:solidFill>
+                            <a:srgbClr val="FFFFFF"/>
+                          </a:solidFill>
+                          <a:latin typeface="WenQuanYi Micro Hei"/>
+                        </a:rPr>
+                        <a:t>颁奖嘉宾 2</a:t>
+                      </a:r>
+                    </a:p>
+                  </a:txBody>
+                  <a:tcPr>
+                    <a:solidFill>
+                      <a:srgbClr val="305496"/>
+                    </a:solidFill>
+                  </a:tcPr>
+                </a:tc>
+              </a:tr>
+              <a:tr h="692331">
+                <a:tc>
+                  <a:txBody>
+                    <a:bodyPr/>
+                    <a:lstStyle/>
+                    <a:p>
+                      <a:pPr algn="l"/>
+                      <a:r>
+                        <a:rPr sz="1100" b="0">
+                          <a:solidFill>
+                            <a:srgbClr val="333333"/>
+                          </a:solidFill>
+                          <a:latin typeface="WenQuanYi Micro Hei"/>
+                        </a:rPr>
+                        <a:t>一</a:t>
+                      </a:r>
+                    </a:p>
+                  </a:txBody>
+                  <a:tcPr>
+                    <a:solidFill>
+                      <a:srgbClr val="FFFFFF"/>
+                    </a:solidFill>
+                  </a:tcPr>
+                </a:tc>
+                <a:tc>
+                  <a:txBody>
+                    <a:bodyPr/>
+                    <a:lstStyle/>
+                    <a:p>
+                      <a:pPr algn="l"/>
+                      <a:r>
+                        <a:rPr sz="1100" b="0">
+                          <a:solidFill>
+                            <a:srgbClr val="333333"/>
+                          </a:solidFill>
+                          <a:latin typeface="WenQuanYi Micro Hei"/>
+                        </a:rPr>
+                        <a:t>年度 AI 商业化落地·领军企业奖</a:t>
+                      </a:r>
+                    </a:p>
+                  </a:txBody>
+                  <a:tcPr>
+                    <a:solidFill>
+                      <a:srgbClr val="FFFFFF"/>
+                    </a:solidFill>
+                  </a:tcPr>
+                </a:tc>
+                <a:tc>
+                  <a:txBody>
+                    <a:bodyPr/>
+                    <a:lstStyle/>
+                    <a:p>
+                      <a:pPr algn="l"/>
+                      <a:r>
+                        <a:rPr sz="1100" b="0">
+                          <a:solidFill>
+                            <a:srgbClr val="333333"/>
+                          </a:solidFill>
+                          <a:latin typeface="WenQuanYi Micro Hei"/>
+                        </a:rPr>
+                        <a:t>白硕（主旨 1）</a:t>
+                      </a:r>
+                    </a:p>
+                  </a:txBody>
+                  <a:tcPr>
+                    <a:solidFill>
+                      <a:srgbClr val="FFFFFF"/>
+                    </a:solidFill>
+                  </a:tcPr>
+                </a:tc>
+                <a:tc>
+                  <a:txBody>
+                    <a:bodyPr/>
+                    <a:lstStyle/>
+                    <a:p>
+                      <a:pPr algn="l"/>
+                      <a:r>
+                        <a:rPr sz="1100" b="0">
+                          <a:solidFill>
+                            <a:srgbClr val="333333"/>
+                          </a:solidFill>
+                          <a:latin typeface="WenQuanYi Micro Hei"/>
+                        </a:rPr>
+                        <a:t>缪川 / 笪浩（绿城中国）</a:t>
+                      </a:r>
+                    </a:p>
+                  </a:txBody>
+                  <a:tcPr>
+                    <a:solidFill>
+                      <a:srgbClr val="FFFFFF"/>
+                    </a:solidFill>
+                  </a:tcPr>
+                </a:tc>
+              </a:tr>
+              <a:tr h="692331">
+                <a:tc>
+                  <a:txBody>
+                    <a:bodyPr/>
+                    <a:lstStyle/>
+                    <a:p>
+                      <a:pPr algn="l"/>
+                      <a:r>
+                        <a:rPr sz="1100" b="0">
+                          <a:solidFill>
+                            <a:srgbClr val="333333"/>
+                          </a:solidFill>
+                          <a:latin typeface="WenQuanYi Micro Hei"/>
+                        </a:rPr>
+                        <a:t>二</a:t>
+                      </a:r>
+                    </a:p>
+                  </a:txBody>
+                  <a:tcPr>
+                    <a:solidFill>
+                      <a:srgbClr val="D9E1F2"/>
+                    </a:solidFill>
+                  </a:tcPr>
+                </a:tc>
+                <a:tc>
+                  <a:txBody>
+                    <a:bodyPr/>
+                    <a:lstStyle/>
+                    <a:p>
+                      <a:pPr algn="l"/>
+                      <a:r>
+                        <a:rPr sz="1100" b="0">
+                          <a:solidFill>
+                            <a:srgbClr val="333333"/>
+                          </a:solidFill>
+                          <a:latin typeface="WenQuanYi Micro Hei"/>
+                        </a:rPr>
+                        <a:t>年度 AI 投资破局·领军机构奖</a:t>
+                      </a:r>
+                    </a:p>
+                  </a:txBody>
+                  <a:tcPr>
+                    <a:solidFill>
+                      <a:srgbClr val="D9E1F2"/>
+                    </a:solidFill>
+                  </a:tcPr>
+                </a:tc>
+                <a:tc>
+                  <a:txBody>
+                    <a:bodyPr/>
+                    <a:lstStyle/>
+                    <a:p>
+                      <a:pPr algn="l"/>
+                      <a:r>
+                        <a:rPr sz="1100" b="0">
+                          <a:solidFill>
+                            <a:srgbClr val="333333"/>
+                          </a:solidFill>
+                          <a:latin typeface="WenQuanYi Micro Hei"/>
+                        </a:rPr>
+                        <a:t>夏春 博士（主旨 2）</a:t>
+                      </a:r>
+                    </a:p>
+                  </a:txBody>
+                  <a:tcPr>
+                    <a:solidFill>
+                      <a:srgbClr val="D9E1F2"/>
+                    </a:solidFill>
+                  </a:tcPr>
+                </a:tc>
+                <a:tc>
+                  <a:txBody>
+                    <a:bodyPr/>
+                    <a:lstStyle/>
+                    <a:p>
+                      <a:pPr algn="l"/>
+                      <a:r>
+                        <a:rPr sz="1100" b="0">
+                          <a:solidFill>
+                            <a:srgbClr val="333333"/>
+                          </a:solidFill>
+                          <a:latin typeface="WenQuanYi Micro Hei"/>
+                        </a:rPr>
+                        <a:t>袁一栋（复金汇）</a:t>
+                      </a:r>
+                    </a:p>
+                  </a:txBody>
+                  <a:tcPr>
+                    <a:solidFill>
+                      <a:srgbClr val="D9E1F2"/>
+                    </a:solidFill>
+                  </a:tcPr>
+                </a:tc>
+              </a:tr>
+              <a:tr h="692331">
+                <a:tc>
+                  <a:txBody>
+                    <a:bodyPr/>
+                    <a:lstStyle/>
+                    <a:p>
+                      <a:pPr algn="l"/>
+                      <a:r>
+                        <a:rPr sz="1100" b="0">
+                          <a:solidFill>
+                            <a:srgbClr val="333333"/>
+                          </a:solidFill>
+                          <a:latin typeface="WenQuanYi Micro Hei"/>
+                        </a:rPr>
+                        <a:t>三</a:t>
+                      </a:r>
+                    </a:p>
+                  </a:txBody>
+                  <a:tcPr>
+                    <a:solidFill>
+                      <a:srgbClr val="FFFFFF"/>
+                    </a:solidFill>
+                  </a:tcPr>
+                </a:tc>
+                <a:tc>
+                  <a:txBody>
+                    <a:bodyPr/>
+                    <a:lstStyle/>
+                    <a:p>
+                      <a:pPr algn="l"/>
+                      <a:r>
+                        <a:rPr sz="1100" b="0">
+                          <a:solidFill>
+                            <a:srgbClr val="333333"/>
+                          </a:solidFill>
+                          <a:latin typeface="WenQuanYi Micro Hei"/>
+                        </a:rPr>
+                        <a:t>年度算力底座·战略生态奖</a:t>
+                      </a:r>
+                    </a:p>
+                  </a:txBody>
+                  <a:tcPr>
+                    <a:solidFill>
+                      <a:srgbClr val="FFFFFF"/>
+                    </a:solidFill>
+                  </a:tcPr>
+                </a:tc>
+                <a:tc>
+                  <a:txBody>
+                    <a:bodyPr/>
+                    <a:lstStyle/>
+                    <a:p>
+                      <a:pPr algn="l"/>
+                      <a:r>
+                        <a:rPr sz="1100" b="0">
+                          <a:solidFill>
+                            <a:srgbClr val="333333"/>
+                          </a:solidFill>
+                          <a:latin typeface="WenQuanYi Micro Hei"/>
+                        </a:rPr>
+                        <a:t>徐泳泽（腾讯云）</a:t>
+                      </a:r>
+                    </a:p>
+                  </a:txBody>
+                  <a:tcPr>
+                    <a:solidFill>
+                      <a:srgbClr val="FFFFFF"/>
+                    </a:solidFill>
+                  </a:tcPr>
+                </a:tc>
+                <a:tc>
+                  <a:txBody>
+                    <a:bodyPr/>
+                    <a:lstStyle/>
+                    <a:p>
+                      <a:pPr algn="l"/>
+                      <a:r>
+                        <a:rPr sz="1100" b="0">
+                          <a:solidFill>
+                            <a:srgbClr val="333333"/>
+                          </a:solidFill>
+                          <a:latin typeface="WenQuanYi Micro Hei"/>
+                        </a:rPr>
+                        <a:t>高歆（上海云基地，协办）</a:t>
+                      </a:r>
+                    </a:p>
+                  </a:txBody>
+                  <a:tcPr>
+                    <a:solidFill>
+                      <a:srgbClr val="FFFFFF"/>
+                    </a:solidFill>
+                  </a:tcPr>
+                </a:tc>
+              </a:tr>
+              <a:tr h="692331">
+                <a:tc>
+                  <a:txBody>
+                    <a:bodyPr/>
+                    <a:lstStyle/>
+                    <a:p>
+                      <a:pPr algn="l"/>
+                      <a:r>
+                        <a:rPr sz="1100" b="0">
+                          <a:solidFill>
+                            <a:srgbClr val="333333"/>
+                          </a:solidFill>
+                          <a:latin typeface="WenQuanYi Micro Hei"/>
+                        </a:rPr>
+                        <a:t>四</a:t>
+                      </a:r>
+                    </a:p>
+                  </a:txBody>
+                  <a:tcPr>
+                    <a:solidFill>
+                      <a:srgbClr val="D9E1F2"/>
+                    </a:solidFill>
+                  </a:tcPr>
+                </a:tc>
+                <a:tc>
+                  <a:txBody>
+                    <a:bodyPr/>
+                    <a:lstStyle/>
+                    <a:p>
+                      <a:pPr algn="l"/>
+                      <a:r>
+                        <a:rPr sz="1100" b="0">
+                          <a:solidFill>
+                            <a:srgbClr val="333333"/>
+                          </a:solidFill>
+                          <a:latin typeface="WenQuanYi Micro Hei"/>
+                        </a:rPr>
+                        <a:t>年度新质资产创新奖</a:t>
+                      </a:r>
+                    </a:p>
+                  </a:txBody>
+                  <a:tcPr>
+                    <a:solidFill>
+                      <a:srgbClr val="D9E1F2"/>
+                    </a:solidFill>
+                  </a:tcPr>
+                </a:tc>
+                <a:tc>
+                  <a:txBody>
+                    <a:bodyPr/>
+                    <a:lstStyle/>
+                    <a:p>
+                      <a:pPr algn="l"/>
+                      <a:r>
+                        <a:rPr sz="1100" b="0">
+                          <a:solidFill>
+                            <a:srgbClr val="333333"/>
+                          </a:solidFill>
+                          <a:latin typeface="WenQuanYi Micro Hei"/>
+                        </a:rPr>
+                        <a:t>王维军（理事 / 主旨 3）</a:t>
+                      </a:r>
+                    </a:p>
+                  </a:txBody>
+                  <a:tcPr>
+                    <a:solidFill>
+                      <a:srgbClr val="D9E1F2"/>
+                    </a:solidFill>
+                  </a:tcPr>
+                </a:tc>
+                <a:tc>
+                  <a:txBody>
+                    <a:bodyPr/>
+                    <a:lstStyle/>
+                    <a:p>
+                      <a:pPr algn="l"/>
+                      <a:r>
+                        <a:rPr sz="1100" b="0">
+                          <a:solidFill>
+                            <a:srgbClr val="333333"/>
+                          </a:solidFill>
+                          <a:latin typeface="WenQuanYi Micro Hei"/>
+                        </a:rPr>
+                        <a:t>张露瑶 博士</a:t>
+                      </a:r>
+                    </a:p>
+                  </a:txBody>
+                  <a:tcPr>
+                    <a:solidFill>
+                      <a:srgbClr val="D9E1F2"/>
+                    </a:solidFill>
+                  </a:tcPr>
+                </a:tc>
+              </a:tr>
+              <a:tr h="692331">
+                <a:tc>
+                  <a:txBody>
+                    <a:bodyPr/>
+                    <a:lstStyle/>
+                    <a:p>
+                      <a:pPr algn="l"/>
+                      <a:r>
+                        <a:rPr sz="1100" b="0">
+                          <a:solidFill>
+                            <a:srgbClr val="333333"/>
+                          </a:solidFill>
+                          <a:latin typeface="WenQuanYi Micro Hei"/>
+                        </a:rPr>
+                        <a:t>五</a:t>
+                      </a:r>
+                    </a:p>
+                  </a:txBody>
+                  <a:tcPr>
+                    <a:solidFill>
+                      <a:srgbClr val="FFFFFF"/>
+                    </a:solidFill>
+                  </a:tcPr>
+                </a:tc>
+                <a:tc>
+                  <a:txBody>
+                    <a:bodyPr/>
+                    <a:lstStyle/>
+                    <a:p>
+                      <a:pPr algn="l"/>
+                      <a:r>
+                        <a:rPr sz="1100" b="0">
+                          <a:solidFill>
+                            <a:srgbClr val="333333"/>
+                          </a:solidFill>
+                          <a:latin typeface="WenQuanYi Micro Hei"/>
+                        </a:rPr>
+                        <a:t>年度产业落地·标杆案例奖</a:t>
+                      </a:r>
+                    </a:p>
+                  </a:txBody>
+                  <a:tcPr>
+                    <a:solidFill>
+                      <a:srgbClr val="FFFFFF"/>
+                    </a:solidFill>
+                  </a:tcPr>
+                </a:tc>
+                <a:tc>
+                  <a:txBody>
+                    <a:bodyPr/>
+                    <a:lstStyle/>
+                    <a:p>
+                      <a:pPr algn="l"/>
+                      <a:r>
+                        <a:rPr sz="1100" b="0">
+                          <a:solidFill>
+                            <a:srgbClr val="333333"/>
+                          </a:solidFill>
+                          <a:latin typeface="WenQuanYi Micro Hei"/>
+                        </a:rPr>
+                        <a:t>李龙（龙旗 / 机器人）</a:t>
+                      </a:r>
+                    </a:p>
+                  </a:txBody>
+                  <a:tcPr>
+                    <a:solidFill>
+                      <a:srgbClr val="FFFFFF"/>
+                    </a:solidFill>
+                  </a:tcPr>
+                </a:tc>
+                <a:tc>
+                  <a:txBody>
+                    <a:bodyPr/>
+                    <a:lstStyle/>
+                    <a:p>
+                      <a:pPr algn="l"/>
+                      <a:r>
+                        <a:rPr sz="1100" b="0">
+                          <a:solidFill>
+                            <a:srgbClr val="333333"/>
+                          </a:solidFill>
+                          <a:latin typeface="WenQuanYi Micro Hei"/>
+                        </a:rPr>
+                        <a:t>于敬（达观数据）</a:t>
+                      </a:r>
+                    </a:p>
+                  </a:txBody>
+                  <a:tcPr>
+                    <a:solidFill>
+                      <a:srgbClr val="FFFFFF"/>
+                    </a:solidFill>
+                  </a:tcPr>
+                </a:tc>
+              </a:tr>
+              <a:tr h="692334">
+                <a:tc>
+                  <a:txBody>
+                    <a:bodyPr/>
+                    <a:lstStyle/>
+                    <a:p>
+                      <a:pPr algn="l"/>
+                      <a:r>
+                        <a:rPr sz="1100" b="0">
+                          <a:solidFill>
+                            <a:srgbClr val="333333"/>
+                          </a:solidFill>
+                          <a:latin typeface="WenQuanYi Micro Hei"/>
+                        </a:rPr>
+                        <a:t>六</a:t>
+                      </a:r>
+                    </a:p>
+                  </a:txBody>
+                  <a:tcPr>
+                    <a:solidFill>
+                      <a:srgbClr val="D9E1F2"/>
+                    </a:solidFill>
+                  </a:tcPr>
+                </a:tc>
+                <a:tc>
+                  <a:txBody>
+                    <a:bodyPr/>
+                    <a:lstStyle/>
+                    <a:p>
+                      <a:pPr algn="l"/>
+                      <a:r>
+                        <a:rPr sz="1100" b="0">
+                          <a:solidFill>
+                            <a:srgbClr val="333333"/>
+                          </a:solidFill>
+                          <a:latin typeface="WenQuanYi Micro Hei"/>
+                        </a:rPr>
+                        <a:t>年度科技金融服务奖</a:t>
+                      </a:r>
+                    </a:p>
+                  </a:txBody>
+                  <a:tcPr>
+                    <a:solidFill>
+                      <a:srgbClr val="D9E1F2"/>
+                    </a:solidFill>
+                  </a:tcPr>
+                </a:tc>
+                <a:tc>
+                  <a:txBody>
+                    <a:bodyPr/>
+                    <a:lstStyle/>
+                    <a:p>
+                      <a:pPr algn="l"/>
+                      <a:r>
+                        <a:rPr sz="1100" b="0">
+                          <a:solidFill>
+                            <a:srgbClr val="333333"/>
+                          </a:solidFill>
+                          <a:latin typeface="WenQuanYi Micro Hei"/>
+                        </a:rPr>
+                        <a:t>林骁 / 陈煜（泰隆）</a:t>
+                      </a:r>
+                    </a:p>
+                  </a:txBody>
+                  <a:tcPr>
+                    <a:solidFill>
+                      <a:srgbClr val="D9E1F2"/>
+                    </a:solidFill>
+                  </a:tcPr>
+                </a:tc>
+                <a:tc>
+                  <a:txBody>
+                    <a:bodyPr/>
+                    <a:lstStyle/>
+                    <a:p>
+                      <a:pPr algn="l"/>
+                      <a:r>
+                        <a:rPr sz="1100" b="0">
+                          <a:solidFill>
+                            <a:srgbClr val="333333"/>
+                          </a:solidFill>
+                          <a:latin typeface="WenQuanYi Micro Hei"/>
+                        </a:rPr>
+                        <a:t>李睿（蔚来）/ 华为鸿蒙汽车-代表</a:t>
+                      </a:r>
+                    </a:p>
+                  </a:txBody>
+                  <a:tcPr>
+                    <a:solidFill>
+                      <a:srgbClr val="D9E1F2"/>
+                    </a:solidFill>
+                  </a:tcPr>
+                </a:tc>
+              </a:tr>
+            </a:tbl>
+          </a:graphicData>
+        </a:graphic>
+      </p:graphicFrame>
+      <p:sp>
+        <p:nvSpPr>
+          <p:cNvPr id="8" name="TextBox 7"/>
+          <p:cNvSpPr txBox="1"/>
+          <p:nvPr/>
+        </p:nvSpPr>
+        <p:spPr>
+          <a:xfrm>
+            <a:off x="365760" y="6263640"/>
+            <a:ext cx="11430000" cy="228600"/>
+          </a:xfrm>
+          <a:prstGeom prst="rect">
+            <a:avLst/>
+          </a:prstGeom>
+          <a:noFill/>
+        </p:spPr>
+        <p:txBody>
+          <a:bodyPr wrap="square" anchor="t">
+            <a:spAutoFit/>
+          </a:bodyPr>
+          <a:lstStyle/>
+          <a:p>
+            <a:pPr algn="l"/>
+            <a:r>
+              <a:rPr sz="1100" b="1">
+                <a:solidFill>
+                  <a:srgbClr val="1F4E79"/>
+                </a:solidFill>
+                <a:latin typeface="WenQuanYi Micro Hei"/>
+              </a:rPr>
+              <a:t>全场合影：所有颁奖嘉宾 + 获奖代表 + 主礼 共同合影 1 张。</a:t>
+            </a:r>
+          </a:p>
+        </p:txBody>
+      </p:sp>
+    </p:spTree>
+  </p:cSld>
+  <p:clrMapOvr>
+    <a:masterClrMapping/>
+  </p:clrMapOvr>
+</p:sld>
+</file>
+
+<file path=ppt/slides/slide14.xml><?xml version="1.0" encoding="utf-8"?>
+<p:sld xmlns:a="http://schemas.openxmlformats.org/drawingml/2006/main" xmlns:p="http://schemas.openxmlformats.org/presentationml/2006/main" xmlns:r="http://schemas.openxmlformats.org/officeDocument/2006/relationships">
+  <p:cSld>
+    <p:spTree>
+      <p:nvGrpSpPr>
+        <p:cNvPr id="1" name=""/>
+        <p:cNvGrpSpPr/>
+        <p:nvPr/>
+      </p:nvGrpSpPr>
+      <p:grpSpPr/>
+      <p:sp>
+        <p:nvSpPr>
+          <p:cNvPr id="2" name="Rectangle 1"/>
+          <p:cNvSpPr/>
+          <p:nvPr/>
+        </p:nvSpPr>
+        <p:spPr>
+          <a:xfrm>
+            <a:off x="0" y="0"/>
+            <a:ext cx="12191695" cy="822960"/>
+          </a:xfrm>
+          <a:prstGeom prst="rect">
+            <a:avLst/>
+          </a:prstGeom>
+          <a:solidFill>
+            <a:srgbClr val="1F4E79"/>
+          </a:solidFill>
+          <a:ln>
+            <a:noFill/>
+          </a:ln>
+          <a:effectLst/>
+        </p:spPr>
+        <p:style>
+          <a:lnRef idx="1">
+            <a:schemeClr val="accent1"/>
+          </a:lnRef>
+          <a:fillRef idx="3">
+            <a:schemeClr val="accent1"/>
+          </a:fillRef>
+          <a:effectRef idx="2">
+            <a:schemeClr val="accent1"/>
+          </a:effectRef>
+          <a:fontRef idx="minor">
+            <a:schemeClr val="lt1"/>
+          </a:fontRef>
+        </p:style>
+        <p:txBody>
+          <a:bodyPr rtlCol="0" anchor="ctr"/>
+          <a:lstStyle/>
+          <a:p>
+            <a:pPr algn="ctr"/>
+          </a:p>
+        </p:txBody>
+      </p:sp>
+      <p:sp>
+        <p:nvSpPr>
+          <p:cNvPr id="3" name="TextBox 2"/>
+          <p:cNvSpPr txBox="1"/>
+          <p:nvPr/>
+        </p:nvSpPr>
+        <p:spPr>
+          <a:xfrm>
+            <a:off x="365760" y="91440"/>
+            <a:ext cx="10972800" cy="640080"/>
+          </a:xfrm>
+          <a:prstGeom prst="rect">
+            <a:avLst/>
+          </a:prstGeom>
+          <a:noFill/>
+        </p:spPr>
+        <p:txBody>
+          <a:bodyPr wrap="square" anchor="ctr">
+            <a:spAutoFit/>
+          </a:bodyPr>
+          <a:lstStyle/>
+          <a:p>
+            <a:pPr algn="l"/>
+            <a:r>
+              <a:rPr sz="2400" b="1">
+                <a:solidFill>
+                  <a:srgbClr val="FFFFFF"/>
+                </a:solidFill>
+                <a:latin typeface="WenQuanYi Micro Hei"/>
+              </a:rPr>
+              <a:t>12 / ★ 物资摆放顺序图（5/22 09:00-11:00 统一入场）</a:t>
+            </a:r>
+          </a:p>
+        </p:txBody>
+      </p:sp>
+      <p:sp>
+        <p:nvSpPr>
+          <p:cNvPr id="4" name="Rectangle 3"/>
+          <p:cNvSpPr/>
+          <p:nvPr/>
+        </p:nvSpPr>
+        <p:spPr>
+          <a:xfrm>
+            <a:off x="0" y="6537960"/>
+            <a:ext cx="12191695" cy="320040"/>
+          </a:xfrm>
+          <a:prstGeom prst="rect">
+            <a:avLst/>
+          </a:prstGeom>
+          <a:solidFill>
+            <a:srgbClr val="305496"/>
+          </a:solidFill>
+          <a:ln>
+            <a:noFill/>
+          </a:ln>
+          <a:effectLst/>
+        </p:spPr>
+        <p:style>
+          <a:lnRef idx="1">
+            <a:schemeClr val="accent1"/>
+          </a:lnRef>
+          <a:fillRef idx="3">
+            <a:schemeClr val="accent1"/>
+          </a:fillRef>
+          <a:effectRef idx="2">
+            <a:schemeClr val="accent1"/>
+          </a:effectRef>
+          <a:fontRef idx="minor">
+            <a:schemeClr val="lt1"/>
+          </a:fontRef>
+        </p:style>
+        <p:txBody>
+          <a:bodyPr rtlCol="0" anchor="ctr"/>
+          <a:lstStyle/>
+          <a:p>
+            <a:pPr algn="ctr"/>
+          </a:p>
+        </p:txBody>
+      </p:sp>
+      <p:sp>
+        <p:nvSpPr>
+          <p:cNvPr id="5" name="TextBox 4"/>
+          <p:cNvSpPr txBox="1"/>
+          <p:nvPr/>
+        </p:nvSpPr>
+        <p:spPr>
+          <a:xfrm>
+            <a:off x="365760" y="6565392"/>
+            <a:ext cx="10972800" cy="274320"/>
+          </a:xfrm>
+          <a:prstGeom prst="rect">
+            <a:avLst/>
+          </a:prstGeom>
+          <a:noFill/>
+        </p:spPr>
+        <p:txBody>
+          <a:bodyPr wrap="square" anchor="ctr">
+            <a:spAutoFit/>
+          </a:bodyPr>
+          <a:lstStyle/>
+          <a:p>
+            <a:pPr algn="l"/>
+            <a:r>
+              <a:rPr sz="1000" b="0">
+                <a:solidFill>
+                  <a:srgbClr val="FFFFFF"/>
+                </a:solidFill>
+                <a:latin typeface="WenQuanYi Micro Hei"/>
+              </a:rPr>
+              <a:t>2026 AI 商业化落地与硬核投资破局峰会 · 5/22 一滴水</a:t>
+            </a:r>
+          </a:p>
+        </p:txBody>
+      </p:sp>
+      <p:sp>
+        <p:nvSpPr>
+          <p:cNvPr id="6" name="Rectangle 5"/>
+          <p:cNvSpPr/>
+          <p:nvPr/>
+        </p:nvSpPr>
+        <p:spPr>
+          <a:xfrm>
+            <a:off x="457200" y="1097280"/>
+            <a:ext cx="3017520" cy="777240"/>
+          </a:xfrm>
+          <a:prstGeom prst="rect">
+            <a:avLst/>
+          </a:prstGeom>
+          <a:solidFill>
+            <a:srgbClr val="D9E1F2"/>
+          </a:solidFill>
+          <a:ln>
+            <a:noFill/>
+          </a:ln>
+          <a:effectLst/>
+        </p:spPr>
+        <p:style>
+          <a:lnRef idx="1">
+            <a:schemeClr val="accent1"/>
+          </a:lnRef>
+          <a:fillRef idx="3">
+            <a:schemeClr val="accent1"/>
+          </a:fillRef>
+          <a:effectRef idx="2">
+            <a:schemeClr val="accent1"/>
+          </a:effectRef>
+          <a:fontRef idx="minor">
+            <a:schemeClr val="lt1"/>
+          </a:fontRef>
+        </p:style>
+        <p:txBody>
+          <a:bodyPr rtlCol="0" anchor="ctr"/>
+          <a:lstStyle/>
+          <a:p>
+            <a:pPr algn="ctr"/>
+          </a:p>
+        </p:txBody>
+      </p:sp>
+      <p:sp>
+        <p:nvSpPr>
+          <p:cNvPr id="7" name="TextBox 6"/>
+          <p:cNvSpPr txBox="1"/>
+          <p:nvPr/>
+        </p:nvSpPr>
+        <p:spPr>
+          <a:xfrm>
+            <a:off x="548640" y="1143000"/>
+            <a:ext cx="2834640" cy="685800"/>
+          </a:xfrm>
+          <a:prstGeom prst="rect">
+            <a:avLst/>
+          </a:prstGeom>
+          <a:noFill/>
+        </p:spPr>
+        <p:txBody>
+          <a:bodyPr wrap="square" anchor="ctr">
+            <a:spAutoFit/>
+          </a:bodyPr>
+          <a:lstStyle/>
+          <a:p>
+            <a:pPr algn="l"/>
+            <a:r>
+              <a:rPr sz="1300" b="1">
+                <a:solidFill>
+                  <a:srgbClr val="C0392B"/>
+                </a:solidFill>
+                <a:latin typeface="WenQuanYi Micro Hei"/>
+              </a:rPr>
+              <a:t>入口外</a:t>
+            </a:r>
+          </a:p>
+        </p:txBody>
+      </p:sp>
+      <p:sp>
+        <p:nvSpPr>
+          <p:cNvPr id="8" name="Rectangle 7"/>
+          <p:cNvSpPr/>
+          <p:nvPr/>
+        </p:nvSpPr>
+        <p:spPr>
+          <a:xfrm>
+            <a:off x="3657600" y="1097280"/>
+            <a:ext cx="8046720" cy="777240"/>
+          </a:xfrm>
+          <a:prstGeom prst="rect">
+            <a:avLst/>
+          </a:prstGeom>
+          <a:solidFill>
+            <a:srgbClr val="FFFFFF"/>
+          </a:solidFill>
+          <a:ln>
+            <a:solidFill>
+              <a:srgbClr val="BFBFBF"/>
+            </a:solidFill>
+          </a:ln>
+          <a:effectLst/>
+        </p:spPr>
+        <p:style>
+          <a:lnRef idx="1">
+            <a:schemeClr val="accent1"/>
+          </a:lnRef>
+          <a:fillRef idx="3">
+            <a:schemeClr val="accent1"/>
+          </a:fillRef>
+          <a:effectRef idx="2">
+            <a:schemeClr val="accent1"/>
+          </a:effectRef>
+          <a:fontRef idx="minor">
+            <a:schemeClr val="lt1"/>
+          </a:fontRef>
+        </p:style>
+        <p:txBody>
+          <a:bodyPr rtlCol="0" anchor="ctr"/>
+          <a:lstStyle/>
+          <a:p>
+            <a:pPr algn="ctr"/>
+          </a:p>
+        </p:txBody>
+      </p:sp>
+      <p:sp>
+        <p:nvSpPr>
+          <p:cNvPr id="9" name="TextBox 8"/>
+          <p:cNvSpPr txBox="1"/>
+          <p:nvPr/>
+        </p:nvSpPr>
+        <p:spPr>
+          <a:xfrm>
+            <a:off x="3794760" y="1143000"/>
+            <a:ext cx="7863840" cy="685800"/>
+          </a:xfrm>
+          <a:prstGeom prst="rect">
+            <a:avLst/>
+          </a:prstGeom>
+          <a:noFill/>
+        </p:spPr>
+        <p:txBody>
+          <a:bodyPr wrap="square" anchor="ctr">
+            <a:spAutoFit/>
+          </a:bodyPr>
+          <a:lstStyle/>
+          <a:p>
+            <a:pPr algn="l"/>
+            <a:r>
+              <a:rPr sz="1100" b="0">
+                <a:solidFill>
+                  <a:srgbClr val="333333"/>
+                </a:solidFill>
+                <a:latin typeface="WenQuanYi Micro Hei"/>
+              </a:rPr>
+              <a:t>★ 华为鸿蒙汽车 展车（09:00-10:00 先到位）</a:t>
+            </a:r>
+          </a:p>
+        </p:txBody>
+      </p:sp>
+      <p:sp>
+        <p:nvSpPr>
+          <p:cNvPr id="10" name="Rectangle 9"/>
+          <p:cNvSpPr/>
+          <p:nvPr/>
+        </p:nvSpPr>
+        <p:spPr>
+          <a:xfrm>
+            <a:off x="457200" y="2057400"/>
+            <a:ext cx="3017520" cy="777240"/>
+          </a:xfrm>
+          <a:prstGeom prst="rect">
+            <a:avLst/>
+          </a:prstGeom>
+          <a:solidFill>
+            <a:srgbClr val="D9E1F2"/>
+          </a:solidFill>
+          <a:ln>
+            <a:noFill/>
+          </a:ln>
+          <a:effectLst/>
+        </p:spPr>
+        <p:style>
+          <a:lnRef idx="1">
+            <a:schemeClr val="accent1"/>
+          </a:lnRef>
+          <a:fillRef idx="3">
+            <a:schemeClr val="accent1"/>
+          </a:fillRef>
+          <a:effectRef idx="2">
+            <a:schemeClr val="accent1"/>
+          </a:effectRef>
+          <a:fontRef idx="minor">
+            <a:schemeClr val="lt1"/>
+          </a:fontRef>
+        </p:style>
+        <p:txBody>
+          <a:bodyPr rtlCol="0" anchor="ctr"/>
+          <a:lstStyle/>
+          <a:p>
+            <a:pPr algn="ctr"/>
+          </a:p>
+        </p:txBody>
+      </p:sp>
+      <p:sp>
+        <p:nvSpPr>
+          <p:cNvPr id="11" name="TextBox 10"/>
+          <p:cNvSpPr txBox="1"/>
+          <p:nvPr/>
+        </p:nvSpPr>
+        <p:spPr>
+          <a:xfrm>
+            <a:off x="548640" y="2103120"/>
+            <a:ext cx="2834640" cy="685800"/>
+          </a:xfrm>
+          <a:prstGeom prst="rect">
+            <a:avLst/>
+          </a:prstGeom>
+          <a:noFill/>
+        </p:spPr>
+        <p:txBody>
+          <a:bodyPr wrap="square" anchor="ctr">
+            <a:spAutoFit/>
+          </a:bodyPr>
+          <a:lstStyle/>
+          <a:p>
+            <a:pPr algn="l"/>
+            <a:r>
+              <a:rPr sz="1300" b="1">
+                <a:solidFill>
+                  <a:srgbClr val="1F4E79"/>
+                </a:solidFill>
+                <a:latin typeface="WenQuanYi Micro Hei"/>
+              </a:rPr>
+              <a:t>① 一滴水正门 / 签到处</a:t>
+            </a:r>
+          </a:p>
+        </p:txBody>
+      </p:sp>
+      <p:sp>
+        <p:nvSpPr>
+          <p:cNvPr id="12" name="Rectangle 11"/>
+          <p:cNvSpPr/>
+          <p:nvPr/>
+        </p:nvSpPr>
+        <p:spPr>
+          <a:xfrm>
+            <a:off x="3657600" y="2057400"/>
+            <a:ext cx="8046720" cy="777240"/>
+          </a:xfrm>
+          <a:prstGeom prst="rect">
+            <a:avLst/>
+          </a:prstGeom>
+          <a:solidFill>
+            <a:srgbClr val="FFFFFF"/>
+          </a:solidFill>
+          <a:ln>
+            <a:solidFill>
+              <a:srgbClr val="BFBFBF"/>
+            </a:solidFill>
+          </a:ln>
+          <a:effectLst/>
+        </p:spPr>
+        <p:style>
+          <a:lnRef idx="1">
+            <a:schemeClr val="accent1"/>
+          </a:lnRef>
+          <a:fillRef idx="3">
+            <a:schemeClr val="accent1"/>
+          </a:fillRef>
+          <a:effectRef idx="2">
+            <a:schemeClr val="accent1"/>
+          </a:effectRef>
+          <a:fontRef idx="minor">
+            <a:schemeClr val="lt1"/>
+          </a:fontRef>
+        </p:style>
+        <p:txBody>
+          <a:bodyPr rtlCol="0" anchor="ctr"/>
+          <a:lstStyle/>
+          <a:p>
+            <a:pPr algn="ctr"/>
+          </a:p>
+        </p:txBody>
+      </p:sp>
+      <p:sp>
+        <p:nvSpPr>
+          <p:cNvPr id="13" name="TextBox 12"/>
+          <p:cNvSpPr txBox="1"/>
+          <p:nvPr/>
+        </p:nvSpPr>
+        <p:spPr>
+          <a:xfrm>
+            <a:off x="3794760" y="2103120"/>
+            <a:ext cx="7863840" cy="685800"/>
+          </a:xfrm>
+          <a:prstGeom prst="rect">
+            <a:avLst/>
+          </a:prstGeom>
+          <a:noFill/>
+        </p:spPr>
+        <p:txBody>
+          <a:bodyPr wrap="square" anchor="ctr">
+            <a:spAutoFit/>
+          </a:bodyPr>
+          <a:lstStyle/>
+          <a:p>
+            <a:pPr algn="l"/>
+            <a:r>
+              <a:rPr sz="1100" b="0">
+                <a:solidFill>
+                  <a:srgbClr val="333333"/>
+                </a:solidFill>
+                <a:latin typeface="WenQuanYi Micro Hei"/>
+              </a:rPr>
+              <a:t>绿城品宣 KT 板 + 蔚来汽车 + 泰隆 + 复金汇 易拉宝</a:t>
+            </a:r>
+          </a:p>
+        </p:txBody>
+      </p:sp>
+      <p:sp>
+        <p:nvSpPr>
+          <p:cNvPr id="14" name="Rectangle 13"/>
+          <p:cNvSpPr/>
+          <p:nvPr/>
+        </p:nvSpPr>
+        <p:spPr>
+          <a:xfrm>
+            <a:off x="457200" y="3017520"/>
+            <a:ext cx="3017520" cy="777240"/>
+          </a:xfrm>
+          <a:prstGeom prst="rect">
+            <a:avLst/>
+          </a:prstGeom>
+          <a:solidFill>
+            <a:srgbClr val="D9E1F2"/>
+          </a:solidFill>
+          <a:ln>
+            <a:noFill/>
+          </a:ln>
+          <a:effectLst/>
+        </p:spPr>
+        <p:style>
+          <a:lnRef idx="1">
+            <a:schemeClr val="accent1"/>
+          </a:lnRef>
+          <a:fillRef idx="3">
+            <a:schemeClr val="accent1"/>
+          </a:fillRef>
+          <a:effectRef idx="2">
+            <a:schemeClr val="accent1"/>
+          </a:effectRef>
+          <a:fontRef idx="minor">
+            <a:schemeClr val="lt1"/>
+          </a:fontRef>
+        </p:style>
+        <p:txBody>
+          <a:bodyPr rtlCol="0" anchor="ctr"/>
+          <a:lstStyle/>
+          <a:p>
+            <a:pPr algn="ctr"/>
+          </a:p>
+        </p:txBody>
+      </p:sp>
+      <p:sp>
+        <p:nvSpPr>
+          <p:cNvPr id="15" name="TextBox 14"/>
+          <p:cNvSpPr txBox="1"/>
+          <p:nvPr/>
+        </p:nvSpPr>
+        <p:spPr>
+          <a:xfrm>
+            <a:off x="548640" y="3063239"/>
+            <a:ext cx="2834640" cy="685800"/>
+          </a:xfrm>
+          <a:prstGeom prst="rect">
+            <a:avLst/>
+          </a:prstGeom>
+          <a:noFill/>
+        </p:spPr>
+        <p:txBody>
+          <a:bodyPr wrap="square" anchor="ctr">
+            <a:spAutoFit/>
+          </a:bodyPr>
+          <a:lstStyle/>
+          <a:p>
+            <a:pPr algn="l"/>
+            <a:r>
+              <a:rPr sz="1300" b="1">
+                <a:solidFill>
+                  <a:srgbClr val="1F4E79"/>
+                </a:solidFill>
+                <a:latin typeface="WenQuanYi Micro Hei"/>
+              </a:rPr>
+              <a:t>② 大厅展区</a:t>
+            </a:r>
+          </a:p>
+        </p:txBody>
+      </p:sp>
+      <p:sp>
+        <p:nvSpPr>
+          <p:cNvPr id="16" name="Rectangle 15"/>
+          <p:cNvSpPr/>
+          <p:nvPr/>
+        </p:nvSpPr>
+        <p:spPr>
+          <a:xfrm>
+            <a:off x="3657600" y="3017520"/>
+            <a:ext cx="8046720" cy="777240"/>
+          </a:xfrm>
+          <a:prstGeom prst="rect">
+            <a:avLst/>
+          </a:prstGeom>
+          <a:solidFill>
+            <a:srgbClr val="FFFFFF"/>
+          </a:solidFill>
+          <a:ln>
+            <a:solidFill>
+              <a:srgbClr val="BFBFBF"/>
+            </a:solidFill>
+          </a:ln>
+          <a:effectLst/>
+        </p:spPr>
+        <p:style>
+          <a:lnRef idx="1">
+            <a:schemeClr val="accent1"/>
+          </a:lnRef>
+          <a:fillRef idx="3">
+            <a:schemeClr val="accent1"/>
+          </a:fillRef>
+          <a:effectRef idx="2">
+            <a:schemeClr val="accent1"/>
+          </a:effectRef>
+          <a:fontRef idx="minor">
+            <a:schemeClr val="lt1"/>
+          </a:fontRef>
+        </p:style>
+        <p:txBody>
+          <a:bodyPr rtlCol="0" anchor="ctr"/>
+          <a:lstStyle/>
+          <a:p>
+            <a:pPr algn="ctr"/>
+          </a:p>
+        </p:txBody>
+      </p:sp>
+      <p:sp>
+        <p:nvSpPr>
+          <p:cNvPr id="17" name="TextBox 16"/>
+          <p:cNvSpPr txBox="1"/>
+          <p:nvPr/>
+        </p:nvSpPr>
+        <p:spPr>
+          <a:xfrm>
+            <a:off x="3794760" y="3063239"/>
+            <a:ext cx="7863840" cy="685800"/>
+          </a:xfrm>
+          <a:prstGeom prst="rect">
+            <a:avLst/>
+          </a:prstGeom>
+          <a:noFill/>
+        </p:spPr>
+        <p:txBody>
+          <a:bodyPr wrap="square" anchor="ctr">
+            <a:spAutoFit/>
+          </a:bodyPr>
+          <a:lstStyle/>
+          <a:p>
+            <a:pPr algn="l"/>
+            <a:r>
+              <a:rPr sz="1100" b="0">
+                <a:solidFill>
+                  <a:srgbClr val="333333"/>
+                </a:solidFill>
+                <a:latin typeface="WenQuanYi Micro Hei"/>
+              </a:rPr>
+              <a:t>茶活力 中场茶歇区 + 美年大健康 健康检测台 + 蔚来易拉宝</a:t>
+            </a:r>
+          </a:p>
+        </p:txBody>
+      </p:sp>
+      <p:sp>
+        <p:nvSpPr>
+          <p:cNvPr id="18" name="Rectangle 17"/>
+          <p:cNvSpPr/>
+          <p:nvPr/>
+        </p:nvSpPr>
+        <p:spPr>
+          <a:xfrm>
+            <a:off x="457200" y="3977640"/>
+            <a:ext cx="3017520" cy="777240"/>
+          </a:xfrm>
+          <a:prstGeom prst="rect">
+            <a:avLst/>
+          </a:prstGeom>
+          <a:solidFill>
+            <a:srgbClr val="D9E1F2"/>
+          </a:solidFill>
+          <a:ln>
+            <a:noFill/>
+          </a:ln>
+          <a:effectLst/>
+        </p:spPr>
+        <p:style>
+          <a:lnRef idx="1">
+            <a:schemeClr val="accent1"/>
+          </a:lnRef>
+          <a:fillRef idx="3">
+            <a:schemeClr val="accent1"/>
+          </a:fillRef>
+          <a:effectRef idx="2">
+            <a:schemeClr val="accent1"/>
+          </a:effectRef>
+          <a:fontRef idx="minor">
+            <a:schemeClr val="lt1"/>
+          </a:fontRef>
+        </p:style>
+        <p:txBody>
+          <a:bodyPr rtlCol="0" anchor="ctr"/>
+          <a:lstStyle/>
+          <a:p>
+            <a:pPr algn="ctr"/>
+          </a:p>
+        </p:txBody>
+      </p:sp>
+      <p:sp>
+        <p:nvSpPr>
+          <p:cNvPr id="19" name="TextBox 18"/>
+          <p:cNvSpPr txBox="1"/>
+          <p:nvPr/>
+        </p:nvSpPr>
+        <p:spPr>
+          <a:xfrm>
+            <a:off x="548640" y="4023360"/>
+            <a:ext cx="2834640" cy="685800"/>
+          </a:xfrm>
+          <a:prstGeom prst="rect">
+            <a:avLst/>
+          </a:prstGeom>
+          <a:noFill/>
+        </p:spPr>
+        <p:txBody>
+          <a:bodyPr wrap="square" anchor="ctr">
+            <a:spAutoFit/>
+          </a:bodyPr>
+          <a:lstStyle/>
+          <a:p>
+            <a:pPr algn="l"/>
+            <a:r>
+              <a:rPr sz="1300" b="1">
+                <a:solidFill>
+                  <a:srgbClr val="1F4E79"/>
+                </a:solidFill>
+                <a:latin typeface="WenQuanYi Micro Hei"/>
+              </a:rPr>
+              <a:t>③ 主舞台 / 论坛厅</a:t>
+            </a:r>
+          </a:p>
+        </p:txBody>
+      </p:sp>
+      <p:sp>
+        <p:nvSpPr>
+          <p:cNvPr id="20" name="Rectangle 19"/>
+          <p:cNvSpPr/>
+          <p:nvPr/>
+        </p:nvSpPr>
+        <p:spPr>
+          <a:xfrm>
+            <a:off x="3657600" y="3977640"/>
+            <a:ext cx="8046720" cy="777240"/>
+          </a:xfrm>
+          <a:prstGeom prst="rect">
+            <a:avLst/>
+          </a:prstGeom>
+          <a:solidFill>
+            <a:srgbClr val="FFFFFF"/>
+          </a:solidFill>
+          <a:ln>
+            <a:solidFill>
+              <a:srgbClr val="BFBFBF"/>
+            </a:solidFill>
+          </a:ln>
+          <a:effectLst/>
+        </p:spPr>
+        <p:style>
+          <a:lnRef idx="1">
+            <a:schemeClr val="accent1"/>
+          </a:lnRef>
+          <a:fillRef idx="3">
+            <a:schemeClr val="accent1"/>
+          </a:fillRef>
+          <a:effectRef idx="2">
+            <a:schemeClr val="accent1"/>
+          </a:effectRef>
+          <a:fontRef idx="minor">
+            <a:schemeClr val="lt1"/>
+          </a:fontRef>
+        </p:style>
+        <p:txBody>
+          <a:bodyPr rtlCol="0" anchor="ctr"/>
+          <a:lstStyle/>
+          <a:p>
+            <a:pPr algn="ctr"/>
+          </a:p>
+        </p:txBody>
+      </p:sp>
+      <p:sp>
+        <p:nvSpPr>
+          <p:cNvPr id="21" name="TextBox 20"/>
+          <p:cNvSpPr txBox="1"/>
+          <p:nvPr/>
+        </p:nvSpPr>
+        <p:spPr>
+          <a:xfrm>
+            <a:off x="3794760" y="4023360"/>
+            <a:ext cx="7863840" cy="685800"/>
+          </a:xfrm>
+          <a:prstGeom prst="rect">
+            <a:avLst/>
+          </a:prstGeom>
+          <a:noFill/>
+        </p:spPr>
+        <p:txBody>
+          <a:bodyPr wrap="square" anchor="ctr">
+            <a:spAutoFit/>
+          </a:bodyPr>
+          <a:lstStyle/>
+          <a:p>
+            <a:pPr algn="l"/>
+            <a:r>
+              <a:rPr sz="1100" b="0">
+                <a:solidFill>
+                  <a:srgbClr val="333333"/>
+                </a:solidFill>
+                <a:latin typeface="WenQuanYi Micro Hei"/>
+              </a:rPr>
+              <a:t>腾讯云 LOGO 墙 + 易拉宝 + 绿城品宣 + 颁奖区台面</a:t>
+            </a:r>
+          </a:p>
+        </p:txBody>
+      </p:sp>
+      <p:sp>
+        <p:nvSpPr>
+          <p:cNvPr id="22" name="Rectangle 21"/>
+          <p:cNvSpPr/>
+          <p:nvPr/>
+        </p:nvSpPr>
+        <p:spPr>
+          <a:xfrm>
+            <a:off x="457200" y="4937760"/>
+            <a:ext cx="3017520" cy="777240"/>
+          </a:xfrm>
+          <a:prstGeom prst="rect">
+            <a:avLst/>
+          </a:prstGeom>
+          <a:solidFill>
+            <a:srgbClr val="D9E1F2"/>
+          </a:solidFill>
+          <a:ln>
+            <a:noFill/>
+          </a:ln>
+          <a:effectLst/>
+        </p:spPr>
+        <p:style>
+          <a:lnRef idx="1">
+            <a:schemeClr val="accent1"/>
+          </a:lnRef>
+          <a:fillRef idx="3">
+            <a:schemeClr val="accent1"/>
+          </a:fillRef>
+          <a:effectRef idx="2">
+            <a:schemeClr val="accent1"/>
+          </a:effectRef>
+          <a:fontRef idx="minor">
+            <a:schemeClr val="lt1"/>
+          </a:fontRef>
+        </p:style>
+        <p:txBody>
+          <a:bodyPr rtlCol="0" anchor="ctr"/>
+          <a:lstStyle/>
+          <a:p>
+            <a:pPr algn="ctr"/>
+          </a:p>
+        </p:txBody>
+      </p:sp>
+      <p:sp>
+        <p:nvSpPr>
+          <p:cNvPr id="23" name="TextBox 22"/>
+          <p:cNvSpPr txBox="1"/>
+          <p:nvPr/>
+        </p:nvSpPr>
+        <p:spPr>
+          <a:xfrm>
+            <a:off x="548640" y="4983480"/>
+            <a:ext cx="2834640" cy="685800"/>
+          </a:xfrm>
+          <a:prstGeom prst="rect">
+            <a:avLst/>
+          </a:prstGeom>
+          <a:noFill/>
+        </p:spPr>
+        <p:txBody>
+          <a:bodyPr wrap="square" anchor="ctr">
+            <a:spAutoFit/>
+          </a:bodyPr>
+          <a:lstStyle/>
+          <a:p>
+            <a:pPr algn="l"/>
+            <a:r>
+              <a:rPr sz="1300" b="1">
+                <a:solidFill>
+                  <a:srgbClr val="1F4E79"/>
+                </a:solidFill>
+                <a:latin typeface="WenQuanYi Micro Hei"/>
+              </a:rPr>
+              <a:t>④ 晚宴厅（二楼）</a:t>
+            </a:r>
+          </a:p>
+        </p:txBody>
+      </p:sp>
+      <p:sp>
+        <p:nvSpPr>
+          <p:cNvPr id="24" name="Rectangle 23"/>
+          <p:cNvSpPr/>
+          <p:nvPr/>
+        </p:nvSpPr>
+        <p:spPr>
+          <a:xfrm>
+            <a:off x="3657600" y="4937760"/>
+            <a:ext cx="8046720" cy="777240"/>
+          </a:xfrm>
+          <a:prstGeom prst="rect">
+            <a:avLst/>
+          </a:prstGeom>
+          <a:solidFill>
+            <a:srgbClr val="FFFFFF"/>
+          </a:solidFill>
+          <a:ln>
+            <a:solidFill>
+              <a:srgbClr val="BFBFBF"/>
+            </a:solidFill>
+          </a:ln>
+          <a:effectLst/>
+        </p:spPr>
+        <p:style>
+          <a:lnRef idx="1">
+            <a:schemeClr val="accent1"/>
+          </a:lnRef>
+          <a:fillRef idx="3">
+            <a:schemeClr val="accent1"/>
+          </a:fillRef>
+          <a:effectRef idx="2">
+            <a:schemeClr val="accent1"/>
+          </a:effectRef>
+          <a:fontRef idx="minor">
+            <a:schemeClr val="lt1"/>
+          </a:fontRef>
+        </p:style>
+        <p:txBody>
+          <a:bodyPr rtlCol="0" anchor="ctr"/>
+          <a:lstStyle/>
+          <a:p>
+            <a:pPr algn="ctr"/>
+          </a:p>
+        </p:txBody>
+      </p:sp>
+      <p:sp>
+        <p:nvSpPr>
+          <p:cNvPr id="25" name="TextBox 24"/>
+          <p:cNvSpPr txBox="1"/>
+          <p:nvPr/>
+        </p:nvSpPr>
+        <p:spPr>
+          <a:xfrm>
+            <a:off x="3794760" y="4983480"/>
+            <a:ext cx="7863840" cy="685800"/>
+          </a:xfrm>
+          <a:prstGeom prst="rect">
+            <a:avLst/>
+          </a:prstGeom>
+          <a:noFill/>
+        </p:spPr>
+        <p:txBody>
+          <a:bodyPr wrap="square" anchor="ctr">
+            <a:spAutoFit/>
+          </a:bodyPr>
+          <a:lstStyle/>
+          <a:p>
+            <a:pPr algn="l"/>
+            <a:r>
+              <a:rPr sz="1100" b="0">
+                <a:solidFill>
+                  <a:srgbClr val="333333"/>
+                </a:solidFill>
+                <a:latin typeface="WenQuanYi Micro Hei"/>
+              </a:rPr>
+              <a:t>绿城【绿城·潮鸣】KT 板 + 绿城礼品 500 份 + 古井贡酒 20 瓶（T01-T10）+ 泰隆物料（T05/T06）</a:t>
+            </a:r>
+          </a:p>
+        </p:txBody>
+      </p:sp>
+      <p:sp>
+        <p:nvSpPr>
+          <p:cNvPr id="26" name="TextBox 25"/>
+          <p:cNvSpPr txBox="1"/>
+          <p:nvPr/>
+        </p:nvSpPr>
+        <p:spPr>
+          <a:xfrm>
+            <a:off x="457200" y="6035040"/>
+            <a:ext cx="11247120" cy="365760"/>
+          </a:xfrm>
+          <a:prstGeom prst="rect">
+            <a:avLst/>
+          </a:prstGeom>
+          <a:noFill/>
+        </p:spPr>
+        <p:txBody>
+          <a:bodyPr wrap="square" anchor="t">
+            <a:spAutoFit/>
+          </a:bodyPr>
+          <a:lstStyle/>
+          <a:p>
+            <a:pPr algn="l"/>
+            <a:r>
+              <a:rPr sz="1100" b="1">
+                <a:solidFill>
+                  <a:srgbClr val="1F4E79"/>
+                </a:solidFill>
+                <a:latin typeface="WenQuanYi Micro Hei"/>
+              </a:rPr>
+              <a:t>签收：葛九明、李正超（D 组）+ 蔡萍、马磊（G 组）；统筹：陈潇 Kelly 15021307893</a:t>
+            </a:r>
+          </a:p>
+        </p:txBody>
+      </p:sp>
+    </p:spTree>
+  </p:cSld>
+  <p:clrMapOvr>
+    <a:masterClrMapping/>
+  </p:clrMapOvr>
+</p:sld>
+</file>
+
+<file path=ppt/slides/slide15.xml><?xml version="1.0" encoding="utf-8"?>
 <p:sld xmlns:a="http://schemas.openxmlformats.org/drawingml/2006/main" xmlns:p="http://schemas.openxmlformats.org/presentationml/2006/main" xmlns:r="http://schemas.openxmlformats.org/officeDocument/2006/relationships">
   <p:cSld>
     <p:spTree>
@@ -7746,7 +9691,7 @@
                 </a:solidFill>
                 <a:latin typeface="WenQuanYi Micro Hei"/>
               </a:rPr>
-              <a:t>04  晚宴 · 圆桌分桌</a:t>
+              <a:t>04  晚宴 · 圆桌分桌（每桌 12 人）</a:t>
             </a:r>
           </a:p>
         </p:txBody>
@@ -7983,7 +9928,7 @@
                 </a:solidFill>
                 <a:latin typeface="WenQuanYi Micro Hei"/>
               </a:rPr>
-              <a:t>07  赞助方对接与物资清单</a:t>
+              <a:t>07  赞助方对接与物资清单（9-11 点入场）</a:t>
             </a:r>
           </a:p>
         </p:txBody>
@@ -8221,6 +10166,164 @@
                 <a:latin typeface="WenQuanYi Micro Hei"/>
               </a:rPr>
               <a:t>10  关键时间节点 &amp; 待补事项</a:t>
+            </a:r>
+          </a:p>
+        </p:txBody>
+      </p:sp>
+      <p:sp>
+        <p:nvSpPr>
+          <p:cNvPr id="27" name="Rectangle 26"/>
+          <p:cNvSpPr/>
+          <p:nvPr/>
+        </p:nvSpPr>
+        <p:spPr>
+          <a:xfrm>
+            <a:off x="1371600" y="5715000"/>
+            <a:ext cx="4572000" cy="640080"/>
+          </a:xfrm>
+          <a:prstGeom prst="rect">
+            <a:avLst/>
+          </a:prstGeom>
+          <a:solidFill>
+            <a:srgbClr val="D9E1F2"/>
+          </a:solidFill>
+          <a:ln>
+            <a:noFill/>
+          </a:ln>
+          <a:effectLst/>
+        </p:spPr>
+        <p:style>
+          <a:lnRef idx="1">
+            <a:schemeClr val="accent1"/>
+          </a:lnRef>
+          <a:fillRef idx="3">
+            <a:schemeClr val="accent1"/>
+          </a:fillRef>
+          <a:effectRef idx="2">
+            <a:schemeClr val="accent1"/>
+          </a:effectRef>
+          <a:fontRef idx="minor">
+            <a:schemeClr val="lt1"/>
+          </a:fontRef>
+        </p:style>
+        <p:txBody>
+          <a:bodyPr rtlCol="0" anchor="ctr"/>
+          <a:lstStyle/>
+          <a:p>
+            <a:pPr algn="ctr"/>
+          </a:p>
+        </p:txBody>
+      </p:sp>
+      <p:sp>
+        <p:nvSpPr>
+          <p:cNvPr id="28" name="TextBox 27"/>
+          <p:cNvSpPr txBox="1"/>
+          <p:nvPr/>
+        </p:nvSpPr>
+        <p:spPr>
+          <a:xfrm>
+            <a:off x="1554480" y="5760720"/>
+            <a:ext cx="4389120" cy="548640"/>
+          </a:xfrm>
+          <a:prstGeom prst="rect">
+            <a:avLst/>
+          </a:prstGeom>
+          <a:noFill/>
+        </p:spPr>
+        <p:txBody>
+          <a:bodyPr wrap="square" anchor="ctr">
+            <a:spAutoFit/>
+          </a:bodyPr>
+          <a:lstStyle/>
+          <a:p>
+            <a:pPr algn="l"/>
+            <a:r>
+              <a:rPr sz="1600" b="1">
+                <a:solidFill>
+                  <a:srgbClr val="1F4E79"/>
+                </a:solidFill>
+                <a:latin typeface="WenQuanYi Micro Hei"/>
+              </a:rPr>
+              <a:t>11  ★ 颁奖典礼推荐名单（新增）</a:t>
+            </a:r>
+          </a:p>
+        </p:txBody>
+      </p:sp>
+      <p:sp>
+        <p:nvSpPr>
+          <p:cNvPr id="29" name="Rectangle 28"/>
+          <p:cNvSpPr/>
+          <p:nvPr/>
+        </p:nvSpPr>
+        <p:spPr>
+          <a:xfrm>
+            <a:off x="6400800" y="5715000"/>
+            <a:ext cx="4572000" cy="640080"/>
+          </a:xfrm>
+          <a:prstGeom prst="rect">
+            <a:avLst/>
+          </a:prstGeom>
+          <a:solidFill>
+            <a:srgbClr val="D9E1F2"/>
+          </a:solidFill>
+          <a:ln>
+            <a:noFill/>
+          </a:ln>
+          <a:effectLst/>
+        </p:spPr>
+        <p:style>
+          <a:lnRef idx="1">
+            <a:schemeClr val="accent1"/>
+          </a:lnRef>
+          <a:fillRef idx="3">
+            <a:schemeClr val="accent1"/>
+          </a:fillRef>
+          <a:effectRef idx="2">
+            <a:schemeClr val="accent1"/>
+          </a:effectRef>
+          <a:fontRef idx="minor">
+            <a:schemeClr val="lt1"/>
+          </a:fontRef>
+        </p:style>
+        <p:txBody>
+          <a:bodyPr rtlCol="0" anchor="ctr"/>
+          <a:lstStyle/>
+          <a:p>
+            <a:pPr algn="ctr"/>
+          </a:p>
+        </p:txBody>
+      </p:sp>
+      <p:sp>
+        <p:nvSpPr>
+          <p:cNvPr id="30" name="TextBox 29"/>
+          <p:cNvSpPr txBox="1"/>
+          <p:nvPr/>
+        </p:nvSpPr>
+        <p:spPr>
+          <a:xfrm>
+            <a:off x="6583680" y="5760720"/>
+            <a:ext cx="4389120" cy="548640"/>
+          </a:xfrm>
+          <a:prstGeom prst="rect">
+            <a:avLst/>
+          </a:prstGeom>
+          <a:noFill/>
+        </p:spPr>
+        <p:txBody>
+          <a:bodyPr wrap="square" anchor="ctr">
+            <a:spAutoFit/>
+          </a:bodyPr>
+          <a:lstStyle/>
+          <a:p>
+            <a:pPr algn="l"/>
+            <a:r>
+              <a:rPr sz="1600" b="1">
+                <a:solidFill>
+                  <a:srgbClr val="1F4E79"/>
+                </a:solidFill>
+                <a:latin typeface="WenQuanYi Micro Hei"/>
+              </a:rPr>
+              <a:t>12  ★ 物资摆放顺序图（新增）</a:t>
             </a:r>
           </a:p>
         </p:txBody>
@@ -8700,7 +10803,7 @@
                           </a:solidFill>
                           <a:latin typeface="WenQuanYi Micro Hei"/>
                         </a:rPr>
-                        <a:t>复旦未来信息创新学院、上海云计算创新基地、杨浦/虹口科企联、东投资联盟 等</a:t>
+                        <a:t>复旦未来信息创新学院、上海云计算创新基地、杨浦/虹口科企联、中东投资联盟、红瓦共创中心 等</a:t>
                       </a:r>
                     </a:p>
                   </a:txBody>
@@ -8748,7 +10851,7 @@
                           </a:solidFill>
                           <a:latin typeface="WenQuanYi Micro Hei"/>
                         </a:rPr>
-                        <a:t>腾讯云、福布斯中国人工智能科技企业评选委员会</a:t>
+                        <a:t>腾讯云（福布斯中国 AI 评选委员会已退出）</a:t>
                       </a:r>
                     </a:p>
                   </a:txBody>
@@ -8796,7 +10899,7 @@
                           </a:solidFill>
                           <a:latin typeface="WenQuanYi Micro Hei"/>
                         </a:rPr>
-                        <a:t>绿城中国（晚宴：【绿城·潮鸣】星耀北外滩——AI 领袖定制晚宴，凭专属邀请码入场）</a:t>
+                        <a:t>绿城中国（【绿城·潮鸣】星耀北外滩 · 凭专属邀请码 · 每桌 12 人 + 绿城每桌 1 人）</a:t>
                       </a:r>
                     </a:p>
                   </a:txBody>
@@ -8844,7 +10947,7 @@
                           </a:solidFill>
                           <a:latin typeface="WenQuanYi Micro Hei"/>
                         </a:rPr>
-                        <a:t>蔚来汽车、泰隆银行</a:t>
+                        <a:t>蔚来汽车（不展车）、★ 华为鸿蒙汽车（新增，展车）、泰隆银行</a:t>
                       </a:r>
                     </a:p>
                   </a:txBody>
@@ -8892,7 +10995,7 @@
                           </a:solidFill>
                           <a:latin typeface="WenQuanYi Micro Hei"/>
                         </a:rPr>
-                        <a:t>茶活力、美年大健康、复金汇、古井贡酒·年份原浆</a:t>
+                        <a:t>茶活力（孟高举）、美年大健康（鲁菲菲）、复金汇（袁一栋）、古井贡酒·年份原浆（李旭欢）</a:t>
                       </a:r>
                     </a:p>
                   </a:txBody>
@@ -8965,7 +11068,7 @@
                           </a:solidFill>
                           <a:latin typeface="WenQuanYi Micro Hei"/>
                         </a:rPr>
-                        <a:t>总联系人</a:t>
+                        <a:t>组委会核心</a:t>
                       </a:r>
                     </a:p>
                   </a:txBody>
@@ -8988,7 +11091,7 @@
                           </a:solidFill>
                           <a:latin typeface="WenQuanYi Micro Hei"/>
                         </a:rPr>
-                        <a:t>胡继刚 13262607888 · 王珏 13817642219 · 安淑娟 13661612711</a:t>
+                        <a:t>胡继刚 13262607888 · 王胜（VIP）13083003003 · 韦佳玉（总协调）17301836967 · 陈潇 Kelly（统筹）15021307893</a:t>
                       </a:r>
                     </a:p>
                   </a:txBody>
@@ -11250,13 +13353,13 @@
           <a:p>
             <a:pPr algn="l"/>
             <a:r>
-              <a:rPr sz="1200" b="0">
+              <a:rPr sz="1100" b="0">
                 <a:solidFill>
                   <a:srgbClr val="C0392B"/>
                 </a:solidFill>
                 <a:latin typeface="WenQuanYi Micro Hei"/>
               </a:rPr>
-              <a:t>待补：绿城 5 席名单；福布斯、蔚来、茶活力、美年大健康、古井贡酒 出席嘉宾名单。</a:t>
+              <a:t>待补：绿城 5 席名单（已知缪川/笪浩+3 位）、华为鸿蒙汽车 / 蔚来李睿 / 茶活力孟高举 / 美年大健康鲁菲菲 / 古井贡酒李旭欢 出席嘉宾。</a:t>
             </a:r>
           </a:p>
         </p:txBody>
@@ -11568,30 +13671,30 @@
                           </a:solidFill>
                           <a:latin typeface="WenQuanYi Micro Hei"/>
                         </a:rPr>
-                        <a:t>VIP 主桌（主席团 / 主旨 / 冠名）</a:t>
-                      </a:r>
-                    </a:p>
-                  </a:txBody>
-                  <a:tcPr>
-                    <a:solidFill>
-                      <a:srgbClr val="FFFFFF"/>
-                    </a:solidFill>
-                  </a:tcPr>
-                </a:tc>
-                <a:tc>
-                  <a:txBody>
-                    <a:bodyPr/>
-                    <a:lstStyle/>
-                    <a:p>
-                      <a:pPr algn="l"/>
-                      <a:r>
-                        <a:rPr sz="1000" b="0">
-                          <a:solidFill>
-                            <a:srgbClr val="333333"/>
-                          </a:solidFill>
-                          <a:latin typeface="WenQuanYi Micro Hei"/>
-                        </a:rPr>
-                        <a:t>姚志勇、白硕、夏春、王维军、寇文红、张露瑶、绿城×2、胡继刚、黄欣</a:t>
+                        <a:t>VIP 主桌（12 人）</a:t>
+                      </a:r>
+                    </a:p>
+                  </a:txBody>
+                  <a:tcPr>
+                    <a:solidFill>
+                      <a:srgbClr val="FFFFFF"/>
+                    </a:solidFill>
+                  </a:tcPr>
+                </a:tc>
+                <a:tc>
+                  <a:txBody>
+                    <a:bodyPr/>
+                    <a:lstStyle/>
+                    <a:p>
+                      <a:pPr algn="l"/>
+                      <a:r>
+                        <a:rPr sz="1000" b="0">
+                          <a:solidFill>
+                            <a:srgbClr val="333333"/>
+                          </a:solidFill>
+                          <a:latin typeface="WenQuanYi Micro Hei"/>
+                        </a:rPr>
+                        <a:t>姚志勇、白硕、夏春、王维军、寇文红、张露瑶、缪川、笪浩、胡继刚、黄欣、徐泳泽、李睿/华为代表</a:t>
                       </a:r>
                     </a:p>
                   </a:txBody>
@@ -11639,7 +13742,7 @@
                           </a:solidFill>
                           <a:latin typeface="WenQuanYi Micro Hei"/>
                         </a:rPr>
-                        <a:t>圆桌一 + 圆桌二（巅峰对话）嘉宾桌</a:t>
+                        <a:t>圆桌一 + 圆桌二嘉宾桌</a:t>
                       </a:r>
                     </a:p>
                   </a:txBody>
@@ -11662,7 +13765,7 @@
                           </a:solidFill>
                           <a:latin typeface="WenQuanYi Micro Hei"/>
                         </a:rPr>
-                        <a:t>王珏、李龙、齐宝鑫、刘文平、刘帅华、徐泳泽、黎远、刘剑英、于敬、孔华威</a:t>
+                        <a:t>王珏、李龙、齐宝鑫、刘文平、刘帅华、黎远、刘剑英、于敬、孔华威、朱震、绿城代表、王晓明</a:t>
                       </a:r>
                     </a:p>
                   </a:txBody>
@@ -11710,30 +13813,30 @@
                           </a:solidFill>
                           <a:latin typeface="WenQuanYi Micro Hei"/>
                         </a:rPr>
-                        <a:t>圆桌三（投资大圆桌+闭幕）+ 理事桌</a:t>
-                      </a:r>
-                    </a:p>
-                  </a:txBody>
-                  <a:tcPr>
-                    <a:solidFill>
-                      <a:srgbClr val="FFFFFF"/>
-                    </a:solidFill>
-                  </a:tcPr>
-                </a:tc>
-                <a:tc>
-                  <a:txBody>
-                    <a:bodyPr/>
-                    <a:lstStyle/>
-                    <a:p>
-                      <a:pPr algn="l"/>
-                      <a:r>
-                        <a:rPr sz="1000" b="0">
-                          <a:solidFill>
-                            <a:srgbClr val="333333"/>
-                          </a:solidFill>
-                          <a:latin typeface="WenQuanYi Micro Hei"/>
-                        </a:rPr>
-                        <a:t>曲承东、刘胜利、饶雪莹、马俊杰 + 张景瑞、何杭、童长征、冯旭南、葛九明、朱震</a:t>
+                        <a:t>圆桌三 + 理事桌</a:t>
+                      </a:r>
+                    </a:p>
+                  </a:txBody>
+                  <a:tcPr>
+                    <a:solidFill>
+                      <a:srgbClr val="FFFFFF"/>
+                    </a:solidFill>
+                  </a:tcPr>
+                </a:tc>
+                <a:tc>
+                  <a:txBody>
+                    <a:bodyPr/>
+                    <a:lstStyle/>
+                    <a:p>
+                      <a:pPr algn="l"/>
+                      <a:r>
+                        <a:rPr sz="1000" b="0">
+                          <a:solidFill>
+                            <a:srgbClr val="333333"/>
+                          </a:solidFill>
+                          <a:latin typeface="WenQuanYi Micro Hei"/>
+                        </a:rPr>
+                        <a:t>曲承东、刘胜利、饶雪莹、马俊杰、张景瑞、何杭、童长征、冯旭南、葛九明、乐琪文、绿城代表、唐忠敏</a:t>
                       </a:r>
                     </a:p>
                   </a:txBody>
@@ -11781,7 +13884,7 @@
                           </a:solidFill>
                           <a:latin typeface="WenQuanYi Micro Hei"/>
                         </a:rPr>
-                        <a:t>腾讯云 / 上海云基地 / 绿城联合桌</a:t>
+                        <a:t>腾讯云 / 上海云基地 联合桌</a:t>
                       </a:r>
                     </a:p>
                   </a:txBody>
@@ -11804,7 +13907,7 @@
                           </a:solidFill>
                           <a:latin typeface="WenQuanYi Micro Hei"/>
                         </a:rPr>
-                        <a:t>周昭、孙总、李海洋、高歆、顾炯亮、陈艳 + 绿城预留 4 席</a:t>
+                        <a:t>周昭、孙总、李海洋、高歆、顾炯亮、陈艳、绿城代表 + 5 位协办单位代表</a:t>
                       </a:r>
                     </a:p>
                   </a:txBody>
@@ -11875,7 +13978,7 @@
                           </a:solidFill>
                           <a:latin typeface="WenQuanYi Micro Hei"/>
                         </a:rPr>
-                        <a:t>林骁、杨红江、汤梦薇、阎晓华、徐至柔、毛瑞香 等</a:t>
+                        <a:t>林骁、阎晓华、徐至柔、毛瑞香 + 6 位客户 + 绿城代表 + 客户（⚠️ 取消 杨红江/汤梦薇）</a:t>
                       </a:r>
                     </a:p>
                   </a:txBody>
@@ -11946,7 +14049,7 @@
                           </a:solidFill>
                           <a:latin typeface="WenQuanYi Micro Hei"/>
                         </a:rPr>
-                        <a:t>陈煜、赵逸飞、晋嘉乐 + 7 家科企客户</a:t>
+                        <a:t>陈煜、赵逸飞、晋嘉乐 + 7 家科企客户 + 绿城代表 + 李柳阳</a:t>
                       </a:r>
                     </a:p>
                   </a:txBody>
@@ -12017,7 +14120,7 @@
                           </a:solidFill>
                           <a:latin typeface="WenQuanYi Micro Hei"/>
                         </a:rPr>
-                        <a:t>李莺莺、王梦雅、郭紫奇、林雪、李克勤、刘中原、罗晓、邵彩霞 等</a:t>
+                        <a:t>李莺莺、王梦雅、郭紫奇、林雪、李克勤、刘中原、罗晓、邵彩霞、苏燕春、王金珂、绿城代表、杨峰</a:t>
                       </a:r>
                     </a:p>
                   </a:txBody>
@@ -12088,7 +14191,7 @@
                           </a:solidFill>
                           <a:latin typeface="WenQuanYi Micro Hei"/>
                         </a:rPr>
-                        <a:t>赵梓翔、陈颖芳、冯浩然、潘健慧、张涌、张稳、魏军、唐亮 等</a:t>
+                        <a:t>赵梓翔、陈颖芳、冯浩然、潘健慧、张涌、张稳、魏军、唐亮、王泓渊、蔡建华、绿城代表、待补</a:t>
                       </a:r>
                     </a:p>
                   </a:txBody>
@@ -12159,7 +14262,7 @@
                           </a:solidFill>
                           <a:latin typeface="WenQuanYi Micro Hei"/>
                         </a:rPr>
-                        <a:t>张蒙、谈英豪、张戟、王梦、黄勇、田甜、唐伟、邱诗灵、姜逸斐、杨峰</a:t>
+                        <a:t>张蒙、谈英豪、张戟、王梦、黄勇、田甜、唐伟、邱诗灵、姜逸斐、马月、绿城代表、待补</a:t>
                       </a:r>
                     </a:p>
                   </a:txBody>
@@ -12230,7 +14333,7 @@
                           </a:solidFill>
                           <a:latin typeface="WenQuanYi Micro Hei"/>
                         </a:rPr>
-                        <a:t>周舟、杨知予、任广焕、刘晓、李柳阳 + 其余嘉宾</a:t>
+                        <a:t>周舟、杨知予、任广焕、刘晓、媒体 ×5、洪小燕、绿城代表</a:t>
                       </a:r>
                     </a:p>
                   </a:txBody>
@@ -12255,53 +14358,53 @@
                           </a:solidFill>
                           <a:latin typeface="WenQuanYi Micro Hei"/>
                         </a:rPr>
-                        <a:t>T11-T50</a:t>
-                      </a:r>
-                    </a:p>
-                  </a:txBody>
-                  <a:tcPr>
-                    <a:solidFill>
-                      <a:srgbClr val="FFFFFF"/>
-                    </a:solidFill>
-                  </a:tcPr>
-                </a:tc>
-                <a:tc>
-                  <a:txBody>
-                    <a:bodyPr/>
-                    <a:lstStyle/>
-                    <a:p>
-                      <a:pPr algn="l"/>
-                      <a:r>
-                        <a:rPr sz="1000" b="0">
-                          <a:solidFill>
-                            <a:srgbClr val="333333"/>
-                          </a:solidFill>
-                          <a:latin typeface="WenQuanYi Micro Hei"/>
-                        </a:rPr>
-                        <a:t>待排（北大校友 / 律所 / 媒体 / 家办 / 普通晚宴桌）</a:t>
-                      </a:r>
-                    </a:p>
-                  </a:txBody>
-                  <a:tcPr>
-                    <a:solidFill>
-                      <a:srgbClr val="FFFFFF"/>
-                    </a:solidFill>
-                  </a:tcPr>
-                </a:tc>
-                <a:tc>
-                  <a:txBody>
-                    <a:bodyPr/>
-                    <a:lstStyle/>
-                    <a:p>
-                      <a:pPr algn="l"/>
-                      <a:r>
-                        <a:rPr sz="1000" b="0">
-                          <a:solidFill>
-                            <a:srgbClr val="333333"/>
-                          </a:solidFill>
-                          <a:latin typeface="WenQuanYi Micro Hei"/>
-                        </a:rPr>
-                        <a:t>5/21 22:00 前由 王珏 / 黄欣 / 安淑娟 定稿</a:t>
+                        <a:t>T11-T42</a:t>
+                      </a:r>
+                    </a:p>
+                  </a:txBody>
+                  <a:tcPr>
+                    <a:solidFill>
+                      <a:srgbClr val="FFFFFF"/>
+                    </a:solidFill>
+                  </a:tcPr>
+                </a:tc>
+                <a:tc>
+                  <a:txBody>
+                    <a:bodyPr/>
+                    <a:lstStyle/>
+                    <a:p>
+                      <a:pPr algn="l"/>
+                      <a:r>
+                        <a:rPr sz="1000" b="0">
+                          <a:solidFill>
+                            <a:srgbClr val="333333"/>
+                          </a:solidFill>
+                          <a:latin typeface="WenQuanYi Micro Hei"/>
+                        </a:rPr>
+                        <a:t>待排（每桌 12 人 + 绿城每桌 1 人，共 ~42 桌）</a:t>
+                      </a:r>
+                    </a:p>
+                  </a:txBody>
+                  <a:tcPr>
+                    <a:solidFill>
+                      <a:srgbClr val="FFFFFF"/>
+                    </a:solidFill>
+                  </a:tcPr>
+                </a:tc>
+                <a:tc>
+                  <a:txBody>
+                    <a:bodyPr/>
+                    <a:lstStyle/>
+                    <a:p>
+                      <a:pPr algn="l"/>
+                      <a:r>
+                        <a:rPr sz="1000" b="0">
+                          <a:solidFill>
+                            <a:srgbClr val="333333"/>
+                          </a:solidFill>
+                          <a:latin typeface="WenQuanYi Micro Hei"/>
+                        </a:rPr>
+                        <a:t>5/21 22:00 前由 王珏 / 陈潇 / 安淑娟 定稿</a:t>
                       </a:r>
                     </a:p>
                   </a:txBody>
@@ -13045,7 +15148,7 @@
                           </a:solidFill>
                           <a:latin typeface="WenQuanYi Micro Hei"/>
                         </a:rPr>
-                        <a:t>主礼嘉宾 ×5</a:t>
+                        <a:t>主礼 + 9 位颁奖嘉宾</a:t>
                       </a:r>
                     </a:p>
                   </a:txBody>
@@ -13068,7 +15171,7 @@
                           </a:solidFill>
                           <a:latin typeface="WenQuanYi Micro Hei"/>
                         </a:rPr>
-                        <a:t>姚志勇、胡继刚、黄欣、福布斯-代表、绿城-代表</a:t>
+                        <a:t>姚志勇 + 胡继刚 + 缪川/笪浩、徐泳泽、白硕、夏春、王维军、高歆、林骁/陈煜、李睿/华为代表、袁一栋</a:t>
                       </a:r>
                     </a:p>
                   </a:txBody>
@@ -13091,7 +15194,7 @@
                           </a:solidFill>
                           <a:latin typeface="WenQuanYi Micro Hei"/>
                         </a:rPr>
-                        <a:t>高光启幕</a:t>
+                        <a:t>黄欣不参加 / 福布斯退出</a:t>
                       </a:r>
                     </a:p>
                   </a:txBody>
@@ -13838,7 +15941,7 @@
                 </a:solidFill>
                 <a:latin typeface="WenQuanYi Micro Hei"/>
               </a:rPr>
-              <a:t>输出总数：32 张（含备用 5 张）；★ 颁奖典礼前移至 14:25-14:40；福布斯颁奖物料须 5/22 12:00 前到位。</a:t>
+              <a:t>输出总数：38 张（含备用 5 张）；★ 颁奖典礼前移至 14:25-14:40，由组委会主办（无福布斯 LOGO）。</a:t>
             </a:r>
           </a:p>
         </p:txBody>
@@ -14932,7 +17035,7 @@
                 </a:solidFill>
                 <a:latin typeface="WenQuanYi Micro Hei"/>
               </a:rPr>
-              <a:t>志愿者分组（A-G + 外部协作，共 23 人）</a:t>
+              <a:t>组委会核心岗位 + 志愿者分组（A-G + 外部协作）</a:t>
             </a:r>
           </a:p>
         </p:txBody>
@@ -14947,7 +17050,7 @@
         </p:nvGraphicFramePr>
         <p:xfrm>
           <a:off x="365760" y="3474720"/>
-          <a:ext cx="11429999" cy="2926080"/>
+          <a:ext cx="11430000" cy="2926080"/>
         </p:xfrm>
         <a:graphic>
           <a:graphicData uri="http://schemas.openxmlformats.org/drawingml/2006/table">
@@ -14956,11 +17059,11 @@
                 <a:tableStyleId>{5C22544A-7EE6-4342-B048-85BDC9FD1C3A}</a:tableStyleId>
               </a:tblPr>
               <a:tblGrid>
-                <a:gridCol w="731520"/>
-                <a:gridCol w="2743200"/>
-                <a:gridCol w="7955279"/>
+                <a:gridCol w="1097280"/>
+                <a:gridCol w="2286000"/>
+                <a:gridCol w="8046720"/>
               </a:tblGrid>
-              <a:tr h="325120">
+              <a:tr h="292608">
                 <a:tc>
                   <a:txBody>
                     <a:bodyPr/>
@@ -14974,7 +17077,7 @@
                           </a:solidFill>
                           <a:latin typeface="WenQuanYi Micro Hei"/>
                         </a:rPr>
-                        <a:t>组</a:t>
+                        <a:t>组 / 岗位</a:t>
                       </a:r>
                     </a:p>
                   </a:txBody>
@@ -15031,15 +17134,86 @@
                   </a:tcPr>
                 </a:tc>
               </a:tr>
-              <a:tr h="325120">
-                <a:tc>
-                  <a:txBody>
-                    <a:bodyPr/>
-                    <a:lstStyle/>
-                    <a:p>
-                      <a:pPr algn="l"/>
-                      <a:r>
-                        <a:rPr sz="1000" b="0">
+              <a:tr h="292608">
+                <a:tc>
+                  <a:txBody>
+                    <a:bodyPr/>
+                    <a:lstStyle/>
+                    <a:p>
+                      <a:pPr algn="l"/>
+                      <a:r>
+                        <a:rPr sz="900" b="0">
+                          <a:solidFill>
+                            <a:srgbClr val="333333"/>
+                          </a:solidFill>
+                          <a:latin typeface="WenQuanYi Micro Hei"/>
+                        </a:rPr>
+                        <a:t>核心</a:t>
+                      </a:r>
+                    </a:p>
+                  </a:txBody>
+                  <a:tcPr>
+                    <a:solidFill>
+                      <a:srgbClr val="FFFFFF"/>
+                    </a:solidFill>
+                  </a:tcPr>
+                </a:tc>
+                <a:tc>
+                  <a:txBody>
+                    <a:bodyPr/>
+                    <a:lstStyle/>
+                    <a:p>
+                      <a:pPr algn="l"/>
+                      <a:r>
+                        <a:rPr sz="900" b="0">
+                          <a:solidFill>
+                            <a:srgbClr val="333333"/>
+                          </a:solidFill>
+                          <a:latin typeface="WenQuanYi Micro Hei"/>
+                        </a:rPr>
+                        <a:t>组委会核心岗位</a:t>
+                      </a:r>
+                    </a:p>
+                  </a:txBody>
+                  <a:tcPr>
+                    <a:solidFill>
+                      <a:srgbClr val="FFFFFF"/>
+                    </a:solidFill>
+                  </a:tcPr>
+                </a:tc>
+                <a:tc>
+                  <a:txBody>
+                    <a:bodyPr/>
+                    <a:lstStyle/>
+                    <a:p>
+                      <a:pPr algn="l"/>
+                      <a:r>
+                        <a:rPr sz="900" b="0">
+                          <a:solidFill>
+                            <a:srgbClr val="333333"/>
+                          </a:solidFill>
+                          <a:latin typeface="WenQuanYi Micro Hei"/>
+                        </a:rPr>
+                        <a:t>胡继刚 13262607888（总联系）/ 王胜 13083003003（VIP 接待）/ 韦佳玉 17301836967（现场总协调）/ 陈潇 Kelly 15021307893（会务统筹）/ 洪小燕 15021488859（摄影）</a:t>
+                      </a:r>
+                    </a:p>
+                  </a:txBody>
+                  <a:tcPr>
+                    <a:solidFill>
+                      <a:srgbClr val="FFFFFF"/>
+                    </a:solidFill>
+                  </a:tcPr>
+                </a:tc>
+              </a:tr>
+              <a:tr h="292608">
+                <a:tc>
+                  <a:txBody>
+                    <a:bodyPr/>
+                    <a:lstStyle/>
+                    <a:p>
+                      <a:pPr algn="l"/>
+                      <a:r>
+                        <a:rPr sz="900" b="0">
                           <a:solidFill>
                             <a:srgbClr val="333333"/>
                           </a:solidFill>
@@ -15051,18 +17225,18 @@
                   </a:txBody>
                   <a:tcPr>
                     <a:solidFill>
-                      <a:srgbClr val="FFFFFF"/>
-                    </a:solidFill>
-                  </a:tcPr>
-                </a:tc>
-                <a:tc>
-                  <a:txBody>
-                    <a:bodyPr/>
-                    <a:lstStyle/>
-                    <a:p>
-                      <a:pPr algn="l"/>
-                      <a:r>
-                        <a:rPr sz="1000" b="0">
+                      <a:srgbClr val="D9E1F2"/>
+                    </a:solidFill>
+                  </a:tcPr>
+                </a:tc>
+                <a:tc>
+                  <a:txBody>
+                    <a:bodyPr/>
+                    <a:lstStyle/>
+                    <a:p>
+                      <a:pPr algn="l"/>
+                      <a:r>
+                        <a:rPr sz="900" b="0">
                           <a:solidFill>
                             <a:srgbClr val="333333"/>
                           </a:solidFill>
@@ -15074,43 +17248,43 @@
                   </a:txBody>
                   <a:tcPr>
                     <a:solidFill>
-                      <a:srgbClr val="FFFFFF"/>
-                    </a:solidFill>
-                  </a:tcPr>
-                </a:tc>
-                <a:tc>
-                  <a:txBody>
-                    <a:bodyPr/>
-                    <a:lstStyle/>
-                    <a:p>
-                      <a:pPr algn="l"/>
-                      <a:r>
-                        <a:rPr sz="1000" b="0">
-                          <a:solidFill>
-                            <a:srgbClr val="333333"/>
-                          </a:solidFill>
-                          <a:latin typeface="WenQuanYi Micro Hei"/>
-                        </a:rPr>
-                        <a:t>韦佳玉 17301836967、李政春</a:t>
-                      </a:r>
-                    </a:p>
-                  </a:txBody>
-                  <a:tcPr>
-                    <a:solidFill>
-                      <a:srgbClr val="FFFFFF"/>
+                      <a:srgbClr val="D9E1F2"/>
+                    </a:solidFill>
+                  </a:tcPr>
+                </a:tc>
+                <a:tc>
+                  <a:txBody>
+                    <a:bodyPr/>
+                    <a:lstStyle/>
+                    <a:p>
+                      <a:pPr algn="l"/>
+                      <a:r>
+                        <a:rPr sz="900" b="0">
+                          <a:solidFill>
+                            <a:srgbClr val="333333"/>
+                          </a:solidFill>
+                          <a:latin typeface="WenQuanYi Micro Hei"/>
+                        </a:rPr>
+                        <a:t>韦佳玉、李振春（原'李政春'）</a:t>
+                      </a:r>
+                    </a:p>
+                  </a:txBody>
+                  <a:tcPr>
+                    <a:solidFill>
+                      <a:srgbClr val="D9E1F2"/>
                     </a:solidFill>
                   </a:tcPr>
                 </a:tc>
               </a:tr>
-              <a:tr h="325120">
-                <a:tc>
-                  <a:txBody>
-                    <a:bodyPr/>
-                    <a:lstStyle/>
-                    <a:p>
-                      <a:pPr algn="l"/>
-                      <a:r>
-                        <a:rPr sz="1000" b="0">
+              <a:tr h="292608">
+                <a:tc>
+                  <a:txBody>
+                    <a:bodyPr/>
+                    <a:lstStyle/>
+                    <a:p>
+                      <a:pPr algn="l"/>
+                      <a:r>
+                        <a:rPr sz="900" b="0">
                           <a:solidFill>
                             <a:srgbClr val="333333"/>
                           </a:solidFill>
@@ -15122,6 +17296,77 @@
                   </a:txBody>
                   <a:tcPr>
                     <a:solidFill>
+                      <a:srgbClr val="FFFFFF"/>
+                    </a:solidFill>
+                  </a:tcPr>
+                </a:tc>
+                <a:tc>
+                  <a:txBody>
+                    <a:bodyPr/>
+                    <a:lstStyle/>
+                    <a:p>
+                      <a:pPr algn="l"/>
+                      <a:r>
+                        <a:rPr sz="900" b="0">
+                          <a:solidFill>
+                            <a:srgbClr val="333333"/>
+                          </a:solidFill>
+                          <a:latin typeface="WenQuanYi Micro Hei"/>
+                        </a:rPr>
+                        <a:t>台卡 / 物料</a:t>
+                      </a:r>
+                    </a:p>
+                  </a:txBody>
+                  <a:tcPr>
+                    <a:solidFill>
+                      <a:srgbClr val="FFFFFF"/>
+                    </a:solidFill>
+                  </a:tcPr>
+                </a:tc>
+                <a:tc>
+                  <a:txBody>
+                    <a:bodyPr/>
+                    <a:lstStyle/>
+                    <a:p>
+                      <a:pPr algn="l"/>
+                      <a:r>
+                        <a:rPr sz="900" b="0">
+                          <a:solidFill>
+                            <a:srgbClr val="333333"/>
+                          </a:solidFill>
+                          <a:latin typeface="WenQuanYi Micro Hei"/>
+                        </a:rPr>
+                        <a:t>王胜、朱铭喆、蔡杰、江梳桐</a:t>
+                      </a:r>
+                    </a:p>
+                  </a:txBody>
+                  <a:tcPr>
+                    <a:solidFill>
+                      <a:srgbClr val="FFFFFF"/>
+                    </a:solidFill>
+                  </a:tcPr>
+                </a:tc>
+              </a:tr>
+              <a:tr h="292608">
+                <a:tc>
+                  <a:txBody>
+                    <a:bodyPr/>
+                    <a:lstStyle/>
+                    <a:p>
+                      <a:pPr algn="l"/>
+                      <a:r>
+                        <a:rPr sz="900" b="0">
+                          <a:solidFill>
+                            <a:srgbClr val="333333"/>
+                          </a:solidFill>
+                          <a:latin typeface="WenQuanYi Micro Hei"/>
+                        </a:rPr>
+                        <a:t>C</a:t>
+                      </a:r>
+                    </a:p>
+                  </a:txBody>
+                  <a:tcPr>
+                    <a:solidFill>
                       <a:srgbClr val="D9E1F2"/>
                     </a:solidFill>
                   </a:tcPr>
@@ -15133,13 +17378,13 @@
                     <a:p>
                       <a:pPr algn="l"/>
                       <a:r>
-                        <a:rPr sz="1000" b="0">
-                          <a:solidFill>
-                            <a:srgbClr val="333333"/>
-                          </a:solidFill>
-                          <a:latin typeface="WenQuanYi Micro Hei"/>
-                        </a:rPr>
-                        <a:t>台卡 / 物料</a:t>
+                        <a:rPr sz="900" b="0">
+                          <a:solidFill>
+                            <a:srgbClr val="333333"/>
+                          </a:solidFill>
+                          <a:latin typeface="WenQuanYi Micro Hei"/>
+                        </a:rPr>
+                        <a:t>VIP 接待</a:t>
                       </a:r>
                     </a:p>
                   </a:txBody>
@@ -15156,13 +17401,13 @@
                     <a:p>
                       <a:pPr algn="l"/>
                       <a:r>
-                        <a:rPr sz="1000" b="0">
-                          <a:solidFill>
-                            <a:srgbClr val="333333"/>
-                          </a:solidFill>
-                          <a:latin typeface="WenQuanYi Micro Hei"/>
-                        </a:rPr>
-                        <a:t>王胜、朱铭喆、蔡杰、江梳桐</a:t>
+                        <a:rPr sz="900" b="0">
+                          <a:solidFill>
+                            <a:srgbClr val="333333"/>
+                          </a:solidFill>
+                          <a:latin typeface="WenQuanYi Micro Hei"/>
+                        </a:rPr>
+                        <a:t>陈潇 Kelly、王珏、冯墨、黄露、吕志翔</a:t>
                       </a:r>
                     </a:p>
                   </a:txBody>
@@ -15173,67 +17418,67 @@
                   </a:tcPr>
                 </a:tc>
               </a:tr>
-              <a:tr h="325120">
-                <a:tc>
-                  <a:txBody>
-                    <a:bodyPr/>
-                    <a:lstStyle/>
-                    <a:p>
-                      <a:pPr algn="l"/>
-                      <a:r>
-                        <a:rPr sz="1000" b="0">
-                          <a:solidFill>
-                            <a:srgbClr val="333333"/>
-                          </a:solidFill>
-                          <a:latin typeface="WenQuanYi Micro Hei"/>
-                        </a:rPr>
-                        <a:t>C</a:t>
-                      </a:r>
-                    </a:p>
-                  </a:txBody>
-                  <a:tcPr>
-                    <a:solidFill>
-                      <a:srgbClr val="FFFFFF"/>
-                    </a:solidFill>
-                  </a:tcPr>
-                </a:tc>
-                <a:tc>
-                  <a:txBody>
-                    <a:bodyPr/>
-                    <a:lstStyle/>
-                    <a:p>
-                      <a:pPr algn="l"/>
-                      <a:r>
-                        <a:rPr sz="1000" b="0">
-                          <a:solidFill>
-                            <a:srgbClr val="333333"/>
-                          </a:solidFill>
-                          <a:latin typeface="WenQuanYi Micro Hei"/>
-                        </a:rPr>
-                        <a:t>VIP 接待</a:t>
-                      </a:r>
-                    </a:p>
-                  </a:txBody>
-                  <a:tcPr>
-                    <a:solidFill>
-                      <a:srgbClr val="FFFFFF"/>
-                    </a:solidFill>
-                  </a:tcPr>
-                </a:tc>
-                <a:tc>
-                  <a:txBody>
-                    <a:bodyPr/>
-                    <a:lstStyle/>
-                    <a:p>
-                      <a:pPr algn="l"/>
-                      <a:r>
-                        <a:rPr sz="1000" b="0">
-                          <a:solidFill>
-                            <a:srgbClr val="333333"/>
-                          </a:solidFill>
-                          <a:latin typeface="WenQuanYi Micro Hei"/>
-                        </a:rPr>
-                        <a:t>陈潇 Kelly、王珏（组长）、冯墨、黄露、吕志翔</a:t>
+              <a:tr h="292608">
+                <a:tc>
+                  <a:txBody>
+                    <a:bodyPr/>
+                    <a:lstStyle/>
+                    <a:p>
+                      <a:pPr algn="l"/>
+                      <a:r>
+                        <a:rPr sz="900" b="0">
+                          <a:solidFill>
+                            <a:srgbClr val="333333"/>
+                          </a:solidFill>
+                          <a:latin typeface="WenQuanYi Micro Hei"/>
+                        </a:rPr>
+                        <a:t>D</a:t>
+                      </a:r>
+                    </a:p>
+                  </a:txBody>
+                  <a:tcPr>
+                    <a:solidFill>
+                      <a:srgbClr val="FFFFFF"/>
+                    </a:solidFill>
+                  </a:tcPr>
+                </a:tc>
+                <a:tc>
+                  <a:txBody>
+                    <a:bodyPr/>
+                    <a:lstStyle/>
+                    <a:p>
+                      <a:pPr algn="l"/>
+                      <a:r>
+                        <a:rPr sz="900" b="0">
+                          <a:solidFill>
+                            <a:srgbClr val="333333"/>
+                          </a:solidFill>
+                          <a:latin typeface="WenQuanYi Micro Hei"/>
+                        </a:rPr>
+                        <a:t>圆桌对接 / 物资签收</a:t>
+                      </a:r>
+                    </a:p>
+                  </a:txBody>
+                  <a:tcPr>
+                    <a:solidFill>
+                      <a:srgbClr val="FFFFFF"/>
+                    </a:solidFill>
+                  </a:tcPr>
+                </a:tc>
+                <a:tc>
+                  <a:txBody>
+                    <a:bodyPr/>
+                    <a:lstStyle/>
+                    <a:p>
+                      <a:pPr algn="l"/>
+                      <a:r>
+                        <a:rPr sz="900" b="0">
+                          <a:solidFill>
+                            <a:srgbClr val="333333"/>
+                          </a:solidFill>
+                          <a:latin typeface="WenQuanYi Micro Hei"/>
+                        </a:rPr>
+                        <a:t>葛九明、李正超</a:t>
                       </a:r>
                     </a:p>
                   </a:txBody>
@@ -15244,21 +17489,21 @@
                   </a:tcPr>
                 </a:tc>
               </a:tr>
-              <a:tr h="325120">
-                <a:tc>
-                  <a:txBody>
-                    <a:bodyPr/>
-                    <a:lstStyle/>
-                    <a:p>
-                      <a:pPr algn="l"/>
-                      <a:r>
-                        <a:rPr sz="1000" b="0">
-                          <a:solidFill>
-                            <a:srgbClr val="333333"/>
-                          </a:solidFill>
-                          <a:latin typeface="WenQuanYi Micro Hei"/>
-                        </a:rPr>
-                        <a:t>D</a:t>
+              <a:tr h="292608">
+                <a:tc>
+                  <a:txBody>
+                    <a:bodyPr/>
+                    <a:lstStyle/>
+                    <a:p>
+                      <a:pPr algn="l"/>
+                      <a:r>
+                        <a:rPr sz="900" b="0">
+                          <a:solidFill>
+                            <a:srgbClr val="333333"/>
+                          </a:solidFill>
+                          <a:latin typeface="WenQuanYi Micro Hei"/>
+                        </a:rPr>
+                        <a:t>E</a:t>
                       </a:r>
                     </a:p>
                   </a:txBody>
@@ -15275,13 +17520,13 @@
                     <a:p>
                       <a:pPr algn="l"/>
                       <a:r>
-                        <a:rPr sz="1000" b="0">
-                          <a:solidFill>
-                            <a:srgbClr val="333333"/>
-                          </a:solidFill>
-                          <a:latin typeface="WenQuanYi Micro Hei"/>
-                        </a:rPr>
-                        <a:t>圆桌对接 / 上下场</a:t>
+                        <a:rPr sz="900" b="0">
+                          <a:solidFill>
+                            <a:srgbClr val="333333"/>
+                          </a:solidFill>
+                          <a:latin typeface="WenQuanYi Micro Hei"/>
+                        </a:rPr>
+                        <a:t>晚宴布置 / 席卡</a:t>
                       </a:r>
                     </a:p>
                   </a:txBody>
@@ -15298,13 +17543,13 @@
                     <a:p>
                       <a:pPr algn="l"/>
                       <a:r>
-                        <a:rPr sz="1000" b="0">
-                          <a:solidFill>
-                            <a:srgbClr val="333333"/>
-                          </a:solidFill>
-                          <a:latin typeface="WenQuanYi Micro Hei"/>
-                        </a:rPr>
-                        <a:t>葛九明、李正超</a:t>
+                        <a:rPr sz="900" b="0">
+                          <a:solidFill>
+                            <a:srgbClr val="333333"/>
+                          </a:solidFill>
+                          <a:latin typeface="WenQuanYi Micro Hei"/>
+                        </a:rPr>
+                        <a:t>张卓、高辰辰、随圣博、安淑娟</a:t>
                       </a:r>
                     </a:p>
                   </a:txBody>
@@ -15315,67 +17560,67 @@
                   </a:tcPr>
                 </a:tc>
               </a:tr>
-              <a:tr h="325120">
-                <a:tc>
-                  <a:txBody>
-                    <a:bodyPr/>
-                    <a:lstStyle/>
-                    <a:p>
-                      <a:pPr algn="l"/>
-                      <a:r>
-                        <a:rPr sz="1000" b="0">
-                          <a:solidFill>
-                            <a:srgbClr val="333333"/>
-                          </a:solidFill>
-                          <a:latin typeface="WenQuanYi Micro Hei"/>
-                        </a:rPr>
-                        <a:t>E</a:t>
-                      </a:r>
-                    </a:p>
-                  </a:txBody>
-                  <a:tcPr>
-                    <a:solidFill>
-                      <a:srgbClr val="FFFFFF"/>
-                    </a:solidFill>
-                  </a:tcPr>
-                </a:tc>
-                <a:tc>
-                  <a:txBody>
-                    <a:bodyPr/>
-                    <a:lstStyle/>
-                    <a:p>
-                      <a:pPr algn="l"/>
-                      <a:r>
-                        <a:rPr sz="1000" b="0">
-                          <a:solidFill>
-                            <a:srgbClr val="333333"/>
-                          </a:solidFill>
-                          <a:latin typeface="WenQuanYi Micro Hei"/>
-                        </a:rPr>
-                        <a:t>晚宴布置 / 席卡</a:t>
-                      </a:r>
-                    </a:p>
-                  </a:txBody>
-                  <a:tcPr>
-                    <a:solidFill>
-                      <a:srgbClr val="FFFFFF"/>
-                    </a:solidFill>
-                  </a:tcPr>
-                </a:tc>
-                <a:tc>
-                  <a:txBody>
-                    <a:bodyPr/>
-                    <a:lstStyle/>
-                    <a:p>
-                      <a:pPr algn="l"/>
-                      <a:r>
-                        <a:rPr sz="1000" b="0">
-                          <a:solidFill>
-                            <a:srgbClr val="333333"/>
-                          </a:solidFill>
-                          <a:latin typeface="WenQuanYi Micro Hei"/>
-                        </a:rPr>
-                        <a:t>张卓、高辰辰、随圣博、安淑娟（13661612711 总校对）</a:t>
+              <a:tr h="292608">
+                <a:tc>
+                  <a:txBody>
+                    <a:bodyPr/>
+                    <a:lstStyle/>
+                    <a:p>
+                      <a:pPr algn="l"/>
+                      <a:r>
+                        <a:rPr sz="900" b="0">
+                          <a:solidFill>
+                            <a:srgbClr val="333333"/>
+                          </a:solidFill>
+                          <a:latin typeface="WenQuanYi Micro Hei"/>
+                        </a:rPr>
+                        <a:t>F</a:t>
+                      </a:r>
+                    </a:p>
+                  </a:txBody>
+                  <a:tcPr>
+                    <a:solidFill>
+                      <a:srgbClr val="FFFFFF"/>
+                    </a:solidFill>
+                  </a:tcPr>
+                </a:tc>
+                <a:tc>
+                  <a:txBody>
+                    <a:bodyPr/>
+                    <a:lstStyle/>
+                    <a:p>
+                      <a:pPr algn="l"/>
+                      <a:r>
+                        <a:rPr sz="900" b="0">
+                          <a:solidFill>
+                            <a:srgbClr val="333333"/>
+                          </a:solidFill>
+                          <a:latin typeface="WenQuanYi Micro Hei"/>
+                        </a:rPr>
+                        <a:t>印刷 / 物料</a:t>
+                      </a:r>
+                    </a:p>
+                  </a:txBody>
+                  <a:tcPr>
+                    <a:solidFill>
+                      <a:srgbClr val="FFFFFF"/>
+                    </a:solidFill>
+                  </a:tcPr>
+                </a:tc>
+                <a:tc>
+                  <a:txBody>
+                    <a:bodyPr/>
+                    <a:lstStyle/>
+                    <a:p>
+                      <a:pPr algn="l"/>
+                      <a:r>
+                        <a:rPr sz="900" b="0">
+                          <a:solidFill>
+                            <a:srgbClr val="333333"/>
+                          </a:solidFill>
+                          <a:latin typeface="WenQuanYi Micro Hei"/>
+                        </a:rPr>
+                        <a:t>朱俊峰、彭常丽、张蒙（席卡责任人）</a:t>
                       </a:r>
                     </a:p>
                   </a:txBody>
@@ -15386,21 +17631,21 @@
                   </a:tcPr>
                 </a:tc>
               </a:tr>
-              <a:tr h="325120">
-                <a:tc>
-                  <a:txBody>
-                    <a:bodyPr/>
-                    <a:lstStyle/>
-                    <a:p>
-                      <a:pPr algn="l"/>
-                      <a:r>
-                        <a:rPr sz="1000" b="0">
-                          <a:solidFill>
-                            <a:srgbClr val="333333"/>
-                          </a:solidFill>
-                          <a:latin typeface="WenQuanYi Micro Hei"/>
-                        </a:rPr>
-                        <a:t>F</a:t>
+              <a:tr h="292608">
+                <a:tc>
+                  <a:txBody>
+                    <a:bodyPr/>
+                    <a:lstStyle/>
+                    <a:p>
+                      <a:pPr algn="l"/>
+                      <a:r>
+                        <a:rPr sz="900" b="0">
+                          <a:solidFill>
+                            <a:srgbClr val="333333"/>
+                          </a:solidFill>
+                          <a:latin typeface="WenQuanYi Micro Hei"/>
+                        </a:rPr>
+                        <a:t>G</a:t>
                       </a:r>
                     </a:p>
                   </a:txBody>
@@ -15417,13 +17662,13 @@
                     <a:p>
                       <a:pPr algn="l"/>
                       <a:r>
-                        <a:rPr sz="1000" b="0">
-                          <a:solidFill>
-                            <a:srgbClr val="333333"/>
-                          </a:solidFill>
-                          <a:latin typeface="WenQuanYi Micro Hei"/>
-                        </a:rPr>
-                        <a:t>印刷 / 物料</a:t>
+                        <a:rPr sz="900" b="0">
+                          <a:solidFill>
+                            <a:srgbClr val="333333"/>
+                          </a:solidFill>
+                          <a:latin typeface="WenQuanYi Micro Hei"/>
+                        </a:rPr>
+                        <a:t>现场调度 / 摄影支援</a:t>
                       </a:r>
                     </a:p>
                   </a:txBody>
@@ -15440,13 +17685,13 @@
                     <a:p>
                       <a:pPr algn="l"/>
                       <a:r>
-                        <a:rPr sz="1000" b="0">
-                          <a:solidFill>
-                            <a:srgbClr val="333333"/>
-                          </a:solidFill>
-                          <a:latin typeface="WenQuanYi Micro Hei"/>
-                        </a:rPr>
-                        <a:t>朱俊峰、彭常丽、张蒙（席卡责任人）</a:t>
+                        <a:rPr sz="900" b="0">
+                          <a:solidFill>
+                            <a:srgbClr val="333333"/>
+                          </a:solidFill>
+                          <a:latin typeface="WenQuanYi Micro Hei"/>
+                        </a:rPr>
+                        <a:t>刘严、李兵、蔡萍、马磊</a:t>
                       </a:r>
                     </a:p>
                   </a:txBody>
@@ -15457,144 +17702,73 @@
                   </a:tcPr>
                 </a:tc>
               </a:tr>
-              <a:tr h="325120">
-                <a:tc>
-                  <a:txBody>
-                    <a:bodyPr/>
-                    <a:lstStyle/>
-                    <a:p>
-                      <a:pPr algn="l"/>
-                      <a:r>
-                        <a:rPr sz="1000" b="0">
-                          <a:solidFill>
-                            <a:srgbClr val="333333"/>
-                          </a:solidFill>
-                          <a:latin typeface="WenQuanYi Micro Hei"/>
-                        </a:rPr>
-                        <a:t>G</a:t>
-                      </a:r>
-                    </a:p>
-                  </a:txBody>
-                  <a:tcPr>
-                    <a:solidFill>
-                      <a:srgbClr val="FFFFFF"/>
-                    </a:solidFill>
-                  </a:tcPr>
-                </a:tc>
-                <a:tc>
-                  <a:txBody>
-                    <a:bodyPr/>
-                    <a:lstStyle/>
-                    <a:p>
-                      <a:pPr algn="l"/>
-                      <a:r>
-                        <a:rPr sz="1000" b="0">
-                          <a:solidFill>
-                            <a:srgbClr val="333333"/>
-                          </a:solidFill>
-                          <a:latin typeface="WenQuanYi Micro Hei"/>
-                        </a:rPr>
-                        <a:t>现场调度 / 摄影支援</a:t>
-                      </a:r>
-                    </a:p>
-                  </a:txBody>
-                  <a:tcPr>
-                    <a:solidFill>
-                      <a:srgbClr val="FFFFFF"/>
-                    </a:solidFill>
-                  </a:tcPr>
-                </a:tc>
-                <a:tc>
-                  <a:txBody>
-                    <a:bodyPr/>
-                    <a:lstStyle/>
-                    <a:p>
-                      <a:pPr algn="l"/>
-                      <a:r>
-                        <a:rPr sz="1000" b="0">
-                          <a:solidFill>
-                            <a:srgbClr val="333333"/>
-                          </a:solidFill>
-                          <a:latin typeface="WenQuanYi Micro Hei"/>
-                        </a:rPr>
-                        <a:t>刘严、李兵、蔡萍、马磊</a:t>
-                      </a:r>
-                    </a:p>
-                  </a:txBody>
-                  <a:tcPr>
-                    <a:solidFill>
-                      <a:srgbClr val="FFFFFF"/>
-                    </a:solidFill>
-                  </a:tcPr>
-                </a:tc>
-              </a:tr>
-              <a:tr h="325120">
-                <a:tc>
-                  <a:txBody>
-                    <a:bodyPr/>
-                    <a:lstStyle/>
-                    <a:p>
-                      <a:pPr algn="l"/>
-                      <a:r>
-                        <a:rPr sz="1000" b="0">
-                          <a:solidFill>
-                            <a:srgbClr val="333333"/>
-                          </a:solidFill>
-                          <a:latin typeface="WenQuanYi Micro Hei"/>
-                        </a:rPr>
-                        <a:t>外部</a:t>
-                      </a:r>
-                    </a:p>
-                  </a:txBody>
-                  <a:tcPr>
-                    <a:solidFill>
-                      <a:srgbClr val="D9E1F2"/>
-                    </a:solidFill>
-                  </a:tcPr>
-                </a:tc>
-                <a:tc>
-                  <a:txBody>
-                    <a:bodyPr/>
-                    <a:lstStyle/>
-                    <a:p>
-                      <a:pPr algn="l"/>
-                      <a:r>
-                        <a:rPr sz="1000" b="0">
-                          <a:solidFill>
-                            <a:srgbClr val="333333"/>
-                          </a:solidFill>
-                          <a:latin typeface="WenQuanYi Micro Hei"/>
-                        </a:rPr>
-                        <a:t>总联系 / 摄影 / 协作</a:t>
-                      </a:r>
-                    </a:p>
-                  </a:txBody>
-                  <a:tcPr>
-                    <a:solidFill>
-                      <a:srgbClr val="D9E1F2"/>
-                    </a:solidFill>
-                  </a:tcPr>
-                </a:tc>
-                <a:tc>
-                  <a:txBody>
-                    <a:bodyPr/>
-                    <a:lstStyle/>
-                    <a:p>
-                      <a:pPr algn="l"/>
-                      <a:r>
-                        <a:rPr sz="1000" b="0">
-                          <a:solidFill>
-                            <a:srgbClr val="333333"/>
-                          </a:solidFill>
-                          <a:latin typeface="WenQuanYi Micro Hei"/>
-                        </a:rPr>
-                        <a:t>胡继刚 13262607888、洪小燕（摄影）15021488859、江江、皮尔德小C</a:t>
-                      </a:r>
-                    </a:p>
-                  </a:txBody>
-                  <a:tcPr>
-                    <a:solidFill>
-                      <a:srgbClr val="D9E1F2"/>
+              <a:tr h="292608">
+                <a:tc>
+                  <a:txBody>
+                    <a:bodyPr/>
+                    <a:lstStyle/>
+                    <a:p>
+                      <a:pPr algn="l"/>
+                      <a:r>
+                        <a:rPr sz="900" b="0">
+                          <a:solidFill>
+                            <a:srgbClr val="333333"/>
+                          </a:solidFill>
+                          <a:latin typeface="WenQuanYi Micro Hei"/>
+                        </a:rPr>
+                        <a:t>外部协作</a:t>
+                      </a:r>
+                    </a:p>
+                  </a:txBody>
+                  <a:tcPr>
+                    <a:solidFill>
+                      <a:srgbClr val="FFFFFF"/>
+                    </a:solidFill>
+                  </a:tcPr>
+                </a:tc>
+                <a:tc>
+                  <a:txBody>
+                    <a:bodyPr/>
+                    <a:lstStyle/>
+                    <a:p>
+                      <a:pPr algn="l"/>
+                      <a:r>
+                        <a:rPr sz="900" b="0">
+                          <a:solidFill>
+                            <a:srgbClr val="333333"/>
+                          </a:solidFill>
+                          <a:latin typeface="WenQuanYi Micro Hei"/>
+                        </a:rPr>
+                        <a:t>参照分工表</a:t>
+                      </a:r>
+                    </a:p>
+                  </a:txBody>
+                  <a:tcPr>
+                    <a:solidFill>
+                      <a:srgbClr val="FFFFFF"/>
+                    </a:solidFill>
+                  </a:tcPr>
+                </a:tc>
+                <a:tc>
+                  <a:txBody>
+                    <a:bodyPr/>
+                    <a:lstStyle/>
+                    <a:p>
+                      <a:pPr algn="l"/>
+                      <a:r>
+                        <a:rPr sz="900" b="0">
+                          <a:solidFill>
+                            <a:srgbClr val="333333"/>
+                          </a:solidFill>
+                          <a:latin typeface="WenQuanYi Micro Hei"/>
+                        </a:rPr>
+                        <a:t>皮尔德小C、江江</a:t>
+                      </a:r>
+                    </a:p>
+                  </a:txBody>
+                  <a:tcPr>
+                    <a:solidFill>
+                      <a:srgbClr val="FFFFFF"/>
                     </a:solidFill>
                   </a:tcPr>
                 </a:tc>
@@ -15789,7 +17963,7 @@
         </p:nvGraphicFramePr>
         <p:xfrm>
           <a:off x="365760" y="1005840"/>
-          <a:ext cx="11429997" cy="5212080"/>
+          <a:ext cx="11430000" cy="5212080"/>
         </p:xfrm>
         <a:graphic>
           <a:graphicData uri="http://schemas.openxmlformats.org/drawingml/2006/table">
@@ -15798,12 +17972,12 @@
                 <a:tableStyleId>{5C22544A-7EE6-4342-B048-85BDC9FD1C3A}</a:tableStyleId>
               </a:tblPr>
               <a:tblGrid>
-                <a:gridCol w="540000"/>
-                <a:gridCol w="2429999"/>
-                <a:gridCol w="2879999"/>
-                <a:gridCol w="1620000"/>
-                <a:gridCol w="2699999"/>
-                <a:gridCol w="1260000"/>
+                <a:gridCol w="457200"/>
+                <a:gridCol w="2286000"/>
+                <a:gridCol w="3200400"/>
+                <a:gridCol w="1463040"/>
+                <a:gridCol w="2560320"/>
+                <a:gridCol w="1463040"/>
               </a:tblGrid>
               <a:tr h="473825">
                 <a:tc>
@@ -15888,7 +18062,7 @@
                           </a:solidFill>
                           <a:latin typeface="WenQuanYi Micro Hei"/>
                         </a:rPr>
-                        <a:t>送达</a:t>
+                        <a:t>时间窗</a:t>
                       </a:r>
                     </a:p>
                   </a:txBody>
@@ -16005,53 +18179,53 @@
                           </a:solidFill>
                           <a:latin typeface="WenQuanYi Micro Hei"/>
                         </a:rPr>
-                        <a:t>【绿城·潮鸣】KT 板 + 邀请码核验物料</a:t>
-                      </a:r>
-                    </a:p>
-                  </a:txBody>
-                  <a:tcPr>
-                    <a:solidFill>
-                      <a:srgbClr val="FFFFFF"/>
-                    </a:solidFill>
-                  </a:tcPr>
-                </a:tc>
-                <a:tc>
-                  <a:txBody>
-                    <a:bodyPr/>
-                    <a:lstStyle/>
-                    <a:p>
-                      <a:pPr algn="l"/>
-                      <a:r>
-                        <a:rPr sz="1000" b="0">
-                          <a:solidFill>
-                            <a:srgbClr val="333333"/>
-                          </a:solidFill>
-                          <a:latin typeface="WenQuanYi Micro Hei"/>
-                        </a:rPr>
-                        <a:t>5/22 09:00</a:t>
-                      </a:r>
-                    </a:p>
-                  </a:txBody>
-                  <a:tcPr>
-                    <a:solidFill>
-                      <a:srgbClr val="FFFFFF"/>
-                    </a:solidFill>
-                  </a:tcPr>
-                </a:tc>
-                <a:tc>
-                  <a:txBody>
-                    <a:bodyPr/>
-                    <a:lstStyle/>
-                    <a:p>
-                      <a:pPr algn="l"/>
-                      <a:r>
-                        <a:rPr sz="1000" b="0">
-                          <a:solidFill>
-                            <a:srgbClr val="333333"/>
-                          </a:solidFill>
-                          <a:latin typeface="WenQuanYi Micro Hei"/>
-                        </a:rPr>
-                        <a:t>待补</a:t>
+                        <a:t>品宣产品（KT 板 / 易拉宝 / 宣传册）</a:t>
+                      </a:r>
+                    </a:p>
+                  </a:txBody>
+                  <a:tcPr>
+                    <a:solidFill>
+                      <a:srgbClr val="FFFFFF"/>
+                    </a:solidFill>
+                  </a:tcPr>
+                </a:tc>
+                <a:tc>
+                  <a:txBody>
+                    <a:bodyPr/>
+                    <a:lstStyle/>
+                    <a:p>
+                      <a:pPr algn="l"/>
+                      <a:r>
+                        <a:rPr sz="1000" b="0">
+                          <a:solidFill>
+                            <a:srgbClr val="333333"/>
+                          </a:solidFill>
+                          <a:latin typeface="WenQuanYi Micro Hei"/>
+                        </a:rPr>
+                        <a:t>09:00-10:00</a:t>
+                      </a:r>
+                    </a:p>
+                  </a:txBody>
+                  <a:tcPr>
+                    <a:solidFill>
+                      <a:srgbClr val="FFFFFF"/>
+                    </a:solidFill>
+                  </a:tcPr>
+                </a:tc>
+                <a:tc>
+                  <a:txBody>
+                    <a:bodyPr/>
+                    <a:lstStyle/>
+                    <a:p>
+                      <a:pPr algn="l"/>
+                      <a:r>
+                        <a:rPr sz="1000" b="0">
+                          <a:solidFill>
+                            <a:srgbClr val="333333"/>
+                          </a:solidFill>
+                          <a:latin typeface="WenQuanYi Micro Hei"/>
+                        </a:rPr>
+                        <a:t>缪川 / 笪浩</a:t>
                       </a:r>
                     </a:p>
                   </a:txBody>
@@ -16145,7 +18319,7 @@
                           </a:solidFill>
                           <a:latin typeface="WenQuanYi Micro Hei"/>
                         </a:rPr>
-                        <a:t>晚宴定制礼品 500 份</a:t>
+                        <a:t>定制礼品 500 份</a:t>
                       </a:r>
                     </a:p>
                   </a:txBody>
@@ -16168,7 +18342,7 @@
                           </a:solidFill>
                           <a:latin typeface="WenQuanYi Micro Hei"/>
                         </a:rPr>
-                        <a:t>5/22 14:00</a:t>
+                        <a:t>09:00-11:00</a:t>
                       </a:r>
                     </a:p>
                   </a:txBody>
@@ -16191,7 +18365,7 @@
                           </a:solidFill>
                           <a:latin typeface="WenQuanYi Micro Hei"/>
                         </a:rPr>
-                        <a:t>待补</a:t>
+                        <a:t>缪川 / 笪浩</a:t>
                       </a:r>
                     </a:p>
                   </a:txBody>
@@ -16285,30 +18459,30 @@
                           </a:solidFill>
                           <a:latin typeface="WenQuanYi Micro Hei"/>
                         </a:rPr>
-                        <a:t>易拉宝 / 礼品</a:t>
-                      </a:r>
-                    </a:p>
-                  </a:txBody>
-                  <a:tcPr>
-                    <a:solidFill>
-                      <a:srgbClr val="FFFFFF"/>
-                    </a:solidFill>
-                  </a:tcPr>
-                </a:tc>
-                <a:tc>
-                  <a:txBody>
-                    <a:bodyPr/>
-                    <a:lstStyle/>
-                    <a:p>
-                      <a:pPr algn="l"/>
-                      <a:r>
-                        <a:rPr sz="1000" b="0">
-                          <a:solidFill>
-                            <a:srgbClr val="333333"/>
-                          </a:solidFill>
-                          <a:latin typeface="WenQuanYi Micro Hei"/>
-                        </a:rPr>
-                        <a:t>5/22 10:00</a:t>
+                        <a:t>易拉宝 + 礼品</a:t>
+                      </a:r>
+                    </a:p>
+                  </a:txBody>
+                  <a:tcPr>
+                    <a:solidFill>
+                      <a:srgbClr val="FFFFFF"/>
+                    </a:solidFill>
+                  </a:tcPr>
+                </a:tc>
+                <a:tc>
+                  <a:txBody>
+                    <a:bodyPr/>
+                    <a:lstStyle/>
+                    <a:p>
+                      <a:pPr algn="l"/>
+                      <a:r>
+                        <a:rPr sz="1000" b="0">
+                          <a:solidFill>
+                            <a:srgbClr val="333333"/>
+                          </a:solidFill>
+                          <a:latin typeface="WenQuanYi Micro Hei"/>
+                        </a:rPr>
+                        <a:t>09:00-11:00</a:t>
                       </a:r>
                     </a:p>
                   </a:txBody>
@@ -16402,7 +18576,7 @@
                           </a:solidFill>
                           <a:latin typeface="WenQuanYi Micro Hei"/>
                         </a:rPr>
-                        <a:t>福布斯中国 AI 评选委员会（战略）</a:t>
+                        <a:t>★ 华为鸿蒙汽车（特约·新增）</a:t>
                       </a:r>
                     </a:p>
                   </a:txBody>
@@ -16425,7 +18599,7 @@
                           </a:solidFill>
                           <a:latin typeface="WenQuanYi Micro Hei"/>
                         </a:rPr>
-                        <a:t>★ 奖杯 / 证书 / 颁奖背景板</a:t>
+                        <a:t>★ 展车 + 易拉宝 + 礼品</a:t>
                       </a:r>
                     </a:p>
                   </a:txBody>
@@ -16448,7 +18622,7 @@
                           </a:solidFill>
                           <a:latin typeface="WenQuanYi Micro Hei"/>
                         </a:rPr>
-                        <a:t>5/22 12:00 必到</a:t>
+                        <a:t>09:00-10:00</a:t>
                       </a:r>
                     </a:p>
                   </a:txBody>
@@ -16494,7 +18668,7 @@
                           </a:solidFill>
                           <a:latin typeface="WenQuanYi Micro Hei"/>
                         </a:rPr>
-                        <a:t>张蒙</a:t>
+                        <a:t>葛九明、李正超</a:t>
                       </a:r>
                     </a:p>
                   </a:txBody>
@@ -16565,76 +18739,76 @@
                           </a:solidFill>
                           <a:latin typeface="WenQuanYi Micro Hei"/>
                         </a:rPr>
-                        <a:t>展车 / 易拉宝 / 礼品</a:t>
-                      </a:r>
-                    </a:p>
-                  </a:txBody>
-                  <a:tcPr>
-                    <a:solidFill>
-                      <a:srgbClr val="FFFFFF"/>
-                    </a:solidFill>
-                  </a:tcPr>
-                </a:tc>
-                <a:tc>
-                  <a:txBody>
-                    <a:bodyPr/>
-                    <a:lstStyle/>
-                    <a:p>
-                      <a:pPr algn="l"/>
-                      <a:r>
-                        <a:rPr sz="1000" b="0">
-                          <a:solidFill>
-                            <a:srgbClr val="333333"/>
-                          </a:solidFill>
-                          <a:latin typeface="WenQuanYi Micro Hei"/>
-                        </a:rPr>
-                        <a:t>5/22 08:00 / 10:00</a:t>
-                      </a:r>
-                    </a:p>
-                  </a:txBody>
-                  <a:tcPr>
-                    <a:solidFill>
-                      <a:srgbClr val="FFFFFF"/>
-                    </a:solidFill>
-                  </a:tcPr>
-                </a:tc>
-                <a:tc>
-                  <a:txBody>
-                    <a:bodyPr/>
-                    <a:lstStyle/>
-                    <a:p>
-                      <a:pPr algn="l"/>
-                      <a:r>
-                        <a:rPr sz="1000" b="0">
-                          <a:solidFill>
-                            <a:srgbClr val="333333"/>
-                          </a:solidFill>
-                          <a:latin typeface="WenQuanYi Micro Hei"/>
-                        </a:rPr>
-                        <a:t>待补</a:t>
-                      </a:r>
-                    </a:p>
-                  </a:txBody>
-                  <a:tcPr>
-                    <a:solidFill>
-                      <a:srgbClr val="FFFFFF"/>
-                    </a:solidFill>
-                  </a:tcPr>
-                </a:tc>
-                <a:tc>
-                  <a:txBody>
-                    <a:bodyPr/>
-                    <a:lstStyle/>
-                    <a:p>
-                      <a:pPr algn="l"/>
-                      <a:r>
-                        <a:rPr sz="1000" b="0">
-                          <a:solidFill>
-                            <a:srgbClr val="333333"/>
-                          </a:solidFill>
-                          <a:latin typeface="WenQuanYi Micro Hei"/>
-                        </a:rPr>
-                        <a:t>葛九明、李正超</a:t>
+                        <a:t>易拉宝 + 礼品（不展车）</a:t>
+                      </a:r>
+                    </a:p>
+                  </a:txBody>
+                  <a:tcPr>
+                    <a:solidFill>
+                      <a:srgbClr val="FFFFFF"/>
+                    </a:solidFill>
+                  </a:tcPr>
+                </a:tc>
+                <a:tc>
+                  <a:txBody>
+                    <a:bodyPr/>
+                    <a:lstStyle/>
+                    <a:p>
+                      <a:pPr algn="l"/>
+                      <a:r>
+                        <a:rPr sz="1000" b="0">
+                          <a:solidFill>
+                            <a:srgbClr val="333333"/>
+                          </a:solidFill>
+                          <a:latin typeface="WenQuanYi Micro Hei"/>
+                        </a:rPr>
+                        <a:t>09:00-11:00</a:t>
+                      </a:r>
+                    </a:p>
+                  </a:txBody>
+                  <a:tcPr>
+                    <a:solidFill>
+                      <a:srgbClr val="FFFFFF"/>
+                    </a:solidFill>
+                  </a:tcPr>
+                </a:tc>
+                <a:tc>
+                  <a:txBody>
+                    <a:bodyPr/>
+                    <a:lstStyle/>
+                    <a:p>
+                      <a:pPr algn="l"/>
+                      <a:r>
+                        <a:rPr sz="1000" b="0">
+                          <a:solidFill>
+                            <a:srgbClr val="333333"/>
+                          </a:solidFill>
+                          <a:latin typeface="WenQuanYi Micro Hei"/>
+                        </a:rPr>
+                        <a:t>李睿</a:t>
+                      </a:r>
+                    </a:p>
+                  </a:txBody>
+                  <a:tcPr>
+                    <a:solidFill>
+                      <a:srgbClr val="FFFFFF"/>
+                    </a:solidFill>
+                  </a:tcPr>
+                </a:tc>
+                <a:tc>
+                  <a:txBody>
+                    <a:bodyPr/>
+                    <a:lstStyle/>
+                    <a:p>
+                      <a:pPr algn="l"/>
+                      <a:r>
+                        <a:rPr sz="1000" b="0">
+                          <a:solidFill>
+                            <a:srgbClr val="333333"/>
+                          </a:solidFill>
+                          <a:latin typeface="WenQuanYi Micro Hei"/>
+                        </a:rPr>
+                        <a:t>葛九明</a:t>
                       </a:r>
                     </a:p>
                   </a:txBody>
@@ -16705,7 +18879,7 @@
                           </a:solidFill>
                           <a:latin typeface="WenQuanYi Micro Hei"/>
                         </a:rPr>
-                        <a:t>易拉宝 / 客户伴手礼</a:t>
+                        <a:t>易拉宝 + 礼品</a:t>
                       </a:r>
                     </a:p>
                   </a:txBody>
@@ -16728,7 +18902,7 @@
                           </a:solidFill>
                           <a:latin typeface="WenQuanYi Micro Hei"/>
                         </a:rPr>
-                        <a:t>5/22 10:00</a:t>
+                        <a:t>09:00-11:00</a:t>
                       </a:r>
                     </a:p>
                   </a:txBody>
@@ -16868,30 +19042,30 @@
                           </a:solidFill>
                           <a:latin typeface="WenQuanYi Micro Hei"/>
                         </a:rPr>
-                        <a:t>5/22 09:00</a:t>
-                      </a:r>
-                    </a:p>
-                  </a:txBody>
-                  <a:tcPr>
-                    <a:solidFill>
-                      <a:srgbClr val="FFFFFF"/>
-                    </a:solidFill>
-                  </a:tcPr>
-                </a:tc>
-                <a:tc>
-                  <a:txBody>
-                    <a:bodyPr/>
-                    <a:lstStyle/>
-                    <a:p>
-                      <a:pPr algn="l"/>
-                      <a:r>
-                        <a:rPr sz="1000" b="0">
-                          <a:solidFill>
-                            <a:srgbClr val="333333"/>
-                          </a:solidFill>
-                          <a:latin typeface="WenQuanYi Micro Hei"/>
-                        </a:rPr>
-                        <a:t>待补</a:t>
+                        <a:t>09:00-11:00</a:t>
+                      </a:r>
+                    </a:p>
+                  </a:txBody>
+                  <a:tcPr>
+                    <a:solidFill>
+                      <a:srgbClr val="FFFFFF"/>
+                    </a:solidFill>
+                  </a:tcPr>
+                </a:tc>
+                <a:tc>
+                  <a:txBody>
+                    <a:bodyPr/>
+                    <a:lstStyle/>
+                    <a:p>
+                      <a:pPr algn="l"/>
+                      <a:r>
+                        <a:rPr sz="1000" b="0">
+                          <a:solidFill>
+                            <a:srgbClr val="333333"/>
+                          </a:solidFill>
+                          <a:latin typeface="WenQuanYi Micro Hei"/>
+                        </a:rPr>
+                        <a:t>孟高举</a:t>
                       </a:r>
                     </a:p>
                   </a:txBody>
@@ -17008,7 +19182,7 @@
                           </a:solidFill>
                           <a:latin typeface="WenQuanYi Micro Hei"/>
                         </a:rPr>
-                        <a:t>5/22 09:00</a:t>
+                        <a:t>09:00-11:00</a:t>
                       </a:r>
                     </a:p>
                   </a:txBody>
@@ -17031,7 +19205,7 @@
                           </a:solidFill>
                           <a:latin typeface="WenQuanYi Micro Hei"/>
                         </a:rPr>
-                        <a:t>待补</a:t>
+                        <a:t>鲁菲菲</a:t>
                       </a:r>
                     </a:p>
                   </a:txBody>
@@ -17148,7 +19322,7 @@
                           </a:solidFill>
                           <a:latin typeface="WenQuanYi Micro Hei"/>
                         </a:rPr>
-                        <a:t>5/22 10:00</a:t>
+                        <a:t>09:00-11:00</a:t>
                       </a:r>
                     </a:p>
                   </a:txBody>
@@ -17242,7 +19416,7 @@
                           </a:solidFill>
                           <a:latin typeface="WenQuanYi Micro Hei"/>
                         </a:rPr>
-                        <a:t>古井贡酒·年份原浆</a:t>
+                        <a:t>古井贡酒（赞助）</a:t>
                       </a:r>
                     </a:p>
                   </a:txBody>
@@ -17265,7 +19439,7 @@
                           </a:solidFill>
                           <a:latin typeface="WenQuanYi Micro Hei"/>
                         </a:rPr>
-                        <a:t>晚宴用酒 50 桌×2 + 礼盒</a:t>
+                        <a:t>晚宴用酒 2 瓶 × 10 桌 = 20 瓶 + 礼盒</a:t>
                       </a:r>
                     </a:p>
                   </a:txBody>
@@ -17288,7 +19462,7 @@
                           </a:solidFill>
                           <a:latin typeface="WenQuanYi Micro Hei"/>
                         </a:rPr>
-                        <a:t>5/22 14:00</a:t>
+                        <a:t>09:00-11:00</a:t>
                       </a:r>
                     </a:p>
                   </a:txBody>
@@ -17311,7 +19485,7 @@
                           </a:solidFill>
                           <a:latin typeface="WenQuanYi Micro Hei"/>
                         </a:rPr>
-                        <a:t>待补</a:t>
+                        <a:t>李旭欢</a:t>
                       </a:r>
                     </a:p>
                   </a:txBody>
@@ -17349,6 +19523,41 @@
           </a:graphicData>
         </a:graphic>
       </p:graphicFrame>
+      <p:sp>
+        <p:nvSpPr>
+          <p:cNvPr id="7" name="TextBox 6"/>
+          <p:cNvSpPr txBox="1"/>
+          <p:nvPr/>
+        </p:nvSpPr>
+        <p:spPr>
+          <a:xfrm>
+            <a:off x="365760" y="6355080"/>
+            <a:ext cx="11430000" cy="228600"/>
+          </a:xfrm>
+          <a:prstGeom prst="rect">
+            <a:avLst/>
+          </a:prstGeom>
+          <a:noFill/>
+        </p:spPr>
+        <p:txBody>
+          <a:bodyPr wrap="square" anchor="t">
+            <a:spAutoFit/>
+          </a:bodyPr>
+          <a:lstStyle/>
+          <a:p>
+            <a:pPr algn="l"/>
+            <a:r>
+              <a:rPr sz="1100" b="1">
+                <a:solidFill>
+                  <a:srgbClr val="C0392B"/>
+                </a:solidFill>
+                <a:latin typeface="WenQuanYi Micro Hei"/>
+              </a:rPr>
+              <a:t>★ 统一入场时间窗 5/22 09:00-11:00，按摆放顺序图分区就位；福布斯中国 AI 评选委员会已退出。</a:t>
+            </a:r>
+          </a:p>
+        </p:txBody>
+      </p:sp>
     </p:spTree>
   </p:cSld>
   <p:clrMapOvr>
